--- a/docs/presentacion/VigIA-Equipo80.pptx
+++ b/docs/presentacion/VigIA-Equipo80.pptx
@@ -9,6 +9,7 @@
   </p:notesMasterIdLst>
   <p:sldIdLst>
     <p:sldId id="256" r:id="rId2"/>
+    <p:sldId id="277" r:id="rId28"/>
     <p:sldId id="257" r:id="rId3"/>
     <p:sldId id="258" r:id="rId4"/>
     <p:sldId id="259" r:id="rId5"/>
@@ -20478,6 +20479,56 @@
 </p:sld>
 </file>
 
+<file path=ppt/slides/slide22.xml><?xml version="1.0" encoding="utf-8"?>
+<p:sld xmlns:a="http://schemas.openxmlformats.org/drawingml/2006/main" xmlns:p="http://schemas.openxmlformats.org/presentationml/2006/main" xmlns:r="http://schemas.openxmlformats.org/officeDocument/2006/relationships">
+  <p:cSld>
+    <p:bg>
+      <p:bgPr>
+        <a:solidFill>
+          <a:srgbClr val="0F1A34"/>
+        </a:solidFill>
+        <a:effectLst/>
+      </p:bgPr>
+    </p:bg>
+    <p:spTree>
+      <p:nvGrpSpPr>
+        <p:cNvPr id="1" name=""/>
+        <p:cNvGrpSpPr/>
+        <p:nvPr/>
+      </p:nvGrpSpPr>
+      <p:grpSpPr/>
+      <p:pic>
+        <p:nvPicPr>
+          <p:cNvPr id="2" name="Picture 1" descr="drone_scan.gif"/>
+          <p:cNvPicPr>
+            <a:picLocks noChangeAspect="1"/>
+          </p:cNvPicPr>
+          <p:nvPr/>
+        </p:nvPicPr>
+        <p:blipFill>
+          <a:blip r:embed="rId2"/>
+          <a:stretch>
+            <a:fillRect/>
+          </a:stretch>
+        </p:blipFill>
+        <p:spPr>
+          <a:xfrm>
+            <a:off x="2185481" y="365760"/>
+            <a:ext cx="7821038" cy="6126480"/>
+          </a:xfrm>
+          <a:prstGeom prst="rect">
+            <a:avLst/>
+          </a:prstGeom>
+        </p:spPr>
+      </p:pic>
+    </p:spTree>
+  </p:cSld>
+  <p:clrMapOvr>
+    <a:masterClrMapping/>
+  </p:clrMapOvr>
+</p:sld>
+</file>
+
 <file path=ppt/slides/slide3.xml><?xml version="1.0" encoding="utf-8"?>
 <p:sld xmlns:a="http://schemas.openxmlformats.org/drawingml/2006/main" xmlns:r="http://schemas.openxmlformats.org/officeDocument/2006/relationships" xmlns:p="http://schemas.openxmlformats.org/presentationml/2006/main">
   <p:cSld name="Slide 3">

--- a/docs/presentacion/VigIA-Equipo80.pptx
+++ b/docs/presentacion/VigIA-Equipo80.pptx
@@ -16,6 +16,7 @@
     <p:sldId id="260" r:id="rId6"/>
     <p:sldId id="261" r:id="rId7"/>
     <p:sldId id="262" r:id="rId8"/>
+    <p:sldId id="278" r:id="rId29"/>
     <p:sldId id="263" r:id="rId9"/>
     <p:sldId id="264" r:id="rId10"/>
     <p:sldId id="265" r:id="rId11"/>
@@ -3146,6 +3147,1866 @@
 
 <file path=ppt/slides/slide10.xml><?xml version="1.0" encoding="utf-8"?>
 <p:sld xmlns:a="http://schemas.openxmlformats.org/drawingml/2006/main" xmlns:r="http://schemas.openxmlformats.org/officeDocument/2006/relationships" xmlns:p="http://schemas.openxmlformats.org/presentationml/2006/main">
+  <p:cSld name="Slide 8">
+    <p:bg>
+      <p:bgPr>
+        <a:solidFill>
+          <a:srgbClr val="FFFFFF"/>
+        </a:solidFill>
+        <a:effectLst/>
+      </p:bgPr>
+    </p:bg>
+    <p:spTree>
+      <p:nvGrpSpPr>
+        <p:cNvPr id="1" name=""/>
+        <p:cNvGrpSpPr/>
+        <p:nvPr/>
+      </p:nvGrpSpPr>
+      <p:grpSpPr>
+        <a:xfrm>
+          <a:off x="0" y="0"/>
+          <a:ext cx="0" cy="0"/>
+          <a:chOff x="0" y="0"/>
+          <a:chExt cx="0" cy="0"/>
+        </a:xfrm>
+      </p:grpSpPr>
+      <p:sp>
+        <p:nvSpPr>
+          <p:cNvPr id="2" name="Text 0"/>
+          <p:cNvSpPr/>
+          <p:nvPr/>
+        </p:nvSpPr>
+        <p:spPr>
+          <a:xfrm>
+            <a:off x="548640" y="411480"/>
+            <a:ext cx="10058400" cy="274320"/>
+          </a:xfrm>
+          <a:prstGeom prst="rect">
+            <a:avLst/>
+          </a:prstGeom>
+          <a:noFill/>
+          <a:ln/>
+        </p:spPr>
+        <p:txBody>
+          <a:bodyPr wrap="square" lIns="0" tIns="0" rIns="0" bIns="0" rtlCol="0" anchor="ctr"/>
+          <a:lstStyle/>
+          <a:p>
+            <a:pPr marL="0" indent="0">
+              <a:buNone/>
+            </a:pPr>
+            <a:r>
+              <a:rPr lang="en-US" sz="1200" b="1" kern="0" spc="200" dirty="0">
+                <a:solidFill>
+                  <a:srgbClr val="12A36A"/>
+                </a:solidFill>
+                <a:latin typeface="Calibri" pitchFamily="34" charset="0"/>
+                <a:ea typeface="Calibri" pitchFamily="34" charset="-122"/>
+                <a:cs typeface="Calibri" pitchFamily="34" charset="-120"/>
+              </a:rPr>
+              <a:t>INNOVACIÓN</a:t>
+            </a:r>
+            <a:endParaRPr lang="en-US" sz="1200" dirty="0"/>
+          </a:p>
+        </p:txBody>
+      </p:sp>
+      <p:sp>
+        <p:nvSpPr>
+          <p:cNvPr id="3" name="Text 1"/>
+          <p:cNvSpPr/>
+          <p:nvPr/>
+        </p:nvSpPr>
+        <p:spPr>
+          <a:xfrm>
+            <a:off x="548640" y="658368"/>
+            <a:ext cx="11064240" cy="731520"/>
+          </a:xfrm>
+          <a:prstGeom prst="rect">
+            <a:avLst/>
+          </a:prstGeom>
+          <a:noFill/>
+          <a:ln/>
+        </p:spPr>
+        <p:txBody>
+          <a:bodyPr wrap="square" lIns="0" tIns="0" rIns="0" bIns="0" rtlCol="0" anchor="ctr"/>
+          <a:lstStyle/>
+          <a:p>
+            <a:pPr marL="0" indent="0">
+              <a:buNone/>
+            </a:pPr>
+            <a:r>
+              <a:rPr lang="en-US" sz="3000" b="1" dirty="0">
+                <a:solidFill>
+                  <a:srgbClr val="1A2E5C"/>
+                </a:solidFill>
+                <a:latin typeface="Calibri" pitchFamily="34" charset="0"/>
+                <a:ea typeface="Calibri" pitchFamily="34" charset="-122"/>
+                <a:cs typeface="Calibri" pitchFamily="34" charset="-120"/>
+              </a:rPr>
+              <a:t>Visión por computador cruzada con la estadística oficial</a:t>
+            </a:r>
+            <a:endParaRPr lang="en-US" sz="3000" dirty="0"/>
+          </a:p>
+        </p:txBody>
+      </p:sp>
+      <p:sp>
+        <p:nvSpPr>
+          <p:cNvPr id="4" name="Shape 2"/>
+          <p:cNvSpPr/>
+          <p:nvPr/>
+        </p:nvSpPr>
+        <p:spPr>
+          <a:xfrm>
+            <a:off x="548640" y="1828800"/>
+            <a:ext cx="5212080" cy="3931920"/>
+          </a:xfrm>
+          <a:prstGeom prst="roundRect">
+            <a:avLst>
+              <a:gd name="adj" fmla="val 2093"/>
+            </a:avLst>
+          </a:prstGeom>
+          <a:solidFill>
+            <a:srgbClr val="1A2E5C"/>
+          </a:solidFill>
+          <a:ln w="12700">
+            <a:solidFill>
+              <a:srgbClr val="E1E6EC"/>
+            </a:solidFill>
+            <a:prstDash val="solid"/>
+          </a:ln>
+          <a:effectLst>
+            <a:outerShdw blurRad="88900" dist="38100" dir="5400000" algn="bl" rotWithShape="0">
+              <a:srgbClr val="1A2E5C">
+                <a:alpha val="16000"/>
+              </a:srgbClr>
+            </a:outerShdw>
+          </a:effectLst>
+        </p:spPr>
+        <p:txBody>
+          <a:bodyPr/>
+          <a:lstStyle/>
+          <a:p>
+            <a:endParaRPr lang="en-US"/>
+          </a:p>
+        </p:txBody>
+      </p:sp>
+      <p:sp>
+        <p:nvSpPr>
+          <p:cNvPr id="5" name="Text 3"/>
+          <p:cNvSpPr/>
+          <p:nvPr/>
+        </p:nvSpPr>
+        <p:spPr>
+          <a:xfrm>
+            <a:off x="822960" y="2057400"/>
+            <a:ext cx="4663440" cy="365760"/>
+          </a:xfrm>
+          <a:prstGeom prst="rect">
+            <a:avLst/>
+          </a:prstGeom>
+          <a:noFill/>
+          <a:ln/>
+        </p:spPr>
+        <p:txBody>
+          <a:bodyPr wrap="square" lIns="0" tIns="0" rIns="0" bIns="0" rtlCol="0" anchor="ctr"/>
+          <a:lstStyle/>
+          <a:p>
+            <a:pPr marL="0" indent="0">
+              <a:buNone/>
+            </a:pPr>
+            <a:r>
+              <a:rPr lang="en-US" sz="1500" b="1" dirty="0">
+                <a:solidFill>
+                  <a:srgbClr val="1DB87F"/>
+                </a:solidFill>
+                <a:latin typeface="Calibri" pitchFamily="34" charset="0"/>
+                <a:ea typeface="Calibri" pitchFamily="34" charset="-122"/>
+                <a:cs typeface="Calibri" pitchFamily="34" charset="-120"/>
+              </a:rPr>
+              <a:t>Modelo de visión (TSN · MMAction2)</a:t>
+            </a:r>
+            <a:endParaRPr lang="en-US" sz="1500" dirty="0"/>
+          </a:p>
+        </p:txBody>
+      </p:sp>
+      <p:sp>
+        <p:nvSpPr>
+          <p:cNvPr id="6" name="Text 4"/>
+          <p:cNvSpPr/>
+          <p:nvPr/>
+        </p:nvSpPr>
+        <p:spPr>
+          <a:xfrm>
+            <a:off x="822960" y="2468880"/>
+            <a:ext cx="4663440" cy="914400"/>
+          </a:xfrm>
+          <a:prstGeom prst="rect">
+            <a:avLst/>
+          </a:prstGeom>
+          <a:noFill/>
+          <a:ln/>
+        </p:spPr>
+        <p:txBody>
+          <a:bodyPr wrap="square" lIns="0" tIns="0" rIns="0" bIns="0" rtlCol="0" anchor="ctr"/>
+          <a:lstStyle/>
+          <a:p>
+            <a:pPr marL="0" indent="0">
+              <a:buNone/>
+            </a:pPr>
+            <a:r>
+              <a:rPr lang="en-US" sz="1300" dirty="0">
+                <a:solidFill>
+                  <a:srgbClr val="FFFFFF"/>
+                </a:solidFill>
+                <a:latin typeface="Calibri" pitchFamily="34" charset="0"/>
+                <a:ea typeface="Calibri" pitchFamily="34" charset="-122"/>
+                <a:cs typeface="Calibri" pitchFamily="34" charset="-120"/>
+              </a:rPr>
+              <a:t>Clasifica eventos en video: hurto (robbery, stealing, shoplifting, burglary) y riesgo, con nivel de alerta.</a:t>
+            </a:r>
+            <a:endParaRPr lang="en-US" sz="1300" dirty="0"/>
+          </a:p>
+        </p:txBody>
+      </p:sp>
+      <p:sp>
+        <p:nvSpPr>
+          <p:cNvPr id="7" name="Text 5"/>
+          <p:cNvSpPr/>
+          <p:nvPr/>
+        </p:nvSpPr>
+        <p:spPr>
+          <a:xfrm>
+            <a:off x="822960" y="3383280"/>
+            <a:ext cx="4663440" cy="548640"/>
+          </a:xfrm>
+          <a:prstGeom prst="rect">
+            <a:avLst/>
+          </a:prstGeom>
+          <a:noFill/>
+          <a:ln/>
+        </p:spPr>
+        <p:txBody>
+          <a:bodyPr wrap="square" lIns="0" tIns="0" rIns="0" bIns="0" rtlCol="0" anchor="ctr"/>
+          <a:lstStyle/>
+          <a:p>
+            <a:pPr marL="0" indent="0">
+              <a:buNone/>
+            </a:pPr>
+            <a:r>
+              <a:rPr lang="en-US" sz="1150" i="1" dirty="0">
+                <a:solidFill>
+                  <a:srgbClr val="CADCFC"/>
+                </a:solidFill>
+                <a:latin typeface="Calibri" pitchFamily="34" charset="0"/>
+                <a:ea typeface="Calibri" pitchFamily="34" charset="-122"/>
+                <a:cs typeface="Calibri" pitchFamily="34" charset="-120"/>
+              </a:rPr>
+              <a:t>Entrenado por el equipo · integrado por webhook y microservicio</a:t>
+            </a:r>
+            <a:endParaRPr lang="en-US" sz="1150" dirty="0"/>
+          </a:p>
+        </p:txBody>
+      </p:sp>
+      <p:sp>
+        <p:nvSpPr>
+          <p:cNvPr id="8" name="Shape 6"/>
+          <p:cNvSpPr/>
+          <p:nvPr/>
+        </p:nvSpPr>
+        <p:spPr>
+          <a:xfrm>
+            <a:off x="822960" y="4069080"/>
+            <a:ext cx="4663440" cy="0"/>
+          </a:xfrm>
+          <a:prstGeom prst="line">
+            <a:avLst/>
+          </a:prstGeom>
+          <a:noFill/>
+          <a:ln w="12700">
+            <a:solidFill>
+              <a:srgbClr val="3A4C74"/>
+            </a:solidFill>
+            <a:prstDash val="solid"/>
+          </a:ln>
+        </p:spPr>
+        <p:txBody>
+          <a:bodyPr/>
+          <a:lstStyle/>
+          <a:p>
+            <a:endParaRPr lang="en-US"/>
+          </a:p>
+        </p:txBody>
+      </p:sp>
+      <p:sp>
+        <p:nvSpPr>
+          <p:cNvPr id="9" name="Text 7"/>
+          <p:cNvSpPr/>
+          <p:nvPr/>
+        </p:nvSpPr>
+        <p:spPr>
+          <a:xfrm>
+            <a:off x="822960" y="4206240"/>
+            <a:ext cx="4663440" cy="1371600"/>
+          </a:xfrm>
+          <a:prstGeom prst="rect">
+            <a:avLst/>
+          </a:prstGeom>
+          <a:noFill/>
+          <a:ln/>
+        </p:spPr>
+        <p:txBody>
+          <a:bodyPr wrap="square" lIns="0" tIns="0" rIns="0" bIns="0" rtlCol="0" anchor="ctr"/>
+          <a:lstStyle/>
+          <a:p>
+            <a:pPr marL="0" indent="0">
+              <a:lnSpc>
+                <a:spcPct val="120000"/>
+              </a:lnSpc>
+              <a:buNone/>
+            </a:pPr>
+            <a:r>
+              <a:rPr lang="en-US" sz="1250" dirty="0">
+                <a:solidFill>
+                  <a:srgbClr val="1DB87F"/>
+                </a:solidFill>
+                <a:latin typeface="Calibri" pitchFamily="34" charset="0"/>
+                <a:ea typeface="Calibri" pitchFamily="34" charset="-122"/>
+                <a:cs typeface="Calibri" pitchFamily="34" charset="-120"/>
+              </a:rPr>
+              <a:t>Shoplifting → </a:t>
+            </a:r>
+            <a:r>
+              <a:rPr lang="en-US" sz="1250" dirty="0">
+                <a:solidFill>
+                  <a:srgbClr val="FFFFFF"/>
+                </a:solidFill>
+                <a:latin typeface="Calibri" pitchFamily="34" charset="0"/>
+                <a:ea typeface="Calibri" pitchFamily="34" charset="-122"/>
+                <a:cs typeface="Calibri" pitchFamily="34" charset="-120"/>
+              </a:rPr>
+              <a:t>Hurto a comercio
+</a:t>
+            </a:r>
+            <a:r>
+              <a:rPr lang="en-US" sz="1250" dirty="0">
+                <a:solidFill>
+                  <a:srgbClr val="1DB87F"/>
+                </a:solidFill>
+                <a:latin typeface="Calibri" pitchFamily="34" charset="0"/>
+                <a:ea typeface="Calibri" pitchFamily="34" charset="-122"/>
+                <a:cs typeface="Calibri" pitchFamily="34" charset="-120"/>
+              </a:rPr>
+              <a:t>Burglary → </a:t>
+            </a:r>
+            <a:r>
+              <a:rPr lang="en-US" sz="1250" dirty="0">
+                <a:solidFill>
+                  <a:srgbClr val="FFFFFF"/>
+                </a:solidFill>
+                <a:latin typeface="Calibri" pitchFamily="34" charset="0"/>
+                <a:ea typeface="Calibri" pitchFamily="34" charset="-122"/>
+                <a:cs typeface="Calibri" pitchFamily="34" charset="-120"/>
+              </a:rPr>
+              <a:t>Hurto a residencias
+</a:t>
+            </a:r>
+            <a:r>
+              <a:rPr lang="en-US" sz="1250" dirty="0">
+                <a:solidFill>
+                  <a:srgbClr val="1DB87F"/>
+                </a:solidFill>
+                <a:latin typeface="Calibri" pitchFamily="34" charset="0"/>
+                <a:ea typeface="Calibri" pitchFamily="34" charset="-122"/>
+                <a:cs typeface="Calibri" pitchFamily="34" charset="-120"/>
+              </a:rPr>
+              <a:t>Robbery → </a:t>
+            </a:r>
+            <a:r>
+              <a:rPr lang="en-US" sz="1250" dirty="0">
+                <a:solidFill>
+                  <a:srgbClr val="FFFFFF"/>
+                </a:solidFill>
+                <a:latin typeface="Calibri" pitchFamily="34" charset="0"/>
+                <a:ea typeface="Calibri" pitchFamily="34" charset="-122"/>
+                <a:cs typeface="Calibri" pitchFamily="34" charset="-120"/>
+              </a:rPr>
+              <a:t>Hurto a personas</a:t>
+            </a:r>
+            <a:endParaRPr lang="en-US" sz="1250" dirty="0"/>
+          </a:p>
+        </p:txBody>
+      </p:sp>
+      <p:sp>
+        <p:nvSpPr>
+          <p:cNvPr id="10" name="Shape 8"/>
+          <p:cNvSpPr/>
+          <p:nvPr/>
+        </p:nvSpPr>
+        <p:spPr>
+          <a:xfrm>
+            <a:off x="5760720" y="3749040"/>
+            <a:ext cx="640080" cy="0"/>
+          </a:xfrm>
+          <a:prstGeom prst="line">
+            <a:avLst/>
+          </a:prstGeom>
+          <a:noFill/>
+          <a:ln w="38100">
+            <a:solidFill>
+              <a:srgbClr val="12A36A"/>
+            </a:solidFill>
+            <a:prstDash val="solid"/>
+            <a:tailEnd type="triangle"/>
+          </a:ln>
+        </p:spPr>
+        <p:txBody>
+          <a:bodyPr/>
+          <a:lstStyle/>
+          <a:p>
+            <a:endParaRPr lang="en-US"/>
+          </a:p>
+        </p:txBody>
+      </p:sp>
+      <p:sp>
+        <p:nvSpPr>
+          <p:cNvPr id="11" name="Shape 9"/>
+          <p:cNvSpPr/>
+          <p:nvPr/>
+        </p:nvSpPr>
+        <p:spPr>
+          <a:xfrm>
+            <a:off x="6492240" y="1828800"/>
+            <a:ext cx="5120640" cy="3931920"/>
+          </a:xfrm>
+          <a:prstGeom prst="roundRect">
+            <a:avLst>
+              <a:gd name="adj" fmla="val 2093"/>
+            </a:avLst>
+          </a:prstGeom>
+          <a:solidFill>
+            <a:srgbClr val="FFFFFF"/>
+          </a:solidFill>
+          <a:ln w="12700">
+            <a:solidFill>
+              <a:srgbClr val="E1E6EC"/>
+            </a:solidFill>
+            <a:prstDash val="solid"/>
+          </a:ln>
+          <a:effectLst>
+            <a:outerShdw blurRad="88900" dist="38100" dir="5400000" algn="bl" rotWithShape="0">
+              <a:srgbClr val="1A2E5C">
+                <a:alpha val="16000"/>
+              </a:srgbClr>
+            </a:outerShdw>
+          </a:effectLst>
+        </p:spPr>
+        <p:txBody>
+          <a:bodyPr/>
+          <a:lstStyle/>
+          <a:p>
+            <a:endParaRPr lang="en-US"/>
+          </a:p>
+        </p:txBody>
+      </p:sp>
+      <p:sp>
+        <p:nvSpPr>
+          <p:cNvPr id="12" name="Text 10"/>
+          <p:cNvSpPr/>
+          <p:nvPr/>
+        </p:nvSpPr>
+        <p:spPr>
+          <a:xfrm>
+            <a:off x="6766560" y="2057400"/>
+            <a:ext cx="4572000" cy="365760"/>
+          </a:xfrm>
+          <a:prstGeom prst="rect">
+            <a:avLst/>
+          </a:prstGeom>
+          <a:noFill/>
+          <a:ln/>
+        </p:spPr>
+        <p:txBody>
+          <a:bodyPr wrap="square" lIns="0" tIns="0" rIns="0" bIns="0" rtlCol="0" anchor="ctr"/>
+          <a:lstStyle/>
+          <a:p>
+            <a:pPr marL="0" indent="0">
+              <a:buNone/>
+            </a:pPr>
+            <a:r>
+              <a:rPr lang="en-US" sz="1500" b="1" dirty="0">
+                <a:solidFill>
+                  <a:srgbClr val="1A2E5C"/>
+                </a:solidFill>
+                <a:latin typeface="Calibri" pitchFamily="34" charset="0"/>
+                <a:ea typeface="Calibri" pitchFamily="34" charset="-122"/>
+                <a:cs typeface="Calibri" pitchFamily="34" charset="-120"/>
+              </a:rPr>
+              <a:t>Cruce con SIEDCO (datos.gov.co)</a:t>
+            </a:r>
+            <a:endParaRPr lang="en-US" sz="1500" dirty="0"/>
+          </a:p>
+        </p:txBody>
+      </p:sp>
+      <p:sp>
+        <p:nvSpPr>
+          <p:cNvPr id="13" name="Text 11"/>
+          <p:cNvSpPr/>
+          <p:nvPr/>
+        </p:nvSpPr>
+        <p:spPr>
+          <a:xfrm>
+            <a:off x="6766560" y="2468880"/>
+            <a:ext cx="4572000" cy="640080"/>
+          </a:xfrm>
+          <a:prstGeom prst="rect">
+            <a:avLst/>
+          </a:prstGeom>
+          <a:noFill/>
+          <a:ln/>
+        </p:spPr>
+        <p:txBody>
+          <a:bodyPr wrap="square" lIns="0" tIns="0" rIns="0" bIns="0" rtlCol="0" anchor="ctr"/>
+          <a:lstStyle/>
+          <a:p>
+            <a:pPr marL="0" indent="0">
+              <a:buNone/>
+            </a:pPr>
+            <a:r>
+              <a:rPr lang="en-US" sz="1250" dirty="0">
+                <a:solidFill>
+                  <a:srgbClr val="2C3E50"/>
+                </a:solidFill>
+                <a:latin typeface="Calibri" pitchFamily="34" charset="0"/>
+                <a:ea typeface="Calibri" pitchFamily="34" charset="-122"/>
+                <a:cs typeface="Calibri" pitchFamily="34" charset="-120"/>
+              </a:rPr>
+              <a:t>La detección en vivo se contextualiza con la estadística oficial del municipio:</a:t>
+            </a:r>
+            <a:endParaRPr lang="en-US" sz="1250" dirty="0"/>
+          </a:p>
+        </p:txBody>
+      </p:sp>
+      <p:sp>
+        <p:nvSpPr>
+          <p:cNvPr id="14" name="Shape 12"/>
+          <p:cNvSpPr/>
+          <p:nvPr/>
+        </p:nvSpPr>
+        <p:spPr>
+          <a:xfrm>
+            <a:off x="6766560" y="3200400"/>
+            <a:ext cx="4572000" cy="2331720"/>
+          </a:xfrm>
+          <a:prstGeom prst="roundRect">
+            <a:avLst>
+              <a:gd name="adj" fmla="val 3529"/>
+            </a:avLst>
+          </a:prstGeom>
+          <a:solidFill>
+            <a:srgbClr val="E8F7F0"/>
+          </a:solidFill>
+          <a:ln w="12700">
+            <a:solidFill>
+              <a:srgbClr val="E1E6EC"/>
+            </a:solidFill>
+            <a:prstDash val="solid"/>
+          </a:ln>
+          <a:effectLst>
+            <a:outerShdw blurRad="88900" dist="38100" dir="5400000" algn="bl" rotWithShape="0">
+              <a:srgbClr val="1A2E5C">
+                <a:alpha val="16000"/>
+              </a:srgbClr>
+            </a:outerShdw>
+          </a:effectLst>
+        </p:spPr>
+        <p:txBody>
+          <a:bodyPr/>
+          <a:lstStyle/>
+          <a:p>
+            <a:endParaRPr lang="en-US"/>
+          </a:p>
+        </p:txBody>
+      </p:sp>
+      <p:sp>
+        <p:nvSpPr>
+          <p:cNvPr id="15" name="Text 13"/>
+          <p:cNvSpPr/>
+          <p:nvPr/>
+        </p:nvSpPr>
+        <p:spPr>
+          <a:xfrm>
+            <a:off x="6949440" y="3383280"/>
+            <a:ext cx="4206240" cy="457200"/>
+          </a:xfrm>
+          <a:prstGeom prst="rect">
+            <a:avLst/>
+          </a:prstGeom>
+          <a:noFill/>
+          <a:ln/>
+        </p:spPr>
+        <p:txBody>
+          <a:bodyPr wrap="square" lIns="0" tIns="0" rIns="0" bIns="0" rtlCol="0" anchor="ctr"/>
+          <a:lstStyle/>
+          <a:p>
+            <a:pPr marL="0" indent="0">
+              <a:buNone/>
+            </a:pPr>
+            <a:r>
+              <a:rPr lang="en-US" sz="1300" b="1" dirty="0">
+                <a:solidFill>
+                  <a:srgbClr val="1A2E5C"/>
+                </a:solidFill>
+                <a:latin typeface="Calibri" pitchFamily="34" charset="0"/>
+                <a:ea typeface="Calibri" pitchFamily="34" charset="-122"/>
+                <a:cs typeface="Calibri" pitchFamily="34" charset="-120"/>
+              </a:rPr>
+              <a:t>“Detección: hurto a comercio en Bogotá”</a:t>
+            </a:r>
+            <a:endParaRPr lang="en-US" sz="1300" dirty="0"/>
+          </a:p>
+        </p:txBody>
+      </p:sp>
+      <p:sp>
+        <p:nvSpPr>
+          <p:cNvPr id="16" name="Text 14"/>
+          <p:cNvSpPr/>
+          <p:nvPr/>
+        </p:nvSpPr>
+        <p:spPr>
+          <a:xfrm>
+            <a:off x="6949440" y="3840480"/>
+            <a:ext cx="4206240" cy="1005840"/>
+          </a:xfrm>
+          <a:prstGeom prst="rect">
+            <a:avLst/>
+          </a:prstGeom>
+          <a:noFill/>
+          <a:ln/>
+        </p:spPr>
+        <p:txBody>
+          <a:bodyPr wrap="square" lIns="0" tIns="0" rIns="0" bIns="0" rtlCol="0" anchor="ctr"/>
+          <a:lstStyle/>
+          <a:p>
+            <a:pPr marL="0" indent="0">
+              <a:buNone/>
+            </a:pPr>
+            <a:r>
+              <a:rPr lang="en-US" sz="1250" dirty="0">
+                <a:solidFill>
+                  <a:srgbClr val="2C3E50"/>
+                </a:solidFill>
+                <a:latin typeface="Calibri" pitchFamily="34" charset="0"/>
+                <a:ea typeface="Calibri" pitchFamily="34" charset="-122"/>
+                <a:cs typeface="Calibri" pitchFamily="34" charset="-120"/>
+              </a:rPr>
+              <a:t>→ SIEDCO registra N casos de hurto a comercio en el municipio en los últimos 90 días, con tendencia a la baja.</a:t>
+            </a:r>
+            <a:endParaRPr lang="en-US" sz="1250" dirty="0"/>
+          </a:p>
+        </p:txBody>
+      </p:sp>
+      <p:sp>
+        <p:nvSpPr>
+          <p:cNvPr id="17" name="Text 15"/>
+          <p:cNvSpPr/>
+          <p:nvPr/>
+        </p:nvSpPr>
+        <p:spPr>
+          <a:xfrm>
+            <a:off x="6949440" y="4892040"/>
+            <a:ext cx="4206240" cy="548640"/>
+          </a:xfrm>
+          <a:prstGeom prst="rect">
+            <a:avLst/>
+          </a:prstGeom>
+          <a:noFill/>
+          <a:ln/>
+        </p:spPr>
+        <p:txBody>
+          <a:bodyPr wrap="square" lIns="0" tIns="0" rIns="0" bIns="0" rtlCol="0" anchor="ctr"/>
+          <a:lstStyle/>
+          <a:p>
+            <a:pPr marL="0" indent="0">
+              <a:buNone/>
+            </a:pPr>
+            <a:r>
+              <a:rPr lang="en-US" sz="1150" i="1" dirty="0">
+                <a:solidFill>
+                  <a:srgbClr val="12A36A"/>
+                </a:solidFill>
+                <a:latin typeface="Calibri" pitchFamily="34" charset="0"/>
+                <a:ea typeface="Calibri" pitchFamily="34" charset="-122"/>
+                <a:cs typeface="Calibri" pitchFamily="34" charset="-120"/>
+              </a:rPr>
+              <a:t>Detección en tiempo real + evidencia oficial = alerta accionable y defendible.</a:t>
+            </a:r>
+            <a:endParaRPr lang="en-US" sz="1150" dirty="0"/>
+          </a:p>
+        </p:txBody>
+      </p:sp>
+      <p:sp>
+        <p:nvSpPr>
+          <p:cNvPr id="18" name="Text 16"/>
+          <p:cNvSpPr/>
+          <p:nvPr/>
+        </p:nvSpPr>
+        <p:spPr>
+          <a:xfrm>
+            <a:off x="548640" y="6473952"/>
+            <a:ext cx="8229600" cy="274320"/>
+          </a:xfrm>
+          <a:prstGeom prst="rect">
+            <a:avLst/>
+          </a:prstGeom>
+          <a:noFill/>
+          <a:ln/>
+        </p:spPr>
+        <p:txBody>
+          <a:bodyPr wrap="square" lIns="0" tIns="0" rIns="0" bIns="0" rtlCol="0" anchor="ctr"/>
+          <a:lstStyle/>
+          <a:p>
+            <a:pPr marL="0" indent="0" algn="l">
+              <a:buNone/>
+            </a:pPr>
+            <a:r>
+              <a:rPr lang="en-US" sz="900" dirty="0">
+                <a:solidFill>
+                  <a:srgbClr val="7B8794"/>
+                </a:solidFill>
+                <a:latin typeface="Calibri" pitchFamily="34" charset="0"/>
+                <a:ea typeface="Calibri" pitchFamily="34" charset="-122"/>
+                <a:cs typeface="Calibri" pitchFamily="34" charset="-120"/>
+              </a:rPr>
+              <a:t>VigIA · Equipo 80 — Concurso Datos al Ecosistema 2026</a:t>
+            </a:r>
+            <a:endParaRPr lang="en-US" sz="900" dirty="0"/>
+          </a:p>
+        </p:txBody>
+      </p:sp>
+      <p:sp>
+        <p:nvSpPr>
+          <p:cNvPr id="19" name="Text 17"/>
+          <p:cNvSpPr/>
+          <p:nvPr/>
+        </p:nvSpPr>
+        <p:spPr>
+          <a:xfrm>
+            <a:off x="11155680" y="6473952"/>
+            <a:ext cx="457200" cy="274320"/>
+          </a:xfrm>
+          <a:prstGeom prst="rect">
+            <a:avLst/>
+          </a:prstGeom>
+          <a:noFill/>
+          <a:ln/>
+        </p:spPr>
+        <p:txBody>
+          <a:bodyPr wrap="square" lIns="0" tIns="0" rIns="0" bIns="0" rtlCol="0" anchor="ctr"/>
+          <a:lstStyle/>
+          <a:p>
+            <a:pPr marL="0" indent="0" algn="r">
+              <a:buNone/>
+            </a:pPr>
+            <a:r>
+              <a:rPr lang="en-US" sz="900" dirty="0">
+                <a:solidFill>
+                  <a:srgbClr val="7B8794"/>
+                </a:solidFill>
+                <a:latin typeface="Calibri" pitchFamily="34" charset="0"/>
+                <a:ea typeface="Calibri" pitchFamily="34" charset="-122"/>
+                <a:cs typeface="Calibri" pitchFamily="34" charset="-120"/>
+              </a:rPr>
+              <a:t>8</a:t>
+            </a:r>
+            <a:endParaRPr lang="en-US" sz="900" dirty="0"/>
+          </a:p>
+        </p:txBody>
+      </p:sp>
+    </p:spTree>
+  </p:cSld>
+  <p:clrMapOvr>
+    <a:masterClrMapping/>
+  </p:clrMapOvr>
+</p:sld>
+</file>
+
+<file path=ppt/slides/slide11.xml><?xml version="1.0" encoding="utf-8"?>
+<p:sld xmlns:a="http://schemas.openxmlformats.org/drawingml/2006/main" xmlns:r="http://schemas.openxmlformats.org/officeDocument/2006/relationships" xmlns:p="http://schemas.openxmlformats.org/presentationml/2006/main">
+  <p:cSld name="Slide 9">
+    <p:bg>
+      <p:bgPr>
+        <a:solidFill>
+          <a:srgbClr val="FFFFFF"/>
+        </a:solidFill>
+        <a:effectLst/>
+      </p:bgPr>
+    </p:bg>
+    <p:spTree>
+      <p:nvGrpSpPr>
+        <p:cNvPr id="1" name=""/>
+        <p:cNvGrpSpPr/>
+        <p:nvPr/>
+      </p:nvGrpSpPr>
+      <p:grpSpPr>
+        <a:xfrm>
+          <a:off x="0" y="0"/>
+          <a:ext cx="0" cy="0"/>
+          <a:chOff x="0" y="0"/>
+          <a:chExt cx="0" cy="0"/>
+        </a:xfrm>
+      </p:grpSpPr>
+      <p:sp>
+        <p:nvSpPr>
+          <p:cNvPr id="2" name="Text 0"/>
+          <p:cNvSpPr/>
+          <p:nvPr/>
+        </p:nvSpPr>
+        <p:spPr>
+          <a:xfrm>
+            <a:off x="548640" y="411480"/>
+            <a:ext cx="10058400" cy="274320"/>
+          </a:xfrm>
+          <a:prstGeom prst="rect">
+            <a:avLst/>
+          </a:prstGeom>
+          <a:noFill/>
+          <a:ln/>
+        </p:spPr>
+        <p:txBody>
+          <a:bodyPr wrap="square" lIns="0" tIns="0" rIns="0" bIns="0" rtlCol="0" anchor="ctr"/>
+          <a:lstStyle/>
+          <a:p>
+            <a:pPr marL="0" indent="0">
+              <a:buNone/>
+            </a:pPr>
+            <a:r>
+              <a:rPr lang="en-US" sz="1200" b="1" kern="0" spc="200" dirty="0">
+                <a:solidFill>
+                  <a:srgbClr val="12A36A"/>
+                </a:solidFill>
+                <a:latin typeface="Calibri" pitchFamily="34" charset="0"/>
+                <a:ea typeface="Calibri" pitchFamily="34" charset="-122"/>
+                <a:cs typeface="Calibri" pitchFamily="34" charset="-120"/>
+              </a:rPr>
+              <a:t>GOBERNANZA DE IA</a:t>
+            </a:r>
+            <a:endParaRPr lang="en-US" sz="1200" dirty="0"/>
+          </a:p>
+        </p:txBody>
+      </p:sp>
+      <p:sp>
+        <p:nvSpPr>
+          <p:cNvPr id="3" name="Text 1"/>
+          <p:cNvSpPr/>
+          <p:nvPr/>
+        </p:nvSpPr>
+        <p:spPr>
+          <a:xfrm>
+            <a:off x="548640" y="658368"/>
+            <a:ext cx="11064240" cy="731520"/>
+          </a:xfrm>
+          <a:prstGeom prst="rect">
+            <a:avLst/>
+          </a:prstGeom>
+          <a:noFill/>
+          <a:ln/>
+        </p:spPr>
+        <p:txBody>
+          <a:bodyPr wrap="square" lIns="0" tIns="0" rIns="0" bIns="0" rtlCol="0" anchor="ctr"/>
+          <a:lstStyle/>
+          <a:p>
+            <a:pPr marL="0" indent="0">
+              <a:buNone/>
+            </a:pPr>
+            <a:r>
+              <a:rPr lang="en-US" sz="3000" b="1" dirty="0">
+                <a:solidFill>
+                  <a:srgbClr val="1A2E5C"/>
+                </a:solidFill>
+                <a:latin typeface="Calibri" pitchFamily="34" charset="0"/>
+                <a:ea typeface="Calibri" pitchFamily="34" charset="-122"/>
+                <a:cs typeface="Calibri" pitchFamily="34" charset="-120"/>
+              </a:rPr>
+              <a:t>Cada respuesta es verificable — IA de apoyo, no caja negra</a:t>
+            </a:r>
+            <a:endParaRPr lang="en-US" sz="3000" dirty="0"/>
+          </a:p>
+        </p:txBody>
+      </p:sp>
+      <p:sp>
+        <p:nvSpPr>
+          <p:cNvPr id="4" name="Shape 2"/>
+          <p:cNvSpPr/>
+          <p:nvPr/>
+        </p:nvSpPr>
+        <p:spPr>
+          <a:xfrm>
+            <a:off x="548640" y="1874520"/>
+            <a:ext cx="11064240" cy="1371600"/>
+          </a:xfrm>
+          <a:prstGeom prst="roundRect">
+            <a:avLst>
+              <a:gd name="adj" fmla="val 6000"/>
+            </a:avLst>
+          </a:prstGeom>
+          <a:solidFill>
+            <a:srgbClr val="E8F7F0"/>
+          </a:solidFill>
+          <a:ln w="12700">
+            <a:solidFill>
+              <a:srgbClr val="E1E6EC"/>
+            </a:solidFill>
+            <a:prstDash val="solid"/>
+          </a:ln>
+          <a:effectLst>
+            <a:outerShdw blurRad="88900" dist="38100" dir="5400000" algn="bl" rotWithShape="0">
+              <a:srgbClr val="1A2E5C">
+                <a:alpha val="16000"/>
+              </a:srgbClr>
+            </a:outerShdw>
+          </a:effectLst>
+        </p:spPr>
+        <p:txBody>
+          <a:bodyPr/>
+          <a:lstStyle/>
+          <a:p>
+            <a:endParaRPr lang="en-US"/>
+          </a:p>
+        </p:txBody>
+      </p:sp>
+      <p:sp>
+        <p:nvSpPr>
+          <p:cNvPr id="5" name="Text 3"/>
+          <p:cNvSpPr/>
+          <p:nvPr/>
+        </p:nvSpPr>
+        <p:spPr>
+          <a:xfrm>
+            <a:off x="822960" y="2057400"/>
+            <a:ext cx="5486400" cy="365760"/>
+          </a:xfrm>
+          <a:prstGeom prst="rect">
+            <a:avLst/>
+          </a:prstGeom>
+          <a:noFill/>
+          <a:ln/>
+        </p:spPr>
+        <p:txBody>
+          <a:bodyPr wrap="square" lIns="0" tIns="0" rIns="0" bIns="0" rtlCol="0" anchor="ctr"/>
+          <a:lstStyle/>
+          <a:p>
+            <a:pPr marL="0" indent="0">
+              <a:buNone/>
+            </a:pPr>
+            <a:r>
+              <a:rPr lang="en-US" sz="1500" b="1" dirty="0">
+                <a:solidFill>
+                  <a:srgbClr val="12A36A"/>
+                </a:solidFill>
+                <a:latin typeface="Calibri" pitchFamily="34" charset="0"/>
+                <a:ea typeface="Calibri" pitchFamily="34" charset="-122"/>
+                <a:cs typeface="Calibri" pitchFamily="34" charset="-120"/>
+              </a:rPr>
+              <a:t>Procedencia en cada respuesta</a:t>
+            </a:r>
+            <a:endParaRPr lang="en-US" sz="1500" dirty="0"/>
+          </a:p>
+        </p:txBody>
+      </p:sp>
+      <p:sp>
+        <p:nvSpPr>
+          <p:cNvPr id="6" name="Text 4"/>
+          <p:cNvSpPr/>
+          <p:nvPr/>
+        </p:nvSpPr>
+        <p:spPr>
+          <a:xfrm>
+            <a:off x="822960" y="2487168"/>
+            <a:ext cx="10515600" cy="640080"/>
+          </a:xfrm>
+          <a:prstGeom prst="rect">
+            <a:avLst/>
+          </a:prstGeom>
+          <a:noFill/>
+          <a:ln/>
+        </p:spPr>
+        <p:txBody>
+          <a:bodyPr wrap="square" lIns="0" tIns="0" rIns="0" bIns="0" rtlCol="0" anchor="ctr"/>
+          <a:lstStyle/>
+          <a:p>
+            <a:pPr marL="0" indent="0">
+              <a:buNone/>
+            </a:pPr>
+            <a:r>
+              <a:rPr lang="en-US" sz="1300" dirty="0">
+                <a:solidFill>
+                  <a:srgbClr val="2C3E50"/>
+                </a:solidFill>
+                <a:latin typeface="Calibri" pitchFamily="34" charset="0"/>
+                <a:ea typeface="Calibri" pitchFamily="34" charset="-122"/>
+                <a:cs typeface="Calibri" pitchFamily="34" charset="-120"/>
+              </a:rPr>
+              <a:t>📊  Fuente · ID del dataset · Municipio · N.º de registros · Última fecha · Consultado (fecha/hora)   —   distintivo “IA de apoyo, verificable”</a:t>
+            </a:r>
+            <a:endParaRPr lang="en-US" sz="1300" dirty="0"/>
+          </a:p>
+        </p:txBody>
+      </p:sp>
+      <p:sp>
+        <p:nvSpPr>
+          <p:cNvPr id="7" name="Shape 5"/>
+          <p:cNvSpPr/>
+          <p:nvPr/>
+        </p:nvSpPr>
+        <p:spPr>
+          <a:xfrm>
+            <a:off x="548640" y="3474720"/>
+            <a:ext cx="5394960" cy="1097280"/>
+          </a:xfrm>
+          <a:prstGeom prst="roundRect">
+            <a:avLst>
+              <a:gd name="adj" fmla="val 7500"/>
+            </a:avLst>
+          </a:prstGeom>
+          <a:solidFill>
+            <a:srgbClr val="FFFFFF"/>
+          </a:solidFill>
+          <a:ln w="12700">
+            <a:solidFill>
+              <a:srgbClr val="E1E6EC"/>
+            </a:solidFill>
+            <a:prstDash val="solid"/>
+          </a:ln>
+          <a:effectLst>
+            <a:outerShdw blurRad="88900" dist="38100" dir="5400000" algn="bl" rotWithShape="0">
+              <a:srgbClr val="1A2E5C">
+                <a:alpha val="16000"/>
+              </a:srgbClr>
+            </a:outerShdw>
+          </a:effectLst>
+        </p:spPr>
+        <p:txBody>
+          <a:bodyPr/>
+          <a:lstStyle/>
+          <a:p>
+            <a:endParaRPr lang="en-US"/>
+          </a:p>
+        </p:txBody>
+      </p:sp>
+      <p:sp>
+        <p:nvSpPr>
+          <p:cNvPr id="8" name="Shape 6"/>
+          <p:cNvSpPr/>
+          <p:nvPr/>
+        </p:nvSpPr>
+        <p:spPr>
+          <a:xfrm>
+            <a:off x="804672" y="3749040"/>
+            <a:ext cx="548640" cy="548640"/>
+          </a:xfrm>
+          <a:prstGeom prst="ellipse">
+            <a:avLst/>
+          </a:prstGeom>
+          <a:solidFill>
+            <a:srgbClr val="12A36A"/>
+          </a:solidFill>
+          <a:ln/>
+          <a:effectLst>
+            <a:outerShdw blurRad="88900" dist="38100" dir="5400000" algn="bl" rotWithShape="0">
+              <a:srgbClr val="1A2E5C">
+                <a:alpha val="16000"/>
+              </a:srgbClr>
+            </a:outerShdw>
+          </a:effectLst>
+        </p:spPr>
+        <p:txBody>
+          <a:bodyPr/>
+          <a:lstStyle/>
+          <a:p>
+            <a:endParaRPr lang="en-US"/>
+          </a:p>
+        </p:txBody>
+      </p:sp>
+      <p:sp>
+        <p:nvSpPr>
+          <p:cNvPr id="9" name="Text 7"/>
+          <p:cNvSpPr/>
+          <p:nvPr/>
+        </p:nvSpPr>
+        <p:spPr>
+          <a:xfrm>
+            <a:off x="804672" y="3749040"/>
+            <a:ext cx="548640" cy="548640"/>
+          </a:xfrm>
+          <a:prstGeom prst="rect">
+            <a:avLst/>
+          </a:prstGeom>
+          <a:noFill/>
+          <a:ln/>
+        </p:spPr>
+        <p:txBody>
+          <a:bodyPr wrap="square" lIns="0" tIns="0" rIns="0" bIns="0" rtlCol="0" anchor="ctr"/>
+          <a:lstStyle/>
+          <a:p>
+            <a:pPr marL="0" indent="0" algn="ctr">
+              <a:buNone/>
+            </a:pPr>
+            <a:r>
+              <a:rPr lang="en-US" sz="1200" b="1" dirty="0">
+                <a:solidFill>
+                  <a:srgbClr val="FFFFFF"/>
+                </a:solidFill>
+                <a:latin typeface="Calibri" pitchFamily="34" charset="0"/>
+                <a:ea typeface="Calibri" pitchFamily="34" charset="-122"/>
+                <a:cs typeface="Calibri" pitchFamily="34" charset="-120"/>
+              </a:rPr>
+              <a:t>✓</a:t>
+            </a:r>
+            <a:endParaRPr lang="en-US" sz="1200" dirty="0"/>
+          </a:p>
+        </p:txBody>
+      </p:sp>
+      <p:sp>
+        <p:nvSpPr>
+          <p:cNvPr id="10" name="Text 8"/>
+          <p:cNvSpPr/>
+          <p:nvPr/>
+        </p:nvSpPr>
+        <p:spPr>
+          <a:xfrm>
+            <a:off x="1554480" y="3602736"/>
+            <a:ext cx="4206240" cy="365760"/>
+          </a:xfrm>
+          <a:prstGeom prst="rect">
+            <a:avLst/>
+          </a:prstGeom>
+          <a:noFill/>
+          <a:ln/>
+        </p:spPr>
+        <p:txBody>
+          <a:bodyPr wrap="square" lIns="0" tIns="0" rIns="0" bIns="0" rtlCol="0" anchor="ctr"/>
+          <a:lstStyle/>
+          <a:p>
+            <a:pPr marL="0" indent="0">
+              <a:buNone/>
+            </a:pPr>
+            <a:r>
+              <a:rPr lang="en-US" sz="1400" b="1" dirty="0">
+                <a:solidFill>
+                  <a:srgbClr val="1A2E5C"/>
+                </a:solidFill>
+                <a:latin typeface="Calibri" pitchFamily="34" charset="0"/>
+                <a:ea typeface="Calibri" pitchFamily="34" charset="-122"/>
+                <a:cs typeface="Calibri" pitchFamily="34" charset="-120"/>
+              </a:rPr>
+              <a:t>Solo con datos reales</a:t>
+            </a:r>
+            <a:endParaRPr lang="en-US" sz="1400" dirty="0"/>
+          </a:p>
+        </p:txBody>
+      </p:sp>
+      <p:sp>
+        <p:nvSpPr>
+          <p:cNvPr id="11" name="Text 9"/>
+          <p:cNvSpPr/>
+          <p:nvPr/>
+        </p:nvSpPr>
+        <p:spPr>
+          <a:xfrm>
+            <a:off x="1554480" y="3959352"/>
+            <a:ext cx="4251960" cy="548640"/>
+          </a:xfrm>
+          <a:prstGeom prst="rect">
+            <a:avLst/>
+          </a:prstGeom>
+          <a:noFill/>
+          <a:ln/>
+        </p:spPr>
+        <p:txBody>
+          <a:bodyPr wrap="square" lIns="0" tIns="0" rIns="0" bIns="0" rtlCol="0" anchor="ctr"/>
+          <a:lstStyle/>
+          <a:p>
+            <a:pPr marL="0" indent="0">
+              <a:buNone/>
+            </a:pPr>
+            <a:r>
+              <a:rPr lang="en-US" sz="1100" dirty="0">
+                <a:solidFill>
+                  <a:srgbClr val="2C3E50"/>
+                </a:solidFill>
+                <a:latin typeface="Calibri" pitchFamily="34" charset="0"/>
+                <a:ea typeface="Calibri" pitchFamily="34" charset="-122"/>
+                <a:cs typeface="Calibri" pitchFamily="34" charset="-120"/>
+              </a:rPr>
+              <a:t>Los prompts obligan a responder únicamente con los datos entregados; si no alcanzan, lo declara.</a:t>
+            </a:r>
+            <a:endParaRPr lang="en-US" sz="1100" dirty="0"/>
+          </a:p>
+        </p:txBody>
+      </p:sp>
+      <p:sp>
+        <p:nvSpPr>
+          <p:cNvPr id="12" name="Shape 10"/>
+          <p:cNvSpPr/>
+          <p:nvPr/>
+        </p:nvSpPr>
+        <p:spPr>
+          <a:xfrm>
+            <a:off x="6217920" y="3474720"/>
+            <a:ext cx="5394960" cy="1097280"/>
+          </a:xfrm>
+          <a:prstGeom prst="roundRect">
+            <a:avLst>
+              <a:gd name="adj" fmla="val 7500"/>
+            </a:avLst>
+          </a:prstGeom>
+          <a:solidFill>
+            <a:srgbClr val="FFFFFF"/>
+          </a:solidFill>
+          <a:ln w="12700">
+            <a:solidFill>
+              <a:srgbClr val="E1E6EC"/>
+            </a:solidFill>
+            <a:prstDash val="solid"/>
+          </a:ln>
+          <a:effectLst>
+            <a:outerShdw blurRad="88900" dist="38100" dir="5400000" algn="bl" rotWithShape="0">
+              <a:srgbClr val="1A2E5C">
+                <a:alpha val="16000"/>
+              </a:srgbClr>
+            </a:outerShdw>
+          </a:effectLst>
+        </p:spPr>
+        <p:txBody>
+          <a:bodyPr/>
+          <a:lstStyle/>
+          <a:p>
+            <a:endParaRPr lang="en-US"/>
+          </a:p>
+        </p:txBody>
+      </p:sp>
+      <p:sp>
+        <p:nvSpPr>
+          <p:cNvPr id="13" name="Shape 11"/>
+          <p:cNvSpPr/>
+          <p:nvPr/>
+        </p:nvSpPr>
+        <p:spPr>
+          <a:xfrm>
+            <a:off x="6473952" y="3749040"/>
+            <a:ext cx="548640" cy="548640"/>
+          </a:xfrm>
+          <a:prstGeom prst="ellipse">
+            <a:avLst/>
+          </a:prstGeom>
+          <a:solidFill>
+            <a:srgbClr val="12A36A"/>
+          </a:solidFill>
+          <a:ln/>
+          <a:effectLst>
+            <a:outerShdw blurRad="88900" dist="38100" dir="5400000" algn="bl" rotWithShape="0">
+              <a:srgbClr val="1A2E5C">
+                <a:alpha val="16000"/>
+              </a:srgbClr>
+            </a:outerShdw>
+          </a:effectLst>
+        </p:spPr>
+        <p:txBody>
+          <a:bodyPr/>
+          <a:lstStyle/>
+          <a:p>
+            <a:endParaRPr lang="en-US"/>
+          </a:p>
+        </p:txBody>
+      </p:sp>
+      <p:sp>
+        <p:nvSpPr>
+          <p:cNvPr id="14" name="Text 12"/>
+          <p:cNvSpPr/>
+          <p:nvPr/>
+        </p:nvSpPr>
+        <p:spPr>
+          <a:xfrm>
+            <a:off x="6473952" y="3749040"/>
+            <a:ext cx="548640" cy="548640"/>
+          </a:xfrm>
+          <a:prstGeom prst="rect">
+            <a:avLst/>
+          </a:prstGeom>
+          <a:noFill/>
+          <a:ln/>
+        </p:spPr>
+        <p:txBody>
+          <a:bodyPr wrap="square" lIns="0" tIns="0" rIns="0" bIns="0" rtlCol="0" anchor="ctr"/>
+          <a:lstStyle/>
+          <a:p>
+            <a:pPr marL="0" indent="0" algn="ctr">
+              <a:buNone/>
+            </a:pPr>
+            <a:r>
+              <a:rPr lang="en-US" sz="1200" b="1" dirty="0">
+                <a:solidFill>
+                  <a:srgbClr val="FFFFFF"/>
+                </a:solidFill>
+                <a:latin typeface="Calibri" pitchFamily="34" charset="0"/>
+                <a:ea typeface="Calibri" pitchFamily="34" charset="-122"/>
+                <a:cs typeface="Calibri" pitchFamily="34" charset="-120"/>
+              </a:rPr>
+              <a:t>✓</a:t>
+            </a:r>
+            <a:endParaRPr lang="en-US" sz="1200" dirty="0"/>
+          </a:p>
+        </p:txBody>
+      </p:sp>
+      <p:sp>
+        <p:nvSpPr>
+          <p:cNvPr id="15" name="Text 13"/>
+          <p:cNvSpPr/>
+          <p:nvPr/>
+        </p:nvSpPr>
+        <p:spPr>
+          <a:xfrm>
+            <a:off x="7223760" y="3602736"/>
+            <a:ext cx="4206240" cy="365760"/>
+          </a:xfrm>
+          <a:prstGeom prst="rect">
+            <a:avLst/>
+          </a:prstGeom>
+          <a:noFill/>
+          <a:ln/>
+        </p:spPr>
+        <p:txBody>
+          <a:bodyPr wrap="square" lIns="0" tIns="0" rIns="0" bIns="0" rtlCol="0" anchor="ctr"/>
+          <a:lstStyle/>
+          <a:p>
+            <a:pPr marL="0" indent="0">
+              <a:buNone/>
+            </a:pPr>
+            <a:r>
+              <a:rPr lang="en-US" sz="1400" b="1" dirty="0">
+                <a:solidFill>
+                  <a:srgbClr val="1A2E5C"/>
+                </a:solidFill>
+                <a:latin typeface="Calibri" pitchFamily="34" charset="0"/>
+                <a:ea typeface="Calibri" pitchFamily="34" charset="-122"/>
+                <a:cs typeface="Calibri" pitchFamily="34" charset="-120"/>
+              </a:rPr>
+              <a:t>Se puede verificar</a:t>
+            </a:r>
+            <a:endParaRPr lang="en-US" sz="1400" dirty="0"/>
+          </a:p>
+        </p:txBody>
+      </p:sp>
+      <p:sp>
+        <p:nvSpPr>
+          <p:cNvPr id="16" name="Text 14"/>
+          <p:cNvSpPr/>
+          <p:nvPr/>
+        </p:nvSpPr>
+        <p:spPr>
+          <a:xfrm>
+            <a:off x="7223760" y="3959352"/>
+            <a:ext cx="4251960" cy="548640"/>
+          </a:xfrm>
+          <a:prstGeom prst="rect">
+            <a:avLst/>
+          </a:prstGeom>
+          <a:noFill/>
+          <a:ln/>
+        </p:spPr>
+        <p:txBody>
+          <a:bodyPr wrap="square" lIns="0" tIns="0" rIns="0" bIns="0" rtlCol="0" anchor="ctr"/>
+          <a:lstStyle/>
+          <a:p>
+            <a:pPr marL="0" indent="0">
+              <a:buNone/>
+            </a:pPr>
+            <a:r>
+              <a:rPr lang="en-US" sz="1100" dirty="0">
+                <a:solidFill>
+                  <a:srgbClr val="2C3E50"/>
+                </a:solidFill>
+                <a:latin typeface="Calibri" pitchFamily="34" charset="0"/>
+                <a:ea typeface="Calibri" pitchFamily="34" charset="-122"/>
+                <a:cs typeface="Calibri" pitchFamily="34" charset="-120"/>
+              </a:rPr>
+              <a:t>La IA responde solo con información verificable y avisa cuando no tiene datos suficientes; nadie puede inventar resultados sin que se note.</a:t>
+            </a:r>
+            <a:endParaRPr lang="en-US" sz="1100" dirty="0"/>
+          </a:p>
+        </p:txBody>
+      </p:sp>
+      <p:sp>
+        <p:nvSpPr>
+          <p:cNvPr id="17" name="Shape 15"/>
+          <p:cNvSpPr/>
+          <p:nvPr/>
+        </p:nvSpPr>
+        <p:spPr>
+          <a:xfrm>
+            <a:off x="548640" y="4754880"/>
+            <a:ext cx="5394960" cy="1097280"/>
+          </a:xfrm>
+          <a:prstGeom prst="roundRect">
+            <a:avLst>
+              <a:gd name="adj" fmla="val 7500"/>
+            </a:avLst>
+          </a:prstGeom>
+          <a:solidFill>
+            <a:srgbClr val="FFFFFF"/>
+          </a:solidFill>
+          <a:ln w="12700">
+            <a:solidFill>
+              <a:srgbClr val="E1E6EC"/>
+            </a:solidFill>
+            <a:prstDash val="solid"/>
+          </a:ln>
+          <a:effectLst>
+            <a:outerShdw blurRad="88900" dist="38100" dir="5400000" algn="bl" rotWithShape="0">
+              <a:srgbClr val="1A2E5C">
+                <a:alpha val="16000"/>
+              </a:srgbClr>
+            </a:outerShdw>
+          </a:effectLst>
+        </p:spPr>
+        <p:txBody>
+          <a:bodyPr/>
+          <a:lstStyle/>
+          <a:p>
+            <a:endParaRPr lang="en-US"/>
+          </a:p>
+        </p:txBody>
+      </p:sp>
+      <p:sp>
+        <p:nvSpPr>
+          <p:cNvPr id="18" name="Shape 16"/>
+          <p:cNvSpPr/>
+          <p:nvPr/>
+        </p:nvSpPr>
+        <p:spPr>
+          <a:xfrm>
+            <a:off x="804672" y="5029200"/>
+            <a:ext cx="548640" cy="548640"/>
+          </a:xfrm>
+          <a:prstGeom prst="ellipse">
+            <a:avLst/>
+          </a:prstGeom>
+          <a:solidFill>
+            <a:srgbClr val="12A36A"/>
+          </a:solidFill>
+          <a:ln/>
+          <a:effectLst>
+            <a:outerShdw blurRad="88900" dist="38100" dir="5400000" algn="bl" rotWithShape="0">
+              <a:srgbClr val="1A2E5C">
+                <a:alpha val="16000"/>
+              </a:srgbClr>
+            </a:outerShdw>
+          </a:effectLst>
+        </p:spPr>
+        <p:txBody>
+          <a:bodyPr/>
+          <a:lstStyle/>
+          <a:p>
+            <a:endParaRPr lang="en-US"/>
+          </a:p>
+        </p:txBody>
+      </p:sp>
+      <p:sp>
+        <p:nvSpPr>
+          <p:cNvPr id="19" name="Text 17"/>
+          <p:cNvSpPr/>
+          <p:nvPr/>
+        </p:nvSpPr>
+        <p:spPr>
+          <a:xfrm>
+            <a:off x="804672" y="5029200"/>
+            <a:ext cx="548640" cy="548640"/>
+          </a:xfrm>
+          <a:prstGeom prst="rect">
+            <a:avLst/>
+          </a:prstGeom>
+          <a:noFill/>
+          <a:ln/>
+        </p:spPr>
+        <p:txBody>
+          <a:bodyPr wrap="square" lIns="0" tIns="0" rIns="0" bIns="0" rtlCol="0" anchor="ctr"/>
+          <a:lstStyle/>
+          <a:p>
+            <a:pPr marL="0" indent="0" algn="ctr">
+              <a:buNone/>
+            </a:pPr>
+            <a:r>
+              <a:rPr lang="en-US" sz="1200" b="1" dirty="0">
+                <a:solidFill>
+                  <a:srgbClr val="FFFFFF"/>
+                </a:solidFill>
+                <a:latin typeface="Calibri" pitchFamily="34" charset="0"/>
+                <a:ea typeface="Calibri" pitchFamily="34" charset="-122"/>
+                <a:cs typeface="Calibri" pitchFamily="34" charset="-120"/>
+              </a:rPr>
+              <a:t>✓</a:t>
+            </a:r>
+            <a:endParaRPr lang="en-US" sz="1200" dirty="0"/>
+          </a:p>
+        </p:txBody>
+      </p:sp>
+      <p:sp>
+        <p:nvSpPr>
+          <p:cNvPr id="20" name="Text 18"/>
+          <p:cNvSpPr/>
+          <p:nvPr/>
+        </p:nvSpPr>
+        <p:spPr>
+          <a:xfrm>
+            <a:off x="1554480" y="4882896"/>
+            <a:ext cx="4206240" cy="365760"/>
+          </a:xfrm>
+          <a:prstGeom prst="rect">
+            <a:avLst/>
+          </a:prstGeom>
+          <a:noFill/>
+          <a:ln/>
+        </p:spPr>
+        <p:txBody>
+          <a:bodyPr wrap="square" lIns="0" tIns="0" rIns="0" bIns="0" rtlCol="0" anchor="ctr"/>
+          <a:lstStyle/>
+          <a:p>
+            <a:pPr marL="0" indent="0">
+              <a:buNone/>
+            </a:pPr>
+            <a:r>
+              <a:rPr lang="en-US" sz="1400" b="1" dirty="0">
+                <a:solidFill>
+                  <a:srgbClr val="1A2E5C"/>
+                </a:solidFill>
+                <a:latin typeface="Calibri" pitchFamily="34" charset="0"/>
+                <a:ea typeface="Calibri" pitchFamily="34" charset="-122"/>
+                <a:cs typeface="Calibri" pitchFamily="34" charset="-120"/>
+              </a:rPr>
+              <a:t>Sin identificación individual</a:t>
+            </a:r>
+            <a:endParaRPr lang="en-US" sz="1400" dirty="0"/>
+          </a:p>
+        </p:txBody>
+      </p:sp>
+      <p:sp>
+        <p:nvSpPr>
+          <p:cNvPr id="21" name="Text 19"/>
+          <p:cNvSpPr/>
+          <p:nvPr/>
+        </p:nvSpPr>
+        <p:spPr>
+          <a:xfrm>
+            <a:off x="1554480" y="5239512"/>
+            <a:ext cx="4251960" cy="548640"/>
+          </a:xfrm>
+          <a:prstGeom prst="rect">
+            <a:avLst/>
+          </a:prstGeom>
+          <a:noFill/>
+          <a:ln/>
+        </p:spPr>
+        <p:txBody>
+          <a:bodyPr wrap="square" lIns="0" tIns="0" rIns="0" bIns="0" rtlCol="0" anchor="ctr"/>
+          <a:lstStyle/>
+          <a:p>
+            <a:pPr marL="0" indent="0">
+              <a:buNone/>
+            </a:pPr>
+            <a:r>
+              <a:rPr lang="en-US" sz="1100" dirty="0">
+                <a:solidFill>
+                  <a:srgbClr val="2C3E50"/>
+                </a:solidFill>
+                <a:latin typeface="Calibri" pitchFamily="34" charset="0"/>
+                <a:ea typeface="Calibri" pitchFamily="34" charset="-122"/>
+                <a:cs typeface="Calibri" pitchFamily="34" charset="-120"/>
+              </a:rPr>
+              <a:t>La visión clasifica acciones, no personas. Sin biometría facial.</a:t>
+            </a:r>
+            <a:endParaRPr lang="en-US" sz="1100" dirty="0"/>
+          </a:p>
+        </p:txBody>
+      </p:sp>
+      <p:sp>
+        <p:nvSpPr>
+          <p:cNvPr id="22" name="Shape 20"/>
+          <p:cNvSpPr/>
+          <p:nvPr/>
+        </p:nvSpPr>
+        <p:spPr>
+          <a:xfrm>
+            <a:off x="6217920" y="4754880"/>
+            <a:ext cx="5394960" cy="1097280"/>
+          </a:xfrm>
+          <a:prstGeom prst="roundRect">
+            <a:avLst>
+              <a:gd name="adj" fmla="val 7500"/>
+            </a:avLst>
+          </a:prstGeom>
+          <a:solidFill>
+            <a:srgbClr val="FFFFFF"/>
+          </a:solidFill>
+          <a:ln w="12700">
+            <a:solidFill>
+              <a:srgbClr val="E1E6EC"/>
+            </a:solidFill>
+            <a:prstDash val="solid"/>
+          </a:ln>
+          <a:effectLst>
+            <a:outerShdw blurRad="88900" dist="38100" dir="5400000" algn="bl" rotWithShape="0">
+              <a:srgbClr val="1A2E5C">
+                <a:alpha val="16000"/>
+              </a:srgbClr>
+            </a:outerShdw>
+          </a:effectLst>
+        </p:spPr>
+        <p:txBody>
+          <a:bodyPr/>
+          <a:lstStyle/>
+          <a:p>
+            <a:endParaRPr lang="en-US"/>
+          </a:p>
+        </p:txBody>
+      </p:sp>
+      <p:sp>
+        <p:nvSpPr>
+          <p:cNvPr id="23" name="Shape 21"/>
+          <p:cNvSpPr/>
+          <p:nvPr/>
+        </p:nvSpPr>
+        <p:spPr>
+          <a:xfrm>
+            <a:off x="6473952" y="5029200"/>
+            <a:ext cx="548640" cy="548640"/>
+          </a:xfrm>
+          <a:prstGeom prst="ellipse">
+            <a:avLst/>
+          </a:prstGeom>
+          <a:solidFill>
+            <a:srgbClr val="12A36A"/>
+          </a:solidFill>
+          <a:ln/>
+          <a:effectLst>
+            <a:outerShdw blurRad="88900" dist="38100" dir="5400000" algn="bl" rotWithShape="0">
+              <a:srgbClr val="1A2E5C">
+                <a:alpha val="16000"/>
+              </a:srgbClr>
+            </a:outerShdw>
+          </a:effectLst>
+        </p:spPr>
+        <p:txBody>
+          <a:bodyPr/>
+          <a:lstStyle/>
+          <a:p>
+            <a:endParaRPr lang="en-US"/>
+          </a:p>
+        </p:txBody>
+      </p:sp>
+      <p:sp>
+        <p:nvSpPr>
+          <p:cNvPr id="24" name="Text 22"/>
+          <p:cNvSpPr/>
+          <p:nvPr/>
+        </p:nvSpPr>
+        <p:spPr>
+          <a:xfrm>
+            <a:off x="6473952" y="5029200"/>
+            <a:ext cx="548640" cy="548640"/>
+          </a:xfrm>
+          <a:prstGeom prst="rect">
+            <a:avLst/>
+          </a:prstGeom>
+          <a:noFill/>
+          <a:ln/>
+        </p:spPr>
+        <p:txBody>
+          <a:bodyPr wrap="square" lIns="0" tIns="0" rIns="0" bIns="0" rtlCol="0" anchor="ctr"/>
+          <a:lstStyle/>
+          <a:p>
+            <a:pPr marL="0" indent="0" algn="ctr">
+              <a:buNone/>
+            </a:pPr>
+            <a:r>
+              <a:rPr lang="en-US" sz="1200" b="1" dirty="0">
+                <a:solidFill>
+                  <a:srgbClr val="FFFFFF"/>
+                </a:solidFill>
+                <a:latin typeface="Calibri" pitchFamily="34" charset="0"/>
+                <a:ea typeface="Calibri" pitchFamily="34" charset="-122"/>
+                <a:cs typeface="Calibri" pitchFamily="34" charset="-120"/>
+              </a:rPr>
+              <a:t>✓</a:t>
+            </a:r>
+            <a:endParaRPr lang="en-US" sz="1200" dirty="0"/>
+          </a:p>
+        </p:txBody>
+      </p:sp>
+      <p:sp>
+        <p:nvSpPr>
+          <p:cNvPr id="25" name="Text 23"/>
+          <p:cNvSpPr/>
+          <p:nvPr/>
+        </p:nvSpPr>
+        <p:spPr>
+          <a:xfrm>
+            <a:off x="7223760" y="4882896"/>
+            <a:ext cx="4206240" cy="365760"/>
+          </a:xfrm>
+          <a:prstGeom prst="rect">
+            <a:avLst/>
+          </a:prstGeom>
+          <a:noFill/>
+          <a:ln/>
+        </p:spPr>
+        <p:txBody>
+          <a:bodyPr wrap="square" lIns="0" tIns="0" rIns="0" bIns="0" rtlCol="0" anchor="ctr"/>
+          <a:lstStyle/>
+          <a:p>
+            <a:pPr marL="0" indent="0">
+              <a:buNone/>
+            </a:pPr>
+            <a:r>
+              <a:rPr lang="en-US" sz="1400" b="1" dirty="0">
+                <a:solidFill>
+                  <a:srgbClr val="1A2E5C"/>
+                </a:solidFill>
+                <a:latin typeface="Calibri" pitchFamily="34" charset="0"/>
+                <a:ea typeface="Calibri" pitchFamily="34" charset="-122"/>
+                <a:cs typeface="Calibri" pitchFamily="34" charset="-120"/>
+              </a:rPr>
+              <a:t>Revisión humana</a:t>
+            </a:r>
+            <a:endParaRPr lang="en-US" sz="1400" dirty="0"/>
+          </a:p>
+        </p:txBody>
+      </p:sp>
+      <p:sp>
+        <p:nvSpPr>
+          <p:cNvPr id="26" name="Text 24"/>
+          <p:cNvSpPr/>
+          <p:nvPr/>
+        </p:nvSpPr>
+        <p:spPr>
+          <a:xfrm>
+            <a:off x="7223760" y="5239512"/>
+            <a:ext cx="4251960" cy="548640"/>
+          </a:xfrm>
+          <a:prstGeom prst="rect">
+            <a:avLst/>
+          </a:prstGeom>
+          <a:noFill/>
+          <a:ln/>
+        </p:spPr>
+        <p:txBody>
+          <a:bodyPr wrap="square" lIns="0" tIns="0" rIns="0" bIns="0" rtlCol="0" anchor="ctr"/>
+          <a:lstStyle/>
+          <a:p>
+            <a:pPr marL="0" indent="0">
+              <a:buNone/>
+            </a:pPr>
+            <a:r>
+              <a:rPr lang="en-US" sz="1100" dirty="0">
+                <a:solidFill>
+                  <a:srgbClr val="2C3E50"/>
+                </a:solidFill>
+                <a:latin typeface="Calibri" pitchFamily="34" charset="0"/>
+                <a:ea typeface="Calibri" pitchFamily="34" charset="-122"/>
+                <a:cs typeface="Calibri" pitchFamily="34" charset="-120"/>
+              </a:rPr>
+              <a:t>Las alertas apoyan la decisión; la decisión final siempre la toma una persona responsable.</a:t>
+            </a:r>
+            <a:endParaRPr lang="en-US" sz="1100" dirty="0"/>
+          </a:p>
+        </p:txBody>
+      </p:sp>
+      <p:sp>
+        <p:nvSpPr>
+          <p:cNvPr id="27" name="Text 25"/>
+          <p:cNvSpPr/>
+          <p:nvPr/>
+        </p:nvSpPr>
+        <p:spPr>
+          <a:xfrm>
+            <a:off x="548640" y="6473952"/>
+            <a:ext cx="8229600" cy="274320"/>
+          </a:xfrm>
+          <a:prstGeom prst="rect">
+            <a:avLst/>
+          </a:prstGeom>
+          <a:noFill/>
+          <a:ln/>
+        </p:spPr>
+        <p:txBody>
+          <a:bodyPr wrap="square" lIns="0" tIns="0" rIns="0" bIns="0" rtlCol="0" anchor="ctr"/>
+          <a:lstStyle/>
+          <a:p>
+            <a:pPr marL="0" indent="0" algn="l">
+              <a:buNone/>
+            </a:pPr>
+            <a:r>
+              <a:rPr lang="en-US" sz="900" dirty="0">
+                <a:solidFill>
+                  <a:srgbClr val="7B8794"/>
+                </a:solidFill>
+                <a:latin typeface="Calibri" pitchFamily="34" charset="0"/>
+                <a:ea typeface="Calibri" pitchFamily="34" charset="-122"/>
+                <a:cs typeface="Calibri" pitchFamily="34" charset="-120"/>
+              </a:rPr>
+              <a:t>VigIA · Equipo 80 — Concurso Datos al Ecosistema 2026</a:t>
+            </a:r>
+            <a:endParaRPr lang="en-US" sz="900" dirty="0"/>
+          </a:p>
+        </p:txBody>
+      </p:sp>
+      <p:sp>
+        <p:nvSpPr>
+          <p:cNvPr id="28" name="Text 26"/>
+          <p:cNvSpPr/>
+          <p:nvPr/>
+        </p:nvSpPr>
+        <p:spPr>
+          <a:xfrm>
+            <a:off x="11155680" y="6473952"/>
+            <a:ext cx="457200" cy="274320"/>
+          </a:xfrm>
+          <a:prstGeom prst="rect">
+            <a:avLst/>
+          </a:prstGeom>
+          <a:noFill/>
+          <a:ln/>
+        </p:spPr>
+        <p:txBody>
+          <a:bodyPr wrap="square" lIns="0" tIns="0" rIns="0" bIns="0" rtlCol="0" anchor="ctr"/>
+          <a:lstStyle/>
+          <a:p>
+            <a:pPr marL="0" indent="0" algn="r">
+              <a:buNone/>
+            </a:pPr>
+            <a:r>
+              <a:rPr lang="en-US" sz="900" dirty="0">
+                <a:solidFill>
+                  <a:srgbClr val="7B8794"/>
+                </a:solidFill>
+                <a:latin typeface="Calibri" pitchFamily="34" charset="0"/>
+                <a:ea typeface="Calibri" pitchFamily="34" charset="-122"/>
+                <a:cs typeface="Calibri" pitchFamily="34" charset="-120"/>
+              </a:rPr>
+              <a:t>9</a:t>
+            </a:r>
+            <a:endParaRPr lang="en-US" sz="900" dirty="0"/>
+          </a:p>
+        </p:txBody>
+      </p:sp>
+    </p:spTree>
+  </p:cSld>
+  <p:clrMapOvr>
+    <a:masterClrMapping/>
+  </p:clrMapOvr>
+</p:sld>
+</file>
+
+<file path=ppt/slides/slide12.xml><?xml version="1.0" encoding="utf-8"?>
+<p:sld xmlns:a="http://schemas.openxmlformats.org/drawingml/2006/main" xmlns:r="http://schemas.openxmlformats.org/officeDocument/2006/relationships" xmlns:p="http://schemas.openxmlformats.org/presentationml/2006/main">
   <p:cSld name="Slide 10">
     <p:bg>
       <p:bgPr>
@@ -3817,7 +5678,7 @@
                 <a:ea typeface="Calibri" pitchFamily="34" charset="-122"/>
                 <a:cs typeface="Calibri" pitchFamily="34" charset="-120"/>
               </a:rPr>
-              <a:t>Política Nacional para la Transformación Digital e IA — uso responsable e innovación.</a:t>
+              <a:t>Política Nacional para la Transformación Digital e IA — uso responsable e innovación. Se suma el Decreto 768 de 2025 (videovigilancia en Propiedad Horizontal), relevante para el hurto a residencias.</a:t>
             </a:r>
             <a:endParaRPr lang="en-US" sz="1100" dirty="0"/>
           </a:p>
@@ -4421,7 +6282,7 @@
 </p:sld>
 </file>
 
-<file path=ppt/slides/slide11.xml><?xml version="1.0" encoding="utf-8"?>
+<file path=ppt/slides/slide13.xml><?xml version="1.0" encoding="utf-8"?>
 <p:sld xmlns:a="http://schemas.openxmlformats.org/drawingml/2006/main" xmlns:r="http://schemas.openxmlformats.org/officeDocument/2006/relationships" xmlns:p="http://schemas.openxmlformats.org/presentationml/2006/main">
   <p:cSld name="Slide 11">
     <p:bg>
@@ -5647,7 +7508,7 @@
 </p:sld>
 </file>
 
-<file path=ppt/slides/slide12.xml><?xml version="1.0" encoding="utf-8"?>
+<file path=ppt/slides/slide14.xml><?xml version="1.0" encoding="utf-8"?>
 <p:sld xmlns:a="http://schemas.openxmlformats.org/drawingml/2006/main" xmlns:r="http://schemas.openxmlformats.org/officeDocument/2006/relationships" xmlns:p="http://schemas.openxmlformats.org/presentationml/2006/main">
   <p:cSld name="Slide 12">
     <p:bg>
@@ -6853,7 +8714,7 @@
 </p:sld>
 </file>
 
-<file path=ppt/slides/slide13.xml><?xml version="1.0" encoding="utf-8"?>
+<file path=ppt/slides/slide15.xml><?xml version="1.0" encoding="utf-8"?>
 <p:sld xmlns:a="http://schemas.openxmlformats.org/drawingml/2006/main" xmlns:r="http://schemas.openxmlformats.org/officeDocument/2006/relationships" xmlns:p="http://schemas.openxmlformats.org/presentationml/2006/main">
   <p:cSld name="Slide 13">
     <p:bg>
@@ -8205,7 +10066,7 @@
 </p:sld>
 </file>
 
-<file path=ppt/slides/slide14.xml><?xml version="1.0" encoding="utf-8"?>
+<file path=ppt/slides/slide16.xml><?xml version="1.0" encoding="utf-8"?>
 <p:sld xmlns:a="http://schemas.openxmlformats.org/drawingml/2006/main" xmlns:r="http://schemas.openxmlformats.org/officeDocument/2006/relationships" xmlns:p="http://schemas.openxmlformats.org/presentationml/2006/main">
   <p:cSld name="Slide 14">
     <p:bg>
@@ -8731,7 +10592,7 @@
 </p:sld>
 </file>
 
-<file path=ppt/slides/slide15.xml><?xml version="1.0" encoding="utf-8"?>
+<file path=ppt/slides/slide17.xml><?xml version="1.0" encoding="utf-8"?>
 <p:sld xmlns:a="http://schemas.openxmlformats.org/drawingml/2006/main" xmlns:r="http://schemas.openxmlformats.org/officeDocument/2006/relationships" xmlns:p="http://schemas.openxmlformats.org/presentationml/2006/main">
   <p:cSld name="Slide 15">
     <p:bg>
@@ -12378,7 +14239,7 @@
                 <a:ea typeface="Calibri" pitchFamily="34" charset="-122"/>
                 <a:cs typeface="Calibri" pitchFamily="34" charset="-120"/>
               </a:rPr>
-              <a:t>15</a:t>
+              <a:t>13</a:t>
             </a:r>
             <a:endParaRPr lang="en-US" sz="900" dirty="0"/>
           </a:p>
@@ -12392,7 +14253,7 @@
 </p:sld>
 </file>
 
-<file path=ppt/slides/slide16.xml><?xml version="1.0" encoding="utf-8"?>
+<file path=ppt/slides/slide18.xml><?xml version="1.0" encoding="utf-8"?>
 <p:sld xmlns:a="http://schemas.openxmlformats.org/drawingml/2006/main" xmlns:r="http://schemas.openxmlformats.org/officeDocument/2006/relationships" xmlns:p="http://schemas.openxmlformats.org/presentationml/2006/main">
   <p:cSld name="Slide 16">
     <p:bg>
@@ -13787,7 +15648,7 @@
                 <a:ea typeface="Calibri" pitchFamily="34" charset="-122"/>
                 <a:cs typeface="Calibri" pitchFamily="34" charset="-120"/>
               </a:rPr>
-              <a:t>16</a:t>
+              <a:t>14</a:t>
             </a:r>
             <a:endParaRPr lang="en-US" sz="900" dirty="0"/>
           </a:p>
@@ -13801,7 +15662,7 @@
 </p:sld>
 </file>
 
-<file path=ppt/slides/slide17.xml><?xml version="1.0" encoding="utf-8"?>
+<file path=ppt/slides/slide19.xml><?xml version="1.0" encoding="utf-8"?>
 <p:sld xmlns:a="http://schemas.openxmlformats.org/drawingml/2006/main" xmlns:r="http://schemas.openxmlformats.org/officeDocument/2006/relationships" xmlns:p="http://schemas.openxmlformats.org/presentationml/2006/main">
   <p:cSld name="Slide 17">
     <p:bg>
@@ -15321,7 +17182,7 @@
                 <a:ea typeface="Calibri" pitchFamily="34" charset="-122"/>
                 <a:cs typeface="Calibri" pitchFamily="34" charset="-120"/>
               </a:rPr>
-              <a:t>17</a:t>
+              <a:t>15</a:t>
             </a:r>
             <a:endParaRPr lang="en-US" sz="900" dirty="0"/>
           </a:p>
@@ -15335,7 +17196,57 @@
 </p:sld>
 </file>
 
-<file path=ppt/slides/slide18.xml><?xml version="1.0" encoding="utf-8"?>
+<file path=ppt/slides/slide2.xml><?xml version="1.0" encoding="utf-8"?>
+<p:sld xmlns:a="http://schemas.openxmlformats.org/drawingml/2006/main" xmlns:p="http://schemas.openxmlformats.org/presentationml/2006/main" xmlns:r="http://schemas.openxmlformats.org/officeDocument/2006/relationships">
+  <p:cSld>
+    <p:bg>
+      <p:bgPr>
+        <a:solidFill>
+          <a:srgbClr val="0F1A34"/>
+        </a:solidFill>
+        <a:effectLst/>
+      </p:bgPr>
+    </p:bg>
+    <p:spTree>
+      <p:nvGrpSpPr>
+        <p:cNvPr id="1" name=""/>
+        <p:cNvGrpSpPr/>
+        <p:nvPr/>
+      </p:nvGrpSpPr>
+      <p:grpSpPr/>
+      <p:pic>
+        <p:nvPicPr>
+          <p:cNvPr id="2" name="Picture 1" descr="drone_scan.gif"/>
+          <p:cNvPicPr>
+            <a:picLocks noChangeAspect="1"/>
+          </p:cNvPicPr>
+          <p:nvPr/>
+        </p:nvPicPr>
+        <p:blipFill>
+          <a:blip r:embed="rId2"/>
+          <a:stretch>
+            <a:fillRect/>
+          </a:stretch>
+        </p:blipFill>
+        <p:spPr>
+          <a:xfrm>
+            <a:off x="2185481" y="365760"/>
+            <a:ext cx="7821038" cy="6126480"/>
+          </a:xfrm>
+          <a:prstGeom prst="rect">
+            <a:avLst/>
+          </a:prstGeom>
+        </p:spPr>
+      </p:pic>
+    </p:spTree>
+  </p:cSld>
+  <p:clrMapOvr>
+    <a:masterClrMapping/>
+  </p:clrMapOvr>
+</p:sld>
+</file>
+
+<file path=ppt/slides/slide20.xml><?xml version="1.0" encoding="utf-8"?>
 <p:sld xmlns:a="http://schemas.openxmlformats.org/drawingml/2006/main" xmlns:r="http://schemas.openxmlformats.org/officeDocument/2006/relationships" xmlns:p="http://schemas.openxmlformats.org/presentationml/2006/main">
   <p:cSld name="Slide 18">
     <p:bg>
@@ -15825,7 +17736,7 @@
                 <a:ea typeface="Calibri" pitchFamily="34" charset="-122"/>
                 <a:cs typeface="Calibri" pitchFamily="34" charset="-120"/>
               </a:rPr>
-              <a:t>Con los datos ya consultados (Socrata), responde en lenguaje ciudadano según el dominio: Ambiental, Seguridad, Predictor, Simulador o VigIA.</a:t>
+              <a:t>Con los datos ya consultados (Socrata), responde en lenguaje ciudadano según el dominio: Ambiental, Seguridad, Predictor, Simulador o VigIA. Cada “agente” es un módulo de software especializado en el sistema — no una persona ni una empresa contratada.</a:t>
             </a:r>
             <a:endParaRPr lang="en-US" sz="1150" dirty="0"/>
           </a:p>
@@ -16102,7 +18013,7 @@
                 <a:ea typeface="Calibri" pitchFamily="34" charset="-122"/>
                 <a:cs typeface="Calibri" pitchFamily="34" charset="-120"/>
               </a:rPr>
-              <a:t>18</a:t>
+              <a:t>16</a:t>
             </a:r>
             <a:endParaRPr lang="en-US" sz="900" dirty="0"/>
           </a:p>
@@ -16116,7 +18027,7 @@
 </p:sld>
 </file>
 
-<file path=ppt/slides/slide19.xml><?xml version="1.0" encoding="utf-8"?>
+<file path=ppt/slides/slide21.xml><?xml version="1.0" encoding="utf-8"?>
 <p:sld xmlns:a="http://schemas.openxmlformats.org/drawingml/2006/main" xmlns:r="http://schemas.openxmlformats.org/officeDocument/2006/relationships" xmlns:p="http://schemas.openxmlformats.org/presentationml/2006/main">
   <p:cSld name="Slide 19">
     <p:bg>
@@ -16693,7 +18604,7 @@
                 <a:ea typeface="Calibri" pitchFamily="34" charset="-122"/>
                 <a:cs typeface="Calibri" pitchFamily="34" charset="-120"/>
               </a:rPr>
-              <a:t>el sistema de detección hace POST a api/evento.php; VigIA lo guarda y lo cruza con SIEDCO.
+              <a:t>recepción automática del evento: el modelo de IA analiza el video, clasifica el tipo de evento y VigIA lo valida cruzándolo con las cifras oficiales de SIEDCO.
 </a:t>
             </a:r>
             <a:r>
@@ -16794,7 +18705,7 @@
                 <a:ea typeface="Calibri" pitchFamily="34" charset="-122"/>
                 <a:cs typeface="Calibri" pitchFamily="34" charset="-120"/>
               </a:rPr>
-              <a:t>19</a:t>
+              <a:t>17</a:t>
             </a:r>
             <a:endParaRPr lang="en-US" sz="900" dirty="0"/>
           </a:p>
@@ -16808,969 +18719,7 @@
 </p:sld>
 </file>
 
-<file path=ppt/slides/slide2.xml><?xml version="1.0" encoding="utf-8"?>
-<p:sld xmlns:a="http://schemas.openxmlformats.org/drawingml/2006/main" xmlns:r="http://schemas.openxmlformats.org/officeDocument/2006/relationships" xmlns:p="http://schemas.openxmlformats.org/presentationml/2006/main">
-  <p:cSld name="Slide 2">
-    <p:bg>
-      <p:bgPr>
-        <a:solidFill>
-          <a:srgbClr val="FFFFFF"/>
-        </a:solidFill>
-        <a:effectLst/>
-      </p:bgPr>
-    </p:bg>
-    <p:spTree>
-      <p:nvGrpSpPr>
-        <p:cNvPr id="1" name=""/>
-        <p:cNvGrpSpPr/>
-        <p:nvPr/>
-      </p:nvGrpSpPr>
-      <p:grpSpPr>
-        <a:xfrm>
-          <a:off x="0" y="0"/>
-          <a:ext cx="0" cy="0"/>
-          <a:chOff x="0" y="0"/>
-          <a:chExt cx="0" cy="0"/>
-        </a:xfrm>
-      </p:grpSpPr>
-      <p:sp>
-        <p:nvSpPr>
-          <p:cNvPr id="2" name="Text 0"/>
-          <p:cNvSpPr/>
-          <p:nvPr/>
-        </p:nvSpPr>
-        <p:spPr>
-          <a:xfrm>
-            <a:off x="548640" y="411480"/>
-            <a:ext cx="10058400" cy="274320"/>
-          </a:xfrm>
-          <a:prstGeom prst="rect">
-            <a:avLst/>
-          </a:prstGeom>
-          <a:noFill/>
-          <a:ln/>
-        </p:spPr>
-        <p:txBody>
-          <a:bodyPr wrap="square" lIns="0" tIns="0" rIns="0" bIns="0" rtlCol="0" anchor="ctr"/>
-          <a:lstStyle/>
-          <a:p>
-            <a:pPr marL="0" indent="0">
-              <a:buNone/>
-            </a:pPr>
-            <a:r>
-              <a:rPr lang="en-US" sz="1200" b="1" kern="0" spc="200" dirty="0">
-                <a:solidFill>
-                  <a:srgbClr val="12A36A"/>
-                </a:solidFill>
-                <a:latin typeface="Calibri" pitchFamily="34" charset="0"/>
-                <a:ea typeface="Calibri" pitchFamily="34" charset="-122"/>
-                <a:cs typeface="Calibri" pitchFamily="34" charset="-120"/>
-              </a:rPr>
-              <a:t>EL RETO</a:t>
-            </a:r>
-            <a:endParaRPr lang="en-US" sz="1200" dirty="0"/>
-          </a:p>
-        </p:txBody>
-      </p:sp>
-      <p:sp>
-        <p:nvSpPr>
-          <p:cNvPr id="3" name="Text 1"/>
-          <p:cNvSpPr/>
-          <p:nvPr/>
-        </p:nvSpPr>
-        <p:spPr>
-          <a:xfrm>
-            <a:off x="548640" y="658368"/>
-            <a:ext cx="11064240" cy="731520"/>
-          </a:xfrm>
-          <a:prstGeom prst="rect">
-            <a:avLst/>
-          </a:prstGeom>
-          <a:noFill/>
-          <a:ln/>
-        </p:spPr>
-        <p:txBody>
-          <a:bodyPr wrap="square" lIns="0" tIns="0" rIns="0" bIns="0" rtlCol="0" anchor="ctr"/>
-          <a:lstStyle/>
-          <a:p>
-            <a:pPr marL="0" indent="0">
-              <a:buNone/>
-            </a:pPr>
-            <a:r>
-              <a:rPr lang="en-US" sz="3000" b="1" dirty="0">
-                <a:solidFill>
-                  <a:srgbClr val="1A2E5C"/>
-                </a:solidFill>
-                <a:latin typeface="Calibri" pitchFamily="34" charset="0"/>
-                <a:ea typeface="Calibri" pitchFamily="34" charset="-122"/>
-                <a:cs typeface="Calibri" pitchFamily="34" charset="-120"/>
-              </a:rPr>
-              <a:t>Los datos existen, pero el ciudadano no los entiende a tiempo</a:t>
-            </a:r>
-            <a:endParaRPr lang="en-US" sz="3000" dirty="0"/>
-          </a:p>
-        </p:txBody>
-      </p:sp>
-      <p:sp>
-        <p:nvSpPr>
-          <p:cNvPr id="4" name="Shape 2"/>
-          <p:cNvSpPr/>
-          <p:nvPr/>
-        </p:nvSpPr>
-        <p:spPr>
-          <a:xfrm>
-            <a:off x="548640" y="1737360"/>
-            <a:ext cx="6492240" cy="1143000"/>
-          </a:xfrm>
-          <a:prstGeom prst="roundRect">
-            <a:avLst>
-              <a:gd name="adj" fmla="val 7200"/>
-            </a:avLst>
-          </a:prstGeom>
-          <a:solidFill>
-            <a:srgbClr val="FFFFFF"/>
-          </a:solidFill>
-          <a:ln w="12700">
-            <a:solidFill>
-              <a:srgbClr val="E1E6EC"/>
-            </a:solidFill>
-            <a:prstDash val="solid"/>
-          </a:ln>
-          <a:effectLst>
-            <a:outerShdw blurRad="88900" dist="38100" dir="5400000" algn="bl" rotWithShape="0">
-              <a:srgbClr val="1A2E5C">
-                <a:alpha val="16000"/>
-              </a:srgbClr>
-            </a:outerShdw>
-          </a:effectLst>
-        </p:spPr>
-        <p:txBody>
-          <a:bodyPr/>
-          <a:lstStyle/>
-          <a:p>
-            <a:endParaRPr lang="en-US"/>
-          </a:p>
-        </p:txBody>
-      </p:sp>
-      <p:sp>
-        <p:nvSpPr>
-          <p:cNvPr id="5" name="Shape 3"/>
-          <p:cNvSpPr/>
-          <p:nvPr/>
-        </p:nvSpPr>
-        <p:spPr>
-          <a:xfrm>
-            <a:off x="804672" y="2011680"/>
-            <a:ext cx="594360" cy="594360"/>
-          </a:xfrm>
-          <a:prstGeom prst="ellipse">
-            <a:avLst/>
-          </a:prstGeom>
-          <a:solidFill>
-            <a:srgbClr val="C0392B"/>
-          </a:solidFill>
-          <a:ln/>
-          <a:effectLst>
-            <a:outerShdw blurRad="88900" dist="38100" dir="5400000" algn="bl" rotWithShape="0">
-              <a:srgbClr val="1A2E5C">
-                <a:alpha val="16000"/>
-              </a:srgbClr>
-            </a:outerShdw>
-          </a:effectLst>
-        </p:spPr>
-        <p:txBody>
-          <a:bodyPr/>
-          <a:lstStyle/>
-          <a:p>
-            <a:endParaRPr lang="en-US"/>
-          </a:p>
-        </p:txBody>
-      </p:sp>
-      <p:sp>
-        <p:nvSpPr>
-          <p:cNvPr id="6" name="Text 4"/>
-          <p:cNvSpPr/>
-          <p:nvPr/>
-        </p:nvSpPr>
-        <p:spPr>
-          <a:xfrm>
-            <a:off x="804672" y="2011680"/>
-            <a:ext cx="594360" cy="594360"/>
-          </a:xfrm>
-          <a:prstGeom prst="rect">
-            <a:avLst/>
-          </a:prstGeom>
-          <a:noFill/>
-          <a:ln/>
-        </p:spPr>
-        <p:txBody>
-          <a:bodyPr wrap="square" lIns="0" tIns="0" rIns="0" bIns="0" rtlCol="0" anchor="ctr"/>
-          <a:lstStyle/>
-          <a:p>
-            <a:pPr marL="0" indent="0" algn="ctr">
-              <a:buNone/>
-            </a:pPr>
-            <a:r>
-              <a:rPr lang="en-US" sz="1300" b="1" dirty="0">
-                <a:solidFill>
-                  <a:srgbClr val="FFFFFF"/>
-                </a:solidFill>
-                <a:latin typeface="Calibri" pitchFamily="34" charset="0"/>
-                <a:ea typeface="Calibri" pitchFamily="34" charset="-122"/>
-                <a:cs typeface="Calibri" pitchFamily="34" charset="-120"/>
-              </a:rPr>
-              <a:t>!</a:t>
-            </a:r>
-            <a:endParaRPr lang="en-US" sz="1300" dirty="0"/>
-          </a:p>
-        </p:txBody>
-      </p:sp>
-      <p:sp>
-        <p:nvSpPr>
-          <p:cNvPr id="7" name="Text 5"/>
-          <p:cNvSpPr/>
-          <p:nvPr/>
-        </p:nvSpPr>
-        <p:spPr>
-          <a:xfrm>
-            <a:off x="1645920" y="1901952"/>
-            <a:ext cx="5120640" cy="365760"/>
-          </a:xfrm>
-          <a:prstGeom prst="rect">
-            <a:avLst/>
-          </a:prstGeom>
-          <a:noFill/>
-          <a:ln/>
-        </p:spPr>
-        <p:txBody>
-          <a:bodyPr wrap="square" lIns="0" tIns="0" rIns="0" bIns="0" rtlCol="0" anchor="ctr"/>
-          <a:lstStyle/>
-          <a:p>
-            <a:pPr marL="0" indent="0">
-              <a:buNone/>
-            </a:pPr>
-            <a:r>
-              <a:rPr lang="en-US" sz="1700" b="1" dirty="0">
-                <a:solidFill>
-                  <a:srgbClr val="1A2E5C"/>
-                </a:solidFill>
-                <a:latin typeface="Calibri" pitchFamily="34" charset="0"/>
-                <a:ea typeface="Calibri" pitchFamily="34" charset="-122"/>
-                <a:cs typeface="Calibri" pitchFamily="34" charset="-120"/>
-              </a:rPr>
-              <a:t>Fragmentados</a:t>
-            </a:r>
-            <a:endParaRPr lang="en-US" sz="1700" dirty="0"/>
-          </a:p>
-        </p:txBody>
-      </p:sp>
-      <p:sp>
-        <p:nvSpPr>
-          <p:cNvPr id="8" name="Text 6"/>
-          <p:cNvSpPr/>
-          <p:nvPr/>
-        </p:nvSpPr>
-        <p:spPr>
-          <a:xfrm>
-            <a:off x="1645920" y="2286000"/>
-            <a:ext cx="5212080" cy="502920"/>
-          </a:xfrm>
-          <a:prstGeom prst="rect">
-            <a:avLst/>
-          </a:prstGeom>
-          <a:noFill/>
-          <a:ln/>
-        </p:spPr>
-        <p:txBody>
-          <a:bodyPr wrap="square" lIns="0" tIns="0" rIns="0" bIns="0" rtlCol="0" anchor="ctr"/>
-          <a:lstStyle/>
-          <a:p>
-            <a:pPr marL="0" indent="0">
-              <a:buNone/>
-            </a:pPr>
-            <a:r>
-              <a:rPr lang="en-US" sz="1250" dirty="0">
-                <a:solidFill>
-                  <a:srgbClr val="2C3E50"/>
-                </a:solidFill>
-                <a:latin typeface="Calibri" pitchFamily="34" charset="0"/>
-                <a:ea typeface="Calibri" pitchFamily="34" charset="-122"/>
-                <a:cs typeface="Calibri" pitchFamily="34" charset="-120"/>
-              </a:rPr>
-              <a:t>Cientos de datasets técnicos dispersos en portales oficiales.</a:t>
-            </a:r>
-            <a:endParaRPr lang="en-US" sz="1250" dirty="0"/>
-          </a:p>
-        </p:txBody>
-      </p:sp>
-      <p:sp>
-        <p:nvSpPr>
-          <p:cNvPr id="9" name="Shape 7"/>
-          <p:cNvSpPr/>
-          <p:nvPr/>
-        </p:nvSpPr>
-        <p:spPr>
-          <a:xfrm>
-            <a:off x="548640" y="3063240"/>
-            <a:ext cx="6492240" cy="1143000"/>
-          </a:xfrm>
-          <a:prstGeom prst="roundRect">
-            <a:avLst>
-              <a:gd name="adj" fmla="val 7200"/>
-            </a:avLst>
-          </a:prstGeom>
-          <a:solidFill>
-            <a:srgbClr val="FFFFFF"/>
-          </a:solidFill>
-          <a:ln w="12700">
-            <a:solidFill>
-              <a:srgbClr val="E1E6EC"/>
-            </a:solidFill>
-            <a:prstDash val="solid"/>
-          </a:ln>
-          <a:effectLst>
-            <a:outerShdw blurRad="88900" dist="38100" dir="5400000" algn="bl" rotWithShape="0">
-              <a:srgbClr val="1A2E5C">
-                <a:alpha val="16000"/>
-              </a:srgbClr>
-            </a:outerShdw>
-          </a:effectLst>
-        </p:spPr>
-        <p:txBody>
-          <a:bodyPr/>
-          <a:lstStyle/>
-          <a:p>
-            <a:endParaRPr lang="en-US"/>
-          </a:p>
-        </p:txBody>
-      </p:sp>
-      <p:sp>
-        <p:nvSpPr>
-          <p:cNvPr id="10" name="Shape 8"/>
-          <p:cNvSpPr/>
-          <p:nvPr/>
-        </p:nvSpPr>
-        <p:spPr>
-          <a:xfrm>
-            <a:off x="804672" y="3337560"/>
-            <a:ext cx="594360" cy="594360"/>
-          </a:xfrm>
-          <a:prstGeom prst="ellipse">
-            <a:avLst/>
-          </a:prstGeom>
-          <a:solidFill>
-            <a:srgbClr val="2563AB"/>
-          </a:solidFill>
-          <a:ln/>
-          <a:effectLst>
-            <a:outerShdw blurRad="88900" dist="38100" dir="5400000" algn="bl" rotWithShape="0">
-              <a:srgbClr val="1A2E5C">
-                <a:alpha val="16000"/>
-              </a:srgbClr>
-            </a:outerShdw>
-          </a:effectLst>
-        </p:spPr>
-        <p:txBody>
-          <a:bodyPr/>
-          <a:lstStyle/>
-          <a:p>
-            <a:endParaRPr lang="en-US"/>
-          </a:p>
-        </p:txBody>
-      </p:sp>
-      <p:sp>
-        <p:nvSpPr>
-          <p:cNvPr id="11" name="Text 9"/>
-          <p:cNvSpPr/>
-          <p:nvPr/>
-        </p:nvSpPr>
-        <p:spPr>
-          <a:xfrm>
-            <a:off x="804672" y="3337560"/>
-            <a:ext cx="594360" cy="594360"/>
-          </a:xfrm>
-          <a:prstGeom prst="rect">
-            <a:avLst/>
-          </a:prstGeom>
-          <a:noFill/>
-          <a:ln/>
-        </p:spPr>
-        <p:txBody>
-          <a:bodyPr wrap="square" lIns="0" tIns="0" rIns="0" bIns="0" rtlCol="0" anchor="ctr"/>
-          <a:lstStyle/>
-          <a:p>
-            <a:pPr marL="0" indent="0" algn="ctr">
-              <a:buNone/>
-            </a:pPr>
-            <a:r>
-              <a:rPr lang="en-US" sz="1300" b="1" dirty="0">
-                <a:solidFill>
-                  <a:srgbClr val="FFFFFF"/>
-                </a:solidFill>
-                <a:latin typeface="Calibri" pitchFamily="34" charset="0"/>
-                <a:ea typeface="Calibri" pitchFamily="34" charset="-122"/>
-                <a:cs typeface="Calibri" pitchFamily="34" charset="-120"/>
-              </a:rPr>
-              <a:t>?</a:t>
-            </a:r>
-            <a:endParaRPr lang="en-US" sz="1300" dirty="0"/>
-          </a:p>
-        </p:txBody>
-      </p:sp>
-      <p:sp>
-        <p:nvSpPr>
-          <p:cNvPr id="12" name="Text 10"/>
-          <p:cNvSpPr/>
-          <p:nvPr/>
-        </p:nvSpPr>
-        <p:spPr>
-          <a:xfrm>
-            <a:off x="1645920" y="3227832"/>
-            <a:ext cx="5120640" cy="365760"/>
-          </a:xfrm>
-          <a:prstGeom prst="rect">
-            <a:avLst/>
-          </a:prstGeom>
-          <a:noFill/>
-          <a:ln/>
-        </p:spPr>
-        <p:txBody>
-          <a:bodyPr wrap="square" lIns="0" tIns="0" rIns="0" bIns="0" rtlCol="0" anchor="ctr"/>
-          <a:lstStyle/>
-          <a:p>
-            <a:pPr marL="0" indent="0">
-              <a:buNone/>
-            </a:pPr>
-            <a:r>
-              <a:rPr lang="en-US" sz="1700" b="1" dirty="0">
-                <a:solidFill>
-                  <a:srgbClr val="1A2E5C"/>
-                </a:solidFill>
-                <a:latin typeface="Calibri" pitchFamily="34" charset="0"/>
-                <a:ea typeface="Calibri" pitchFamily="34" charset="-122"/>
-                <a:cs typeface="Calibri" pitchFamily="34" charset="-120"/>
-              </a:rPr>
-              <a:t>Incomprensibles</a:t>
-            </a:r>
-            <a:endParaRPr lang="en-US" sz="1700" dirty="0"/>
-          </a:p>
-        </p:txBody>
-      </p:sp>
-      <p:sp>
-        <p:nvSpPr>
-          <p:cNvPr id="13" name="Text 11"/>
-          <p:cNvSpPr/>
-          <p:nvPr/>
-        </p:nvSpPr>
-        <p:spPr>
-          <a:xfrm>
-            <a:off x="1645920" y="3611880"/>
-            <a:ext cx="5212080" cy="502920"/>
-          </a:xfrm>
-          <a:prstGeom prst="rect">
-            <a:avLst/>
-          </a:prstGeom>
-          <a:noFill/>
-          <a:ln/>
-        </p:spPr>
-        <p:txBody>
-          <a:bodyPr wrap="square" lIns="0" tIns="0" rIns="0" bIns="0" rtlCol="0" anchor="ctr"/>
-          <a:lstStyle/>
-          <a:p>
-            <a:pPr marL="0" indent="0">
-              <a:buNone/>
-            </a:pPr>
-            <a:r>
-              <a:rPr lang="en-US" sz="1250" dirty="0">
-                <a:solidFill>
-                  <a:srgbClr val="2C3E50"/>
-                </a:solidFill>
-                <a:latin typeface="Calibri" pitchFamily="34" charset="0"/>
-                <a:ea typeface="Calibri" pitchFamily="34" charset="-122"/>
-                <a:cs typeface="Calibri" pitchFamily="34" charset="-120"/>
-              </a:rPr>
-              <a:t>PM2.5, PM10, SIEDCO… cifras sin traducción para la gente.</a:t>
-            </a:r>
-            <a:endParaRPr lang="en-US" sz="1250" dirty="0"/>
-          </a:p>
-        </p:txBody>
-      </p:sp>
-      <p:sp>
-        <p:nvSpPr>
-          <p:cNvPr id="14" name="Shape 12"/>
-          <p:cNvSpPr/>
-          <p:nvPr/>
-        </p:nvSpPr>
-        <p:spPr>
-          <a:xfrm>
-            <a:off x="548640" y="4389120"/>
-            <a:ext cx="6492240" cy="1143000"/>
-          </a:xfrm>
-          <a:prstGeom prst="roundRect">
-            <a:avLst>
-              <a:gd name="adj" fmla="val 7200"/>
-            </a:avLst>
-          </a:prstGeom>
-          <a:solidFill>
-            <a:srgbClr val="FFFFFF"/>
-          </a:solidFill>
-          <a:ln w="12700">
-            <a:solidFill>
-              <a:srgbClr val="E1E6EC"/>
-            </a:solidFill>
-            <a:prstDash val="solid"/>
-          </a:ln>
-          <a:effectLst>
-            <a:outerShdw blurRad="88900" dist="38100" dir="5400000" algn="bl" rotWithShape="0">
-              <a:srgbClr val="1A2E5C">
-                <a:alpha val="16000"/>
-              </a:srgbClr>
-            </a:outerShdw>
-          </a:effectLst>
-        </p:spPr>
-        <p:txBody>
-          <a:bodyPr/>
-          <a:lstStyle/>
-          <a:p>
-            <a:endParaRPr lang="en-US"/>
-          </a:p>
-        </p:txBody>
-      </p:sp>
-      <p:sp>
-        <p:nvSpPr>
-          <p:cNvPr id="15" name="Shape 13"/>
-          <p:cNvSpPr/>
-          <p:nvPr/>
-        </p:nvSpPr>
-        <p:spPr>
-          <a:xfrm>
-            <a:off x="804672" y="4663440"/>
-            <a:ext cx="594360" cy="594360"/>
-          </a:xfrm>
-          <a:prstGeom prst="ellipse">
-            <a:avLst/>
-          </a:prstGeom>
-          <a:solidFill>
-            <a:srgbClr val="F39C12"/>
-          </a:solidFill>
-          <a:ln/>
-          <a:effectLst>
-            <a:outerShdw blurRad="88900" dist="38100" dir="5400000" algn="bl" rotWithShape="0">
-              <a:srgbClr val="1A2E5C">
-                <a:alpha val="16000"/>
-              </a:srgbClr>
-            </a:outerShdw>
-          </a:effectLst>
-        </p:spPr>
-        <p:txBody>
-          <a:bodyPr/>
-          <a:lstStyle/>
-          <a:p>
-            <a:endParaRPr lang="en-US"/>
-          </a:p>
-        </p:txBody>
-      </p:sp>
-      <p:sp>
-        <p:nvSpPr>
-          <p:cNvPr id="16" name="Text 14"/>
-          <p:cNvSpPr/>
-          <p:nvPr/>
-        </p:nvSpPr>
-        <p:spPr>
-          <a:xfrm>
-            <a:off x="804672" y="4663440"/>
-            <a:ext cx="594360" cy="594360"/>
-          </a:xfrm>
-          <a:prstGeom prst="rect">
-            <a:avLst/>
-          </a:prstGeom>
-          <a:noFill/>
-          <a:ln/>
-        </p:spPr>
-        <p:txBody>
-          <a:bodyPr wrap="square" lIns="0" tIns="0" rIns="0" bIns="0" rtlCol="0" anchor="ctr"/>
-          <a:lstStyle/>
-          <a:p>
-            <a:pPr marL="0" indent="0" algn="ctr">
-              <a:buNone/>
-            </a:pPr>
-            <a:r>
-              <a:rPr lang="en-US" sz="1300" b="1" dirty="0">
-                <a:solidFill>
-                  <a:srgbClr val="FFFFFF"/>
-                </a:solidFill>
-                <a:latin typeface="Calibri" pitchFamily="34" charset="0"/>
-                <a:ea typeface="Calibri" pitchFamily="34" charset="-122"/>
-                <a:cs typeface="Calibri" pitchFamily="34" charset="-120"/>
-              </a:rPr>
-              <a:t>⏱</a:t>
-            </a:r>
-            <a:endParaRPr lang="en-US" sz="1300" dirty="0"/>
-          </a:p>
-        </p:txBody>
-      </p:sp>
-      <p:sp>
-        <p:nvSpPr>
-          <p:cNvPr id="17" name="Text 15"/>
-          <p:cNvSpPr/>
-          <p:nvPr/>
-        </p:nvSpPr>
-        <p:spPr>
-          <a:xfrm>
-            <a:off x="1645920" y="4553712"/>
-            <a:ext cx="5120640" cy="365760"/>
-          </a:xfrm>
-          <a:prstGeom prst="rect">
-            <a:avLst/>
-          </a:prstGeom>
-          <a:noFill/>
-          <a:ln/>
-        </p:spPr>
-        <p:txBody>
-          <a:bodyPr wrap="square" lIns="0" tIns="0" rIns="0" bIns="0" rtlCol="0" anchor="ctr"/>
-          <a:lstStyle/>
-          <a:p>
-            <a:pPr marL="0" indent="0">
-              <a:buNone/>
-            </a:pPr>
-            <a:r>
-              <a:rPr lang="en-US" sz="1700" b="1" dirty="0">
-                <a:solidFill>
-                  <a:srgbClr val="1A2E5C"/>
-                </a:solidFill>
-                <a:latin typeface="Calibri" pitchFamily="34" charset="0"/>
-                <a:ea typeface="Calibri" pitchFamily="34" charset="-122"/>
-                <a:cs typeface="Calibri" pitchFamily="34" charset="-120"/>
-              </a:rPr>
-              <a:t>Tarde</a:t>
-            </a:r>
-            <a:endParaRPr lang="en-US" sz="1700" dirty="0"/>
-          </a:p>
-        </p:txBody>
-      </p:sp>
-      <p:sp>
-        <p:nvSpPr>
-          <p:cNvPr id="18" name="Text 16"/>
-          <p:cNvSpPr/>
-          <p:nvPr/>
-        </p:nvSpPr>
-        <p:spPr>
-          <a:xfrm>
-            <a:off x="1645920" y="4937760"/>
-            <a:ext cx="5212080" cy="502920"/>
-          </a:xfrm>
-          <a:prstGeom prst="rect">
-            <a:avLst/>
-          </a:prstGeom>
-          <a:noFill/>
-          <a:ln/>
-        </p:spPr>
-        <p:txBody>
-          <a:bodyPr wrap="square" lIns="0" tIns="0" rIns="0" bIns="0" rtlCol="0" anchor="ctr"/>
-          <a:lstStyle/>
-          <a:p>
-            <a:pPr marL="0" indent="0">
-              <a:buNone/>
-            </a:pPr>
-            <a:r>
-              <a:rPr lang="en-US" sz="1250" dirty="0">
-                <a:solidFill>
-                  <a:srgbClr val="2C3E50"/>
-                </a:solidFill>
-                <a:latin typeface="Calibri" pitchFamily="34" charset="0"/>
-                <a:ea typeface="Calibri" pitchFamily="34" charset="-122"/>
-                <a:cs typeface="Calibri" pitchFamily="34" charset="-120"/>
-              </a:rPr>
-              <a:t>Incendios, contaminación o inseguridad se conocen cuando ya pasó.</a:t>
-            </a:r>
-            <a:endParaRPr lang="en-US" sz="1250" dirty="0"/>
-          </a:p>
-        </p:txBody>
-      </p:sp>
-      <p:sp>
-        <p:nvSpPr>
-          <p:cNvPr id="19" name="Shape 17"/>
-          <p:cNvSpPr/>
-          <p:nvPr/>
-        </p:nvSpPr>
-        <p:spPr>
-          <a:xfrm>
-            <a:off x="7406640" y="1737360"/>
-            <a:ext cx="4206240" cy="3977640"/>
-          </a:xfrm>
-          <a:prstGeom prst="roundRect">
-            <a:avLst>
-              <a:gd name="adj" fmla="val 2069"/>
-            </a:avLst>
-          </a:prstGeom>
-          <a:solidFill>
-            <a:srgbClr val="1A2E5C"/>
-          </a:solidFill>
-          <a:ln w="12700">
-            <a:solidFill>
-              <a:srgbClr val="E1E6EC"/>
-            </a:solidFill>
-            <a:prstDash val="solid"/>
-          </a:ln>
-          <a:effectLst>
-            <a:outerShdw blurRad="88900" dist="38100" dir="5400000" algn="bl" rotWithShape="0">
-              <a:srgbClr val="1A2E5C">
-                <a:alpha val="16000"/>
-              </a:srgbClr>
-            </a:outerShdw>
-          </a:effectLst>
-        </p:spPr>
-        <p:txBody>
-          <a:bodyPr/>
-          <a:lstStyle/>
-          <a:p>
-            <a:endParaRPr lang="en-US"/>
-          </a:p>
-        </p:txBody>
-      </p:sp>
-      <p:sp>
-        <p:nvSpPr>
-          <p:cNvPr id="20" name="Text 18"/>
-          <p:cNvSpPr/>
-          <p:nvPr/>
-        </p:nvSpPr>
-        <p:spPr>
-          <a:xfrm>
-            <a:off x="7635240" y="1965960"/>
-            <a:ext cx="3749040" cy="365760"/>
-          </a:xfrm>
-          <a:prstGeom prst="rect">
-            <a:avLst/>
-          </a:prstGeom>
-          <a:noFill/>
-          <a:ln/>
-        </p:spPr>
-        <p:txBody>
-          <a:bodyPr wrap="square" lIns="0" tIns="0" rIns="0" bIns="0" rtlCol="0" anchor="ctr"/>
-          <a:lstStyle/>
-          <a:p>
-            <a:pPr marL="0" indent="0">
-              <a:buNone/>
-            </a:pPr>
-            <a:r>
-              <a:rPr lang="en-US" sz="1400" b="1" dirty="0">
-                <a:solidFill>
-                  <a:srgbClr val="1DB87F"/>
-                </a:solidFill>
-                <a:latin typeface="Calibri" pitchFamily="34" charset="0"/>
-                <a:ea typeface="Calibri" pitchFamily="34" charset="-122"/>
-                <a:cs typeface="Calibri" pitchFamily="34" charset="-120"/>
-              </a:rPr>
-              <a:t>La consecuencia</a:t>
-            </a:r>
-            <a:endParaRPr lang="en-US" sz="1400" dirty="0"/>
-          </a:p>
-        </p:txBody>
-      </p:sp>
-      <p:sp>
-        <p:nvSpPr>
-          <p:cNvPr id="21" name="Text 19"/>
-          <p:cNvSpPr/>
-          <p:nvPr/>
-        </p:nvSpPr>
-        <p:spPr>
-          <a:xfrm>
-            <a:off x="7635240" y="2377440"/>
-            <a:ext cx="3749040" cy="914400"/>
-          </a:xfrm>
-          <a:prstGeom prst="rect">
-            <a:avLst/>
-          </a:prstGeom>
-          <a:noFill/>
-          <a:ln/>
-        </p:spPr>
-        <p:txBody>
-          <a:bodyPr wrap="square" lIns="0" tIns="0" rIns="0" bIns="0" rtlCol="0" anchor="ctr"/>
-          <a:lstStyle/>
-          <a:p>
-            <a:pPr marL="0" indent="0">
-              <a:buNone/>
-            </a:pPr>
-            <a:r>
-              <a:rPr lang="en-US" sz="1350" dirty="0">
-                <a:solidFill>
-                  <a:srgbClr val="FFFFFF"/>
-                </a:solidFill>
-                <a:latin typeface="Calibri" pitchFamily="34" charset="0"/>
-                <a:ea typeface="Calibri" pitchFamily="34" charset="-122"/>
-                <a:cs typeface="Calibri" pitchFamily="34" charset="-120"/>
-              </a:rPr>
-              <a:t>Decisiones ciudadanas y públicas se toman sin la información que el país ya tiene publicada.</a:t>
-            </a:r>
-            <a:endParaRPr lang="en-US" sz="1350" dirty="0"/>
-          </a:p>
-        </p:txBody>
-      </p:sp>
-      <p:sp>
-        <p:nvSpPr>
-          <p:cNvPr id="22" name="Text 20"/>
-          <p:cNvSpPr/>
-          <p:nvPr/>
-        </p:nvSpPr>
-        <p:spPr>
-          <a:xfrm>
-            <a:off x="7635240" y="3383280"/>
-            <a:ext cx="3749040" cy="822960"/>
-          </a:xfrm>
-          <a:prstGeom prst="rect">
-            <a:avLst/>
-          </a:prstGeom>
-          <a:noFill/>
-          <a:ln/>
-        </p:spPr>
-        <p:txBody>
-          <a:bodyPr wrap="square" lIns="0" tIns="0" rIns="0" bIns="0" rtlCol="0" anchor="ctr"/>
-          <a:lstStyle/>
-          <a:p>
-            <a:pPr marL="0" indent="0">
-              <a:buNone/>
-            </a:pPr>
-            <a:r>
-              <a:rPr lang="en-US" sz="5400" b="1" dirty="0">
-                <a:solidFill>
-                  <a:srgbClr val="FFFFFF"/>
-                </a:solidFill>
-                <a:latin typeface="Calibri" pitchFamily="34" charset="0"/>
-                <a:ea typeface="Calibri" pitchFamily="34" charset="-122"/>
-                <a:cs typeface="Calibri" pitchFamily="34" charset="-120"/>
-              </a:rPr>
-              <a:t>+150</a:t>
-            </a:r>
-            <a:endParaRPr lang="en-US" sz="5400" dirty="0"/>
-          </a:p>
-        </p:txBody>
-      </p:sp>
-      <p:sp>
-        <p:nvSpPr>
-          <p:cNvPr id="23" name="Text 21"/>
-          <p:cNvSpPr/>
-          <p:nvPr/>
-        </p:nvSpPr>
-        <p:spPr>
-          <a:xfrm>
-            <a:off x="7635240" y="4343400"/>
-            <a:ext cx="3749040" cy="1188720"/>
-          </a:xfrm>
-          <a:prstGeom prst="rect">
-            <a:avLst/>
-          </a:prstGeom>
-          <a:noFill/>
-          <a:ln/>
-        </p:spPr>
-        <p:txBody>
-          <a:bodyPr wrap="square" lIns="0" tIns="0" rIns="0" bIns="0" rtlCol="0" anchor="ctr"/>
-          <a:lstStyle/>
-          <a:p>
-            <a:pPr marL="0" indent="0">
-              <a:buNone/>
-            </a:pPr>
-            <a:r>
-              <a:rPr lang="en-US" sz="1200" dirty="0">
-                <a:solidFill>
-                  <a:srgbClr val="CADCFC"/>
-                </a:solidFill>
-                <a:latin typeface="Calibri" pitchFamily="34" charset="0"/>
-                <a:ea typeface="Calibri" pitchFamily="34" charset="-122"/>
-                <a:cs typeface="Calibri" pitchFamily="34" charset="-120"/>
-              </a:rPr>
-              <a:t>equipos compiten por resolver retos reales con datos abiertos — el nuestro los vuelve accionables.</a:t>
-            </a:r>
-            <a:endParaRPr lang="en-US" sz="1200" dirty="0"/>
-          </a:p>
-        </p:txBody>
-      </p:sp>
-      <p:sp>
-        <p:nvSpPr>
-          <p:cNvPr id="24" name="Text 22"/>
-          <p:cNvSpPr/>
-          <p:nvPr/>
-        </p:nvSpPr>
-        <p:spPr>
-          <a:xfrm>
-            <a:off x="548640" y="6473952"/>
-            <a:ext cx="8229600" cy="274320"/>
-          </a:xfrm>
-          <a:prstGeom prst="rect">
-            <a:avLst/>
-          </a:prstGeom>
-          <a:noFill/>
-          <a:ln/>
-        </p:spPr>
-        <p:txBody>
-          <a:bodyPr wrap="square" lIns="0" tIns="0" rIns="0" bIns="0" rtlCol="0" anchor="ctr"/>
-          <a:lstStyle/>
-          <a:p>
-            <a:pPr marL="0" indent="0" algn="l">
-              <a:buNone/>
-            </a:pPr>
-            <a:r>
-              <a:rPr lang="en-US" sz="900" dirty="0">
-                <a:solidFill>
-                  <a:srgbClr val="7B8794"/>
-                </a:solidFill>
-                <a:latin typeface="Calibri" pitchFamily="34" charset="0"/>
-                <a:ea typeface="Calibri" pitchFamily="34" charset="-122"/>
-                <a:cs typeface="Calibri" pitchFamily="34" charset="-120"/>
-              </a:rPr>
-              <a:t>VigIA · Equipo 80 — Concurso Datos al Ecosistema 2026</a:t>
-            </a:r>
-            <a:endParaRPr lang="en-US" sz="900" dirty="0"/>
-          </a:p>
-        </p:txBody>
-      </p:sp>
-      <p:sp>
-        <p:nvSpPr>
-          <p:cNvPr id="25" name="Text 23"/>
-          <p:cNvSpPr/>
-          <p:nvPr/>
-        </p:nvSpPr>
-        <p:spPr>
-          <a:xfrm>
-            <a:off x="11155680" y="6473952"/>
-            <a:ext cx="457200" cy="274320"/>
-          </a:xfrm>
-          <a:prstGeom prst="rect">
-            <a:avLst/>
-          </a:prstGeom>
-          <a:noFill/>
-          <a:ln/>
-        </p:spPr>
-        <p:txBody>
-          <a:bodyPr wrap="square" lIns="0" tIns="0" rIns="0" bIns="0" rtlCol="0" anchor="ctr"/>
-          <a:lstStyle/>
-          <a:p>
-            <a:pPr marL="0" indent="0" algn="r">
-              <a:buNone/>
-            </a:pPr>
-            <a:r>
-              <a:rPr lang="en-US" sz="900" dirty="0">
-                <a:solidFill>
-                  <a:srgbClr val="7B8794"/>
-                </a:solidFill>
-                <a:latin typeface="Calibri" pitchFamily="34" charset="0"/>
-                <a:ea typeface="Calibri" pitchFamily="34" charset="-122"/>
-                <a:cs typeface="Calibri" pitchFamily="34" charset="-120"/>
-              </a:rPr>
-              <a:t>2</a:t>
-            </a:r>
-            <a:endParaRPr lang="en-US" sz="900" dirty="0"/>
-          </a:p>
-        </p:txBody>
-      </p:sp>
-    </p:spTree>
-  </p:cSld>
-  <p:clrMapOvr>
-    <a:masterClrMapping/>
-  </p:clrMapOvr>
-</p:sld>
-</file>
-
-<file path=ppt/slides/slide20.xml><?xml version="1.0" encoding="utf-8"?>
+<file path=ppt/slides/slide22.xml><?xml version="1.0" encoding="utf-8"?>
 <p:sld xmlns:a="http://schemas.openxmlformats.org/drawingml/2006/main" xmlns:r="http://schemas.openxmlformats.org/officeDocument/2006/relationships" xmlns:p="http://schemas.openxmlformats.org/presentationml/2006/main">
   <p:cSld name="Slide 20">
     <p:bg>
@@ -19568,7 +20517,7 @@
                 <a:ea typeface="Calibri" pitchFamily="34" charset="-122"/>
                 <a:cs typeface="Calibri" pitchFamily="34" charset="-120"/>
               </a:rPr>
-              <a:t>20</a:t>
+              <a:t>18</a:t>
             </a:r>
             <a:endParaRPr lang="en-US" sz="900" dirty="0"/>
           </a:p>
@@ -19582,7 +20531,7 @@
 </p:sld>
 </file>
 
-<file path=ppt/slides/slide21.xml><?xml version="1.0" encoding="utf-8"?>
+<file path=ppt/slides/slide23.xml><?xml version="1.0" encoding="utf-8"?>
 <p:sld xmlns:a="http://schemas.openxmlformats.org/drawingml/2006/main" xmlns:r="http://schemas.openxmlformats.org/officeDocument/2006/relationships" xmlns:p="http://schemas.openxmlformats.org/presentationml/2006/main">
   <p:cSld name="Slide 21">
     <p:bg>
@@ -20465,7 +21414,7 @@
                 <a:ea typeface="Calibri" pitchFamily="34" charset="-122"/>
                 <a:cs typeface="Calibri" pitchFamily="34" charset="-120"/>
               </a:rPr>
-              <a:t>21</a:t>
+              <a:t>19</a:t>
             </a:r>
             <a:endParaRPr lang="en-US" sz="900" dirty="0"/>
           </a:p>
@@ -20479,13 +21428,13 @@
 </p:sld>
 </file>
 
-<file path=ppt/slides/slide22.xml><?xml version="1.0" encoding="utf-8"?>
-<p:sld xmlns:a="http://schemas.openxmlformats.org/drawingml/2006/main" xmlns:p="http://schemas.openxmlformats.org/presentationml/2006/main" xmlns:r="http://schemas.openxmlformats.org/officeDocument/2006/relationships">
-  <p:cSld>
+<file path=ppt/slides/slide3.xml><?xml version="1.0" encoding="utf-8"?>
+<p:sld xmlns:a="http://schemas.openxmlformats.org/drawingml/2006/main" xmlns:r="http://schemas.openxmlformats.org/officeDocument/2006/relationships" xmlns:p="http://schemas.openxmlformats.org/presentationml/2006/main">
+  <p:cSld name="Slide 2">
     <p:bg>
       <p:bgPr>
         <a:solidFill>
-          <a:srgbClr val="0F1A34"/>
+          <a:srgbClr val="FFFFFF"/>
         </a:solidFill>
         <a:effectLst/>
       </p:bgPr>
@@ -20496,31 +21445,943 @@
         <p:cNvGrpSpPr/>
         <p:nvPr/>
       </p:nvGrpSpPr>
-      <p:grpSpPr/>
-      <p:pic>
-        <p:nvPicPr>
-          <p:cNvPr id="2" name="Picture 1" descr="drone_scan.gif"/>
-          <p:cNvPicPr>
-            <a:picLocks noChangeAspect="1"/>
-          </p:cNvPicPr>
-          <p:nvPr/>
-        </p:nvPicPr>
-        <p:blipFill>
-          <a:blip r:embed="rId2"/>
-          <a:stretch>
-            <a:fillRect/>
-          </a:stretch>
-        </p:blipFill>
-        <p:spPr>
-          <a:xfrm>
-            <a:off x="2185481" y="365760"/>
-            <a:ext cx="7821038" cy="6126480"/>
-          </a:xfrm>
-          <a:prstGeom prst="rect">
-            <a:avLst/>
-          </a:prstGeom>
-        </p:spPr>
-      </p:pic>
+      <p:grpSpPr>
+        <a:xfrm>
+          <a:off x="0" y="0"/>
+          <a:ext cx="0" cy="0"/>
+          <a:chOff x="0" y="0"/>
+          <a:chExt cx="0" cy="0"/>
+        </a:xfrm>
+      </p:grpSpPr>
+      <p:sp>
+        <p:nvSpPr>
+          <p:cNvPr id="2" name="Text 0"/>
+          <p:cNvSpPr/>
+          <p:nvPr/>
+        </p:nvSpPr>
+        <p:spPr>
+          <a:xfrm>
+            <a:off x="548640" y="411480"/>
+            <a:ext cx="10058400" cy="274320"/>
+          </a:xfrm>
+          <a:prstGeom prst="rect">
+            <a:avLst/>
+          </a:prstGeom>
+          <a:noFill/>
+          <a:ln/>
+        </p:spPr>
+        <p:txBody>
+          <a:bodyPr wrap="square" lIns="0" tIns="0" rIns="0" bIns="0" rtlCol="0" anchor="ctr"/>
+          <a:lstStyle/>
+          <a:p>
+            <a:pPr marL="0" indent="0">
+              <a:buNone/>
+            </a:pPr>
+            <a:r>
+              <a:rPr lang="en-US" sz="1200" b="1" kern="0" spc="200" dirty="0">
+                <a:solidFill>
+                  <a:srgbClr val="12A36A"/>
+                </a:solidFill>
+                <a:latin typeface="Calibri" pitchFamily="34" charset="0"/>
+                <a:ea typeface="Calibri" pitchFamily="34" charset="-122"/>
+                <a:cs typeface="Calibri" pitchFamily="34" charset="-120"/>
+              </a:rPr>
+              <a:t>EL RETO</a:t>
+            </a:r>
+            <a:endParaRPr lang="en-US" sz="1200" dirty="0"/>
+          </a:p>
+        </p:txBody>
+      </p:sp>
+      <p:sp>
+        <p:nvSpPr>
+          <p:cNvPr id="3" name="Text 1"/>
+          <p:cNvSpPr/>
+          <p:nvPr/>
+        </p:nvSpPr>
+        <p:spPr>
+          <a:xfrm>
+            <a:off x="548640" y="658368"/>
+            <a:ext cx="11064240" cy="731520"/>
+          </a:xfrm>
+          <a:prstGeom prst="rect">
+            <a:avLst/>
+          </a:prstGeom>
+          <a:noFill/>
+          <a:ln/>
+        </p:spPr>
+        <p:txBody>
+          <a:bodyPr wrap="square" lIns="0" tIns="0" rIns="0" bIns="0" rtlCol="0" anchor="ctr"/>
+          <a:lstStyle/>
+          <a:p>
+            <a:pPr marL="0" indent="0">
+              <a:buNone/>
+            </a:pPr>
+            <a:r>
+              <a:rPr lang="en-US" sz="3000" b="1" dirty="0">
+                <a:solidFill>
+                  <a:srgbClr val="1A2E5C"/>
+                </a:solidFill>
+                <a:latin typeface="Calibri" pitchFamily="34" charset="0"/>
+                <a:ea typeface="Calibri" pitchFamily="34" charset="-122"/>
+                <a:cs typeface="Calibri" pitchFamily="34" charset="-120"/>
+              </a:rPr>
+              <a:t>Los datos existen, pero el ciudadano no los entiende a tiempo</a:t>
+            </a:r>
+            <a:endParaRPr lang="en-US" sz="3000" dirty="0"/>
+          </a:p>
+        </p:txBody>
+      </p:sp>
+      <p:sp>
+        <p:nvSpPr>
+          <p:cNvPr id="4" name="Shape 2"/>
+          <p:cNvSpPr/>
+          <p:nvPr/>
+        </p:nvSpPr>
+        <p:spPr>
+          <a:xfrm>
+            <a:off x="548640" y="1737360"/>
+            <a:ext cx="6492240" cy="1143000"/>
+          </a:xfrm>
+          <a:prstGeom prst="roundRect">
+            <a:avLst>
+              <a:gd name="adj" fmla="val 7200"/>
+            </a:avLst>
+          </a:prstGeom>
+          <a:solidFill>
+            <a:srgbClr val="FFFFFF"/>
+          </a:solidFill>
+          <a:ln w="12700">
+            <a:solidFill>
+              <a:srgbClr val="E1E6EC"/>
+            </a:solidFill>
+            <a:prstDash val="solid"/>
+          </a:ln>
+          <a:effectLst>
+            <a:outerShdw blurRad="88900" dist="38100" dir="5400000" algn="bl" rotWithShape="0">
+              <a:srgbClr val="1A2E5C">
+                <a:alpha val="16000"/>
+              </a:srgbClr>
+            </a:outerShdw>
+          </a:effectLst>
+        </p:spPr>
+        <p:txBody>
+          <a:bodyPr/>
+          <a:lstStyle/>
+          <a:p>
+            <a:endParaRPr lang="en-US"/>
+          </a:p>
+        </p:txBody>
+      </p:sp>
+      <p:sp>
+        <p:nvSpPr>
+          <p:cNvPr id="5" name="Shape 3"/>
+          <p:cNvSpPr/>
+          <p:nvPr/>
+        </p:nvSpPr>
+        <p:spPr>
+          <a:xfrm>
+            <a:off x="804672" y="2011680"/>
+            <a:ext cx="594360" cy="594360"/>
+          </a:xfrm>
+          <a:prstGeom prst="ellipse">
+            <a:avLst/>
+          </a:prstGeom>
+          <a:solidFill>
+            <a:srgbClr val="C0392B"/>
+          </a:solidFill>
+          <a:ln/>
+          <a:effectLst>
+            <a:outerShdw blurRad="88900" dist="38100" dir="5400000" algn="bl" rotWithShape="0">
+              <a:srgbClr val="1A2E5C">
+                <a:alpha val="16000"/>
+              </a:srgbClr>
+            </a:outerShdw>
+          </a:effectLst>
+        </p:spPr>
+        <p:txBody>
+          <a:bodyPr/>
+          <a:lstStyle/>
+          <a:p>
+            <a:endParaRPr lang="en-US"/>
+          </a:p>
+        </p:txBody>
+      </p:sp>
+      <p:sp>
+        <p:nvSpPr>
+          <p:cNvPr id="6" name="Text 4"/>
+          <p:cNvSpPr/>
+          <p:nvPr/>
+        </p:nvSpPr>
+        <p:spPr>
+          <a:xfrm>
+            <a:off x="804672" y="2011680"/>
+            <a:ext cx="594360" cy="594360"/>
+          </a:xfrm>
+          <a:prstGeom prst="rect">
+            <a:avLst/>
+          </a:prstGeom>
+          <a:noFill/>
+          <a:ln/>
+        </p:spPr>
+        <p:txBody>
+          <a:bodyPr wrap="square" lIns="0" tIns="0" rIns="0" bIns="0" rtlCol="0" anchor="ctr"/>
+          <a:lstStyle/>
+          <a:p>
+            <a:pPr marL="0" indent="0" algn="ctr">
+              <a:buNone/>
+            </a:pPr>
+            <a:r>
+              <a:rPr lang="en-US" sz="1300" b="1" dirty="0">
+                <a:solidFill>
+                  <a:srgbClr val="FFFFFF"/>
+                </a:solidFill>
+                <a:latin typeface="Calibri" pitchFamily="34" charset="0"/>
+                <a:ea typeface="Calibri" pitchFamily="34" charset="-122"/>
+                <a:cs typeface="Calibri" pitchFamily="34" charset="-120"/>
+              </a:rPr>
+              <a:t>!</a:t>
+            </a:r>
+            <a:endParaRPr lang="en-US" sz="1300" dirty="0"/>
+          </a:p>
+        </p:txBody>
+      </p:sp>
+      <p:sp>
+        <p:nvSpPr>
+          <p:cNvPr id="7" name="Text 5"/>
+          <p:cNvSpPr/>
+          <p:nvPr/>
+        </p:nvSpPr>
+        <p:spPr>
+          <a:xfrm>
+            <a:off x="1645920" y="1901952"/>
+            <a:ext cx="5120640" cy="365760"/>
+          </a:xfrm>
+          <a:prstGeom prst="rect">
+            <a:avLst/>
+          </a:prstGeom>
+          <a:noFill/>
+          <a:ln/>
+        </p:spPr>
+        <p:txBody>
+          <a:bodyPr wrap="square" lIns="0" tIns="0" rIns="0" bIns="0" rtlCol="0" anchor="ctr"/>
+          <a:lstStyle/>
+          <a:p>
+            <a:pPr marL="0" indent="0">
+              <a:buNone/>
+            </a:pPr>
+            <a:r>
+              <a:rPr lang="en-US" sz="1700" b="1" dirty="0">
+                <a:solidFill>
+                  <a:srgbClr val="1A2E5C"/>
+                </a:solidFill>
+                <a:latin typeface="Calibri" pitchFamily="34" charset="0"/>
+                <a:ea typeface="Calibri" pitchFamily="34" charset="-122"/>
+                <a:cs typeface="Calibri" pitchFamily="34" charset="-120"/>
+              </a:rPr>
+              <a:t>Fragmentados</a:t>
+            </a:r>
+            <a:endParaRPr lang="en-US" sz="1700" dirty="0"/>
+          </a:p>
+        </p:txBody>
+      </p:sp>
+      <p:sp>
+        <p:nvSpPr>
+          <p:cNvPr id="8" name="Text 6"/>
+          <p:cNvSpPr/>
+          <p:nvPr/>
+        </p:nvSpPr>
+        <p:spPr>
+          <a:xfrm>
+            <a:off x="1645920" y="2286000"/>
+            <a:ext cx="5212080" cy="502920"/>
+          </a:xfrm>
+          <a:prstGeom prst="rect">
+            <a:avLst/>
+          </a:prstGeom>
+          <a:noFill/>
+          <a:ln/>
+        </p:spPr>
+        <p:txBody>
+          <a:bodyPr wrap="square" lIns="0" tIns="0" rIns="0" bIns="0" rtlCol="0" anchor="ctr"/>
+          <a:lstStyle/>
+          <a:p>
+            <a:pPr marL="0" indent="0">
+              <a:buNone/>
+            </a:pPr>
+            <a:r>
+              <a:rPr lang="en-US" sz="1250" dirty="0">
+                <a:solidFill>
+                  <a:srgbClr val="2C3E50"/>
+                </a:solidFill>
+                <a:latin typeface="Calibri" pitchFamily="34" charset="0"/>
+                <a:ea typeface="Calibri" pitchFamily="34" charset="-122"/>
+                <a:cs typeface="Calibri" pitchFamily="34" charset="-120"/>
+              </a:rPr>
+              <a:t>Cientos de datasets técnicos dispersos en portales oficiales.</a:t>
+            </a:r>
+            <a:endParaRPr lang="en-US" sz="1250" dirty="0"/>
+          </a:p>
+        </p:txBody>
+      </p:sp>
+      <p:sp>
+        <p:nvSpPr>
+          <p:cNvPr id="9" name="Shape 7"/>
+          <p:cNvSpPr/>
+          <p:nvPr/>
+        </p:nvSpPr>
+        <p:spPr>
+          <a:xfrm>
+            <a:off x="548640" y="3063240"/>
+            <a:ext cx="6492240" cy="1143000"/>
+          </a:xfrm>
+          <a:prstGeom prst="roundRect">
+            <a:avLst>
+              <a:gd name="adj" fmla="val 7200"/>
+            </a:avLst>
+          </a:prstGeom>
+          <a:solidFill>
+            <a:srgbClr val="FFFFFF"/>
+          </a:solidFill>
+          <a:ln w="12700">
+            <a:solidFill>
+              <a:srgbClr val="E1E6EC"/>
+            </a:solidFill>
+            <a:prstDash val="solid"/>
+          </a:ln>
+          <a:effectLst>
+            <a:outerShdw blurRad="88900" dist="38100" dir="5400000" algn="bl" rotWithShape="0">
+              <a:srgbClr val="1A2E5C">
+                <a:alpha val="16000"/>
+              </a:srgbClr>
+            </a:outerShdw>
+          </a:effectLst>
+        </p:spPr>
+        <p:txBody>
+          <a:bodyPr/>
+          <a:lstStyle/>
+          <a:p>
+            <a:endParaRPr lang="en-US"/>
+          </a:p>
+        </p:txBody>
+      </p:sp>
+      <p:sp>
+        <p:nvSpPr>
+          <p:cNvPr id="10" name="Shape 8"/>
+          <p:cNvSpPr/>
+          <p:nvPr/>
+        </p:nvSpPr>
+        <p:spPr>
+          <a:xfrm>
+            <a:off x="804672" y="3337560"/>
+            <a:ext cx="594360" cy="594360"/>
+          </a:xfrm>
+          <a:prstGeom prst="ellipse">
+            <a:avLst/>
+          </a:prstGeom>
+          <a:solidFill>
+            <a:srgbClr val="2563AB"/>
+          </a:solidFill>
+          <a:ln/>
+          <a:effectLst>
+            <a:outerShdw blurRad="88900" dist="38100" dir="5400000" algn="bl" rotWithShape="0">
+              <a:srgbClr val="1A2E5C">
+                <a:alpha val="16000"/>
+              </a:srgbClr>
+            </a:outerShdw>
+          </a:effectLst>
+        </p:spPr>
+        <p:txBody>
+          <a:bodyPr/>
+          <a:lstStyle/>
+          <a:p>
+            <a:endParaRPr lang="en-US"/>
+          </a:p>
+        </p:txBody>
+      </p:sp>
+      <p:sp>
+        <p:nvSpPr>
+          <p:cNvPr id="11" name="Text 9"/>
+          <p:cNvSpPr/>
+          <p:nvPr/>
+        </p:nvSpPr>
+        <p:spPr>
+          <a:xfrm>
+            <a:off x="804672" y="3337560"/>
+            <a:ext cx="594360" cy="594360"/>
+          </a:xfrm>
+          <a:prstGeom prst="rect">
+            <a:avLst/>
+          </a:prstGeom>
+          <a:noFill/>
+          <a:ln/>
+        </p:spPr>
+        <p:txBody>
+          <a:bodyPr wrap="square" lIns="0" tIns="0" rIns="0" bIns="0" rtlCol="0" anchor="ctr"/>
+          <a:lstStyle/>
+          <a:p>
+            <a:pPr marL="0" indent="0" algn="ctr">
+              <a:buNone/>
+            </a:pPr>
+            <a:r>
+              <a:rPr lang="en-US" sz="1300" b="1" dirty="0">
+                <a:solidFill>
+                  <a:srgbClr val="FFFFFF"/>
+                </a:solidFill>
+                <a:latin typeface="Calibri" pitchFamily="34" charset="0"/>
+                <a:ea typeface="Calibri" pitchFamily="34" charset="-122"/>
+                <a:cs typeface="Calibri" pitchFamily="34" charset="-120"/>
+              </a:rPr>
+              <a:t>?</a:t>
+            </a:r>
+            <a:endParaRPr lang="en-US" sz="1300" dirty="0"/>
+          </a:p>
+        </p:txBody>
+      </p:sp>
+      <p:sp>
+        <p:nvSpPr>
+          <p:cNvPr id="12" name="Text 10"/>
+          <p:cNvSpPr/>
+          <p:nvPr/>
+        </p:nvSpPr>
+        <p:spPr>
+          <a:xfrm>
+            <a:off x="1645920" y="3227832"/>
+            <a:ext cx="5120640" cy="365760"/>
+          </a:xfrm>
+          <a:prstGeom prst="rect">
+            <a:avLst/>
+          </a:prstGeom>
+          <a:noFill/>
+          <a:ln/>
+        </p:spPr>
+        <p:txBody>
+          <a:bodyPr wrap="square" lIns="0" tIns="0" rIns="0" bIns="0" rtlCol="0" anchor="ctr"/>
+          <a:lstStyle/>
+          <a:p>
+            <a:pPr marL="0" indent="0">
+              <a:buNone/>
+            </a:pPr>
+            <a:r>
+              <a:rPr lang="en-US" sz="1700" b="1" dirty="0">
+                <a:solidFill>
+                  <a:srgbClr val="1A2E5C"/>
+                </a:solidFill>
+                <a:latin typeface="Calibri" pitchFamily="34" charset="0"/>
+                <a:ea typeface="Calibri" pitchFamily="34" charset="-122"/>
+                <a:cs typeface="Calibri" pitchFamily="34" charset="-120"/>
+              </a:rPr>
+              <a:t>Incomprensibles</a:t>
+            </a:r>
+            <a:endParaRPr lang="en-US" sz="1700" dirty="0"/>
+          </a:p>
+        </p:txBody>
+      </p:sp>
+      <p:sp>
+        <p:nvSpPr>
+          <p:cNvPr id="13" name="Text 11"/>
+          <p:cNvSpPr/>
+          <p:nvPr/>
+        </p:nvSpPr>
+        <p:spPr>
+          <a:xfrm>
+            <a:off x="1645920" y="3611880"/>
+            <a:ext cx="5212080" cy="502920"/>
+          </a:xfrm>
+          <a:prstGeom prst="rect">
+            <a:avLst/>
+          </a:prstGeom>
+          <a:noFill/>
+          <a:ln/>
+        </p:spPr>
+        <p:txBody>
+          <a:bodyPr wrap="square" lIns="0" tIns="0" rIns="0" bIns="0" rtlCol="0" anchor="ctr"/>
+          <a:lstStyle/>
+          <a:p>
+            <a:pPr marL="0" indent="0">
+              <a:buNone/>
+            </a:pPr>
+            <a:r>
+              <a:rPr lang="en-US" sz="1250" dirty="0">
+                <a:solidFill>
+                  <a:srgbClr val="2C3E50"/>
+                </a:solidFill>
+                <a:latin typeface="Calibri" pitchFamily="34" charset="0"/>
+                <a:ea typeface="Calibri" pitchFamily="34" charset="-122"/>
+                <a:cs typeface="Calibri" pitchFamily="34" charset="-120"/>
+              </a:rPr>
+              <a:t>PM2.5, PM10, SIEDCO… cifras sin traducción para la gente.</a:t>
+            </a:r>
+            <a:endParaRPr lang="en-US" sz="1250" dirty="0"/>
+          </a:p>
+        </p:txBody>
+      </p:sp>
+      <p:sp>
+        <p:nvSpPr>
+          <p:cNvPr id="14" name="Shape 12"/>
+          <p:cNvSpPr/>
+          <p:nvPr/>
+        </p:nvSpPr>
+        <p:spPr>
+          <a:xfrm>
+            <a:off x="548640" y="4389120"/>
+            <a:ext cx="6492240" cy="1143000"/>
+          </a:xfrm>
+          <a:prstGeom prst="roundRect">
+            <a:avLst>
+              <a:gd name="adj" fmla="val 7200"/>
+            </a:avLst>
+          </a:prstGeom>
+          <a:solidFill>
+            <a:srgbClr val="FFFFFF"/>
+          </a:solidFill>
+          <a:ln w="12700">
+            <a:solidFill>
+              <a:srgbClr val="E1E6EC"/>
+            </a:solidFill>
+            <a:prstDash val="solid"/>
+          </a:ln>
+          <a:effectLst>
+            <a:outerShdw blurRad="88900" dist="38100" dir="5400000" algn="bl" rotWithShape="0">
+              <a:srgbClr val="1A2E5C">
+                <a:alpha val="16000"/>
+              </a:srgbClr>
+            </a:outerShdw>
+          </a:effectLst>
+        </p:spPr>
+        <p:txBody>
+          <a:bodyPr/>
+          <a:lstStyle/>
+          <a:p>
+            <a:endParaRPr lang="en-US"/>
+          </a:p>
+        </p:txBody>
+      </p:sp>
+      <p:sp>
+        <p:nvSpPr>
+          <p:cNvPr id="15" name="Shape 13"/>
+          <p:cNvSpPr/>
+          <p:nvPr/>
+        </p:nvSpPr>
+        <p:spPr>
+          <a:xfrm>
+            <a:off x="804672" y="4663440"/>
+            <a:ext cx="594360" cy="594360"/>
+          </a:xfrm>
+          <a:prstGeom prst="ellipse">
+            <a:avLst/>
+          </a:prstGeom>
+          <a:solidFill>
+            <a:srgbClr val="F39C12"/>
+          </a:solidFill>
+          <a:ln/>
+          <a:effectLst>
+            <a:outerShdw blurRad="88900" dist="38100" dir="5400000" algn="bl" rotWithShape="0">
+              <a:srgbClr val="1A2E5C">
+                <a:alpha val="16000"/>
+              </a:srgbClr>
+            </a:outerShdw>
+          </a:effectLst>
+        </p:spPr>
+        <p:txBody>
+          <a:bodyPr/>
+          <a:lstStyle/>
+          <a:p>
+            <a:endParaRPr lang="en-US"/>
+          </a:p>
+        </p:txBody>
+      </p:sp>
+      <p:sp>
+        <p:nvSpPr>
+          <p:cNvPr id="16" name="Text 14"/>
+          <p:cNvSpPr/>
+          <p:nvPr/>
+        </p:nvSpPr>
+        <p:spPr>
+          <a:xfrm>
+            <a:off x="804672" y="4663440"/>
+            <a:ext cx="594360" cy="594360"/>
+          </a:xfrm>
+          <a:prstGeom prst="rect">
+            <a:avLst/>
+          </a:prstGeom>
+          <a:noFill/>
+          <a:ln/>
+        </p:spPr>
+        <p:txBody>
+          <a:bodyPr wrap="square" lIns="0" tIns="0" rIns="0" bIns="0" rtlCol="0" anchor="ctr"/>
+          <a:lstStyle/>
+          <a:p>
+            <a:pPr marL="0" indent="0" algn="ctr">
+              <a:buNone/>
+            </a:pPr>
+            <a:r>
+              <a:rPr lang="en-US" sz="1300" b="1" dirty="0">
+                <a:solidFill>
+                  <a:srgbClr val="FFFFFF"/>
+                </a:solidFill>
+                <a:latin typeface="Calibri" pitchFamily="34" charset="0"/>
+                <a:ea typeface="Calibri" pitchFamily="34" charset="-122"/>
+                <a:cs typeface="Calibri" pitchFamily="34" charset="-120"/>
+              </a:rPr>
+              <a:t>⏱</a:t>
+            </a:r>
+            <a:endParaRPr lang="en-US" sz="1300" dirty="0"/>
+          </a:p>
+        </p:txBody>
+      </p:sp>
+      <p:sp>
+        <p:nvSpPr>
+          <p:cNvPr id="17" name="Text 15"/>
+          <p:cNvSpPr/>
+          <p:nvPr/>
+        </p:nvSpPr>
+        <p:spPr>
+          <a:xfrm>
+            <a:off x="1645920" y="4553712"/>
+            <a:ext cx="5120640" cy="365760"/>
+          </a:xfrm>
+          <a:prstGeom prst="rect">
+            <a:avLst/>
+          </a:prstGeom>
+          <a:noFill/>
+          <a:ln/>
+        </p:spPr>
+        <p:txBody>
+          <a:bodyPr wrap="square" lIns="0" tIns="0" rIns="0" bIns="0" rtlCol="0" anchor="ctr"/>
+          <a:lstStyle/>
+          <a:p>
+            <a:pPr marL="0" indent="0">
+              <a:buNone/>
+            </a:pPr>
+            <a:r>
+              <a:rPr lang="en-US" sz="1700" b="1" dirty="0">
+                <a:solidFill>
+                  <a:srgbClr val="1A2E5C"/>
+                </a:solidFill>
+                <a:latin typeface="Calibri" pitchFamily="34" charset="0"/>
+                <a:ea typeface="Calibri" pitchFamily="34" charset="-122"/>
+                <a:cs typeface="Calibri" pitchFamily="34" charset="-120"/>
+              </a:rPr>
+              <a:t>Tarde</a:t>
+            </a:r>
+            <a:endParaRPr lang="en-US" sz="1700" dirty="0"/>
+          </a:p>
+        </p:txBody>
+      </p:sp>
+      <p:sp>
+        <p:nvSpPr>
+          <p:cNvPr id="18" name="Text 16"/>
+          <p:cNvSpPr/>
+          <p:nvPr/>
+        </p:nvSpPr>
+        <p:spPr>
+          <a:xfrm>
+            <a:off x="1645920" y="4937760"/>
+            <a:ext cx="5212080" cy="502920"/>
+          </a:xfrm>
+          <a:prstGeom prst="rect">
+            <a:avLst/>
+          </a:prstGeom>
+          <a:noFill/>
+          <a:ln/>
+        </p:spPr>
+        <p:txBody>
+          <a:bodyPr wrap="square" lIns="0" tIns="0" rIns="0" bIns="0" rtlCol="0" anchor="ctr"/>
+          <a:lstStyle/>
+          <a:p>
+            <a:pPr marL="0" indent="0">
+              <a:buNone/>
+            </a:pPr>
+            <a:r>
+              <a:rPr lang="en-US" sz="1250" dirty="0">
+                <a:solidFill>
+                  <a:srgbClr val="2C3E50"/>
+                </a:solidFill>
+                <a:latin typeface="Calibri" pitchFamily="34" charset="0"/>
+                <a:ea typeface="Calibri" pitchFamily="34" charset="-122"/>
+                <a:cs typeface="Calibri" pitchFamily="34" charset="-120"/>
+              </a:rPr>
+              <a:t>Incendios, contaminación o inseguridad se conocen cuando ya pasó — con datos a veces desactualizados o tardíos.</a:t>
+            </a:r>
+            <a:endParaRPr lang="en-US" sz="1250" dirty="0"/>
+          </a:p>
+        </p:txBody>
+      </p:sp>
+      <p:sp>
+        <p:nvSpPr>
+          <p:cNvPr id="19" name="Shape 17"/>
+          <p:cNvSpPr/>
+          <p:nvPr/>
+        </p:nvSpPr>
+        <p:spPr>
+          <a:xfrm>
+            <a:off x="7406640" y="1737360"/>
+            <a:ext cx="4206240" cy="3977640"/>
+          </a:xfrm>
+          <a:prstGeom prst="roundRect">
+            <a:avLst>
+              <a:gd name="adj" fmla="val 2069"/>
+            </a:avLst>
+          </a:prstGeom>
+          <a:solidFill>
+            <a:srgbClr val="1A2E5C"/>
+          </a:solidFill>
+          <a:ln w="12700">
+            <a:solidFill>
+              <a:srgbClr val="E1E6EC"/>
+            </a:solidFill>
+            <a:prstDash val="solid"/>
+          </a:ln>
+          <a:effectLst>
+            <a:outerShdw blurRad="88900" dist="38100" dir="5400000" algn="bl" rotWithShape="0">
+              <a:srgbClr val="1A2E5C">
+                <a:alpha val="16000"/>
+              </a:srgbClr>
+            </a:outerShdw>
+          </a:effectLst>
+        </p:spPr>
+        <p:txBody>
+          <a:bodyPr/>
+          <a:lstStyle/>
+          <a:p>
+            <a:endParaRPr lang="en-US"/>
+          </a:p>
+        </p:txBody>
+      </p:sp>
+      <p:sp>
+        <p:nvSpPr>
+          <p:cNvPr id="20" name="Text 18"/>
+          <p:cNvSpPr/>
+          <p:nvPr/>
+        </p:nvSpPr>
+        <p:spPr>
+          <a:xfrm>
+            <a:off x="7635240" y="1965960"/>
+            <a:ext cx="3749040" cy="365760"/>
+          </a:xfrm>
+          <a:prstGeom prst="rect">
+            <a:avLst/>
+          </a:prstGeom>
+          <a:noFill/>
+          <a:ln/>
+        </p:spPr>
+        <p:txBody>
+          <a:bodyPr wrap="square" lIns="0" tIns="0" rIns="0" bIns="0" rtlCol="0" anchor="ctr"/>
+          <a:lstStyle/>
+          <a:p>
+            <a:pPr marL="0" indent="0">
+              <a:buNone/>
+            </a:pPr>
+            <a:r>
+              <a:rPr lang="en-US" sz="1400" b="1" dirty="0">
+                <a:solidFill>
+                  <a:srgbClr val="1DB87F"/>
+                </a:solidFill>
+                <a:latin typeface="Calibri" pitchFamily="34" charset="0"/>
+                <a:ea typeface="Calibri" pitchFamily="34" charset="-122"/>
+                <a:cs typeface="Calibri" pitchFamily="34" charset="-120"/>
+              </a:rPr>
+              <a:t>La consecuencia</a:t>
+            </a:r>
+            <a:endParaRPr lang="en-US" sz="1400" dirty="0"/>
+          </a:p>
+        </p:txBody>
+      </p:sp>
+      <p:sp>
+        <p:nvSpPr>
+          <p:cNvPr id="21" name="Text 19"/>
+          <p:cNvSpPr/>
+          <p:nvPr/>
+        </p:nvSpPr>
+        <p:spPr>
+          <a:xfrm>
+            <a:off x="7635240" y="2377440"/>
+            <a:ext cx="3749040" cy="914400"/>
+          </a:xfrm>
+          <a:prstGeom prst="rect">
+            <a:avLst/>
+          </a:prstGeom>
+          <a:noFill/>
+          <a:ln/>
+        </p:spPr>
+        <p:txBody>
+          <a:bodyPr wrap="square" lIns="0" tIns="0" rIns="0" bIns="0" rtlCol="0" anchor="ctr"/>
+          <a:lstStyle/>
+          <a:p>
+            <a:pPr marL="0" indent="0">
+              <a:buNone/>
+            </a:pPr>
+            <a:r>
+              <a:rPr lang="en-US" sz="1350" dirty="0">
+                <a:solidFill>
+                  <a:srgbClr val="FFFFFF"/>
+                </a:solidFill>
+                <a:latin typeface="Calibri" pitchFamily="34" charset="0"/>
+                <a:ea typeface="Calibri" pitchFamily="34" charset="-122"/>
+                <a:cs typeface="Calibri" pitchFamily="34" charset="-120"/>
+              </a:rPr>
+              <a:t>Las decisiones públicas y ciudadanas se toman sin tener en cuenta la información que el país ya tiene disponible.</a:t>
+            </a:r>
+            <a:endParaRPr lang="en-US" sz="1350" dirty="0"/>
+          </a:p>
+        </p:txBody>
+      </p:sp>
+      <p:sp>
+        <p:nvSpPr>
+          <p:cNvPr id="22" name="Text 20"/>
+          <p:cNvSpPr/>
+          <p:nvPr/>
+        </p:nvSpPr>
+        <p:spPr>
+          <a:xfrm>
+            <a:off x="7635240" y="3383280"/>
+            <a:ext cx="3749040" cy="822960"/>
+          </a:xfrm>
+          <a:prstGeom prst="rect">
+            <a:avLst/>
+          </a:prstGeom>
+          <a:noFill/>
+          <a:ln/>
+        </p:spPr>
+        <p:txBody>
+          <a:bodyPr wrap="square" lIns="0" tIns="0" rIns="0" bIns="0" rtlCol="0" anchor="ctr"/>
+          <a:lstStyle/>
+          <a:p>
+            <a:pPr marL="0" indent="0">
+              <a:buNone/>
+            </a:pPr>
+            <a:r>
+              <a:rPr lang="en-US" sz="5400" b="1" dirty="0">
+                <a:solidFill>
+                  <a:srgbClr val="FFFFFF"/>
+                </a:solidFill>
+                <a:latin typeface="Calibri" pitchFamily="34" charset="0"/>
+                <a:ea typeface="Calibri" pitchFamily="34" charset="-122"/>
+                <a:cs typeface="Calibri" pitchFamily="34" charset="-120"/>
+              </a:rPr>
+              <a:t>+150</a:t>
+            </a:r>
+            <a:endParaRPr lang="en-US" sz="5400" dirty="0"/>
+          </a:p>
+        </p:txBody>
+      </p:sp>
+      <p:sp>
+        <p:nvSpPr>
+          <p:cNvPr id="23" name="Text 21"/>
+          <p:cNvSpPr/>
+          <p:nvPr/>
+        </p:nvSpPr>
+        <p:spPr>
+          <a:xfrm>
+            <a:off x="7635240" y="4343400"/>
+            <a:ext cx="3749040" cy="1188720"/>
+          </a:xfrm>
+          <a:prstGeom prst="rect">
+            <a:avLst/>
+          </a:prstGeom>
+          <a:noFill/>
+          <a:ln/>
+        </p:spPr>
+        <p:txBody>
+          <a:bodyPr wrap="square" lIns="0" tIns="0" rIns="0" bIns="0" rtlCol="0" anchor="ctr"/>
+          <a:lstStyle/>
+          <a:p>
+            <a:pPr marL="0" indent="0">
+              <a:buNone/>
+            </a:pPr>
+            <a:r>
+              <a:rPr lang="en-US" sz="1200" dirty="0">
+                <a:solidFill>
+                  <a:srgbClr val="CADCFC"/>
+                </a:solidFill>
+                <a:latin typeface="Calibri" pitchFamily="34" charset="0"/>
+                <a:ea typeface="Calibri" pitchFamily="34" charset="-122"/>
+                <a:cs typeface="Calibri" pitchFamily="34" charset="-120"/>
+              </a:rPr>
+              <a:t>equipos compiten por resolver retos reales con datos abiertos — el nuestro los vuelve accionables.</a:t>
+            </a:r>
+            <a:endParaRPr lang="en-US" sz="1200" dirty="0"/>
+          </a:p>
+        </p:txBody>
+      </p:sp>
+      <p:sp>
+        <p:nvSpPr>
+          <p:cNvPr id="24" name="Text 22"/>
+          <p:cNvSpPr/>
+          <p:nvPr/>
+        </p:nvSpPr>
+        <p:spPr>
+          <a:xfrm>
+            <a:off x="548640" y="6473952"/>
+            <a:ext cx="8229600" cy="274320"/>
+          </a:xfrm>
+          <a:prstGeom prst="rect">
+            <a:avLst/>
+          </a:prstGeom>
+          <a:noFill/>
+          <a:ln/>
+        </p:spPr>
+        <p:txBody>
+          <a:bodyPr wrap="square" lIns="0" tIns="0" rIns="0" bIns="0" rtlCol="0" anchor="ctr"/>
+          <a:lstStyle/>
+          <a:p>
+            <a:pPr marL="0" indent="0" algn="l">
+              <a:buNone/>
+            </a:pPr>
+            <a:r>
+              <a:rPr lang="en-US" sz="900" dirty="0">
+                <a:solidFill>
+                  <a:srgbClr val="7B8794"/>
+                </a:solidFill>
+                <a:latin typeface="Calibri" pitchFamily="34" charset="0"/>
+                <a:ea typeface="Calibri" pitchFamily="34" charset="-122"/>
+                <a:cs typeface="Calibri" pitchFamily="34" charset="-120"/>
+              </a:rPr>
+              <a:t>VigIA · Equipo 80 — Concurso Datos al Ecosistema 2026</a:t>
+            </a:r>
+            <a:endParaRPr lang="en-US" sz="900" dirty="0"/>
+          </a:p>
+        </p:txBody>
+      </p:sp>
+      <p:sp>
+        <p:nvSpPr>
+          <p:cNvPr id="25" name="Text 23"/>
+          <p:cNvSpPr/>
+          <p:nvPr/>
+        </p:nvSpPr>
+        <p:spPr>
+          <a:xfrm>
+            <a:off x="11155680" y="6473952"/>
+            <a:ext cx="457200" cy="274320"/>
+          </a:xfrm>
+          <a:prstGeom prst="rect">
+            <a:avLst/>
+          </a:prstGeom>
+          <a:noFill/>
+          <a:ln/>
+        </p:spPr>
+        <p:txBody>
+          <a:bodyPr wrap="square" lIns="0" tIns="0" rIns="0" bIns="0" rtlCol="0" anchor="ctr"/>
+          <a:lstStyle/>
+          <a:p>
+            <a:pPr marL="0" indent="0" algn="r">
+              <a:buNone/>
+            </a:pPr>
+            <a:r>
+              <a:rPr lang="en-US" sz="900" dirty="0">
+                <a:solidFill>
+                  <a:srgbClr val="7B8794"/>
+                </a:solidFill>
+                <a:latin typeface="Calibri" pitchFamily="34" charset="0"/>
+                <a:ea typeface="Calibri" pitchFamily="34" charset="-122"/>
+                <a:cs typeface="Calibri" pitchFamily="34" charset="-120"/>
+              </a:rPr>
+              <a:t>1</a:t>
+            </a:r>
+            <a:endParaRPr lang="en-US" sz="900" dirty="0"/>
+          </a:p>
+        </p:txBody>
+      </p:sp>
     </p:spTree>
   </p:cSld>
   <p:clrMapOvr>
@@ -20529,7 +22390,7 @@
 </p:sld>
 </file>
 
-<file path=ppt/slides/slide3.xml><?xml version="1.0" encoding="utf-8"?>
+<file path=ppt/slides/slide4.xml><?xml version="1.0" encoding="utf-8"?>
 <p:sld xmlns:a="http://schemas.openxmlformats.org/drawingml/2006/main" xmlns:r="http://schemas.openxmlformats.org/officeDocument/2006/relationships" xmlns:p="http://schemas.openxmlformats.org/presentationml/2006/main">
   <p:cSld name="Slide 3">
     <p:bg>
@@ -21270,7 +23131,7 @@
                 <a:ea typeface="Calibri" pitchFamily="34" charset="-122"/>
                 <a:cs typeface="Calibri" pitchFamily="34" charset="-120"/>
               </a:rPr>
-              <a:t>3</a:t>
+              <a:t>2</a:t>
             </a:r>
             <a:endParaRPr lang="en-US" sz="900" dirty="0"/>
           </a:p>
@@ -21284,7 +23145,7 @@
 </p:sld>
 </file>
 
-<file path=ppt/slides/slide4.xml><?xml version="1.0" encoding="utf-8"?>
+<file path=ppt/slides/slide5.xml><?xml version="1.0" encoding="utf-8"?>
 <p:sld xmlns:a="http://schemas.openxmlformats.org/drawingml/2006/main" xmlns:r="http://schemas.openxmlformats.org/officeDocument/2006/relationships" xmlns:p="http://schemas.openxmlformats.org/presentationml/2006/main">
   <p:cSld name="Slide 4">
     <p:bg>
@@ -21957,7 +23818,7 @@
                 <a:ea typeface="Calibri" pitchFamily="34" charset="-122"/>
                 <a:cs typeface="Calibri" pitchFamily="34" charset="-120"/>
               </a:rPr>
-              <a:t>Normales climatológicas IDEAM</a:t>
+              <a:t>Información climática del IDEAM</a:t>
             </a:r>
             <a:endParaRPr lang="en-US" sz="1150" dirty="0"/>
           </a:p>
@@ -22302,7 +24163,7 @@
                 <a:ea typeface="Calibri" pitchFamily="34" charset="-122"/>
                 <a:cs typeface="Calibri" pitchFamily="34" charset="-120"/>
               </a:rPr>
-              <a:t>Sensor IoT real desplegado  </a:t>
+              <a:t>Sensor IoT real desplegado  ESP8266 + MQ‑2: mide calidad del aire (gas) y transmite las lecturas por API en tiempo real. Piloto actual sin sensor de sonido físico — el campo de ruido queda soportado y listo para integrarlo.</a:t>
             </a:r>
             <a:r>
               <a:rPr lang="en-US" sz="1250" dirty="0">
@@ -22313,7 +24174,7 @@
                 <a:ea typeface="Calibri" pitchFamily="34" charset="-122"/>
                 <a:cs typeface="Calibri" pitchFamily="34" charset="-120"/>
               </a:rPr>
-              <a:t>ESP8266 + MQ2 → envía mediciones de campo por API (piloto real). Fuente principal de ruido y aire local.</a:t>
+              <a:t/>
             </a:r>
             <a:endParaRPr lang="en-US" sz="1250" dirty="0"/>
           </a:p>
@@ -22391,7 +24252,7 @@
                 <a:ea typeface="Calibri" pitchFamily="34" charset="-122"/>
                 <a:cs typeface="Calibri" pitchFamily="34" charset="-120"/>
               </a:rPr>
-              <a:t>4</a:t>
+              <a:t>3</a:t>
             </a:r>
             <a:endParaRPr lang="en-US" sz="900" dirty="0"/>
           </a:p>
@@ -22405,7 +24266,7 @@
 </p:sld>
 </file>
 
-<file path=ppt/slides/slide5.xml><?xml version="1.0" encoding="utf-8"?>
+<file path=ppt/slides/slide6.xml><?xml version="1.0" encoding="utf-8"?>
 <p:sld xmlns:a="http://schemas.openxmlformats.org/drawingml/2006/main" xmlns:r="http://schemas.openxmlformats.org/officeDocument/2006/relationships" xmlns:p="http://schemas.openxmlformats.org/presentationml/2006/main">
   <p:cSld name="Slide 5">
     <p:bg>
@@ -22502,7 +24363,7 @@
                 <a:ea typeface="Calibri" pitchFamily="34" charset="-122"/>
                 <a:cs typeface="Calibri" pitchFamily="34" charset="-120"/>
               </a:rPr>
-              <a:t>De la fuente al ciudadano, en una tubería verificable</a:t>
+              <a:t>De las fuentes de datos al ciudadano, mediante un flujo de datos verificable</a:t>
             </a:r>
             <a:endParaRPr lang="en-US" sz="3000" dirty="0"/>
           </a:p>
@@ -23379,7 +25240,7 @@
                 <a:ea typeface="Calibri" pitchFamily="34" charset="-122"/>
                 <a:cs typeface="Calibri" pitchFamily="34" charset="-120"/>
               </a:rPr>
-              <a:t>5</a:t>
+              <a:t>4</a:t>
             </a:r>
             <a:endParaRPr lang="en-US" sz="900" dirty="0"/>
           </a:p>
@@ -23393,7 +25254,7 @@
 </p:sld>
 </file>
 
-<file path=ppt/slides/slide6.xml><?xml version="1.0" encoding="utf-8"?>
+<file path=ppt/slides/slide7.xml><?xml version="1.0" encoding="utf-8"?>
 <p:sld xmlns:a="http://schemas.openxmlformats.org/drawingml/2006/main" xmlns:r="http://schemas.openxmlformats.org/officeDocument/2006/relationships" xmlns:p="http://schemas.openxmlformats.org/presentationml/2006/main">
   <p:cSld name="Slide 6">
     <p:bg>
@@ -24312,7 +26173,7 @@
                 <a:ea typeface="Calibri" pitchFamily="34" charset="-122"/>
                 <a:cs typeface="Calibri" pitchFamily="34" charset="-120"/>
               </a:rPr>
-              <a:t>alertar (regla)</a:t>
+              <a:t>✓ alertar (regla)</a:t>
             </a:r>
             <a:endParaRPr lang="en-US" sz="1200" dirty="0"/>
           </a:p>
@@ -24548,7 +26409,7 @@
                 <a:ea typeface="Calibri" pitchFamily="34" charset="-122"/>
                 <a:cs typeface="Calibri" pitchFamily="34" charset="-120"/>
               </a:rPr>
-              <a:t>6</a:t>
+              <a:t>5</a:t>
             </a:r>
             <a:endParaRPr lang="en-US" sz="900" dirty="0"/>
           </a:p>
@@ -24562,7 +26423,7 @@
 </p:sld>
 </file>
 
-<file path=ppt/slides/slide7.xml><?xml version="1.0" encoding="utf-8"?>
+<file path=ppt/slides/slide8.xml><?xml version="1.0" encoding="utf-8"?>
 <p:sld xmlns:a="http://schemas.openxmlformats.org/drawingml/2006/main" xmlns:r="http://schemas.openxmlformats.org/officeDocument/2006/relationships" xmlns:p="http://schemas.openxmlformats.org/presentationml/2006/main">
   <p:cSld name="Slide 7">
     <p:bg>
@@ -25311,7 +27172,7 @@
                 <a:ea typeface="Calibri" pitchFamily="34" charset="-122"/>
                 <a:cs typeface="Calibri" pitchFamily="34" charset="-120"/>
               </a:rPr>
-              <a:t>Alertas por reglas determinísticas auditables (OMS).</a:t>
+              <a:t>Alertas por reglas determinísticas, basadas en estándares de la OMS (PM2.5, PM10, ruido).</a:t>
             </a:r>
             <a:endParaRPr lang="en-US" sz="1200" dirty="0"/>
           </a:p>
@@ -25469,7 +27330,7 @@
                 <a:ea typeface="Calibri" pitchFamily="34" charset="-122"/>
                 <a:cs typeface="Calibri" pitchFamily="34" charset="-120"/>
               </a:rPr>
-              <a:t>7</a:t>
+              <a:t>6</a:t>
             </a:r>
             <a:endParaRPr lang="en-US" sz="900" dirty="0"/>
           </a:p>
@@ -25483,9 +27344,9 @@
 </p:sld>
 </file>
 
-<file path=ppt/slides/slide8.xml><?xml version="1.0" encoding="utf-8"?>
-<p:sld xmlns:a="http://schemas.openxmlformats.org/drawingml/2006/main" xmlns:r="http://schemas.openxmlformats.org/officeDocument/2006/relationships" xmlns:p="http://schemas.openxmlformats.org/presentationml/2006/main">
-  <p:cSld name="Slide 8">
+<file path=ppt/slides/slide9.xml><?xml version="1.0" encoding="utf-8"?>
+<p:sld xmlns:a="http://schemas.openxmlformats.org/drawingml/2006/main" xmlns:p="http://schemas.openxmlformats.org/presentationml/2006/main" xmlns:r="http://schemas.openxmlformats.org/officeDocument/2006/relationships">
+  <p:cSld>
     <p:bg>
       <p:bgPr>
         <a:solidFill>
@@ -25500,18 +27361,11 @@
         <p:cNvGrpSpPr/>
         <p:nvPr/>
       </p:nvGrpSpPr>
-      <p:grpSpPr>
-        <a:xfrm>
-          <a:off x="0" y="0"/>
-          <a:ext cx="0" cy="0"/>
-          <a:chOff x="0" y="0"/>
-          <a:chExt cx="0" cy="0"/>
-        </a:xfrm>
-      </p:grpSpPr>
-      <p:sp>
-        <p:nvSpPr>
-          <p:cNvPr id="2" name="Text 0"/>
-          <p:cNvSpPr/>
+      <p:grpSpPr/>
+      <p:sp>
+        <p:nvSpPr>
+          <p:cNvPr id="2" name="TextBox 1"/>
+          <p:cNvSpPr txBox="1"/>
           <p:nvPr/>
         </p:nvSpPr>
         <p:spPr>
@@ -25523,34 +27377,30 @@
             <a:avLst/>
           </a:prstGeom>
           <a:noFill/>
-          <a:ln/>
-        </p:spPr>
-        <p:txBody>
-          <a:bodyPr wrap="square" lIns="0" tIns="0" rIns="0" bIns="0" rtlCol="0" anchor="ctr"/>
-          <a:lstStyle/>
-          <a:p>
-            <a:pPr marL="0" indent="0">
-              <a:buNone/>
-            </a:pPr>
-            <a:r>
-              <a:rPr lang="en-US" sz="1200" b="1" kern="0" spc="200" dirty="0">
+        </p:spPr>
+        <p:txBody>
+          <a:bodyPr wrap="square" lIns="0" rIns="0" tIns="0" bIns="0">
+            <a:spAutoFit/>
+          </a:bodyPr>
+          <a:lstStyle/>
+          <a:p>
+            <a:pPr algn="l"/>
+            <a:r>
+              <a:rPr sz="1200" b="1" i="0">
                 <a:solidFill>
                   <a:srgbClr val="12A36A"/>
                 </a:solidFill>
-                <a:latin typeface="Calibri" pitchFamily="34" charset="0"/>
-                <a:ea typeface="Calibri" pitchFamily="34" charset="-122"/>
-                <a:cs typeface="Calibri" pitchFamily="34" charset="-120"/>
-              </a:rPr>
-              <a:t>INNOVACIÓN</a:t>
-            </a:r>
-            <a:endParaRPr lang="en-US" sz="1200" dirty="0"/>
-          </a:p>
-        </p:txBody>
-      </p:sp>
-      <p:sp>
-        <p:nvSpPr>
-          <p:cNvPr id="3" name="Text 1"/>
-          <p:cNvSpPr/>
+                <a:latin typeface="Calibri"/>
+              </a:rPr>
+              <a:t>RIGOR Y TRANSPARENCIA</a:t>
+            </a:r>
+          </a:p>
+        </p:txBody>
+      </p:sp>
+      <p:sp>
+        <p:nvSpPr>
+          <p:cNvPr id="3" name="TextBox 2"/>
+          <p:cNvSpPr txBox="1"/>
           <p:nvPr/>
         </p:nvSpPr>
         <p:spPr>
@@ -25562,363 +27412,218 @@
             <a:avLst/>
           </a:prstGeom>
           <a:noFill/>
-          <a:ln/>
-        </p:spPr>
-        <p:txBody>
-          <a:bodyPr wrap="square" lIns="0" tIns="0" rIns="0" bIns="0" rtlCol="0" anchor="ctr"/>
-          <a:lstStyle/>
-          <a:p>
-            <a:pPr marL="0" indent="0">
-              <a:buNone/>
-            </a:pPr>
-            <a:r>
-              <a:rPr lang="en-US" sz="3000" b="1" dirty="0">
+        </p:spPr>
+        <p:txBody>
+          <a:bodyPr wrap="square" lIns="0" rIns="0" tIns="0" bIns="0">
+            <a:spAutoFit/>
+          </a:bodyPr>
+          <a:lstStyle/>
+          <a:p>
+            <a:pPr algn="l"/>
+            <a:r>
+              <a:rPr sz="2400" b="1" i="0">
                 <a:solidFill>
                   <a:srgbClr val="1A2E5C"/>
                 </a:solidFill>
-                <a:latin typeface="Calibri" pitchFamily="34" charset="0"/>
-                <a:ea typeface="Calibri" pitchFamily="34" charset="-122"/>
-                <a:cs typeface="Calibri" pitchFamily="34" charset="-120"/>
-              </a:rPr>
-              <a:t>Visión por computador cruzada con la estadística oficial</a:t>
-            </a:r>
-            <a:endParaRPr lang="en-US" sz="3000" dirty="0"/>
-          </a:p>
-        </p:txBody>
-      </p:sp>
-      <p:sp>
-        <p:nvSpPr>
-          <p:cNvPr id="4" name="Shape 2"/>
-          <p:cNvSpPr/>
-          <p:nvPr/>
-        </p:nvSpPr>
-        <p:spPr>
-          <a:xfrm>
-            <a:off x="548640" y="1828800"/>
-            <a:ext cx="5212080" cy="3931920"/>
+                <a:latin typeface="Calibri"/>
+              </a:rPr>
+              <a:t>¿Cómo leemos los datos? Un ejemplo real de hoy</a:t>
+            </a:r>
+          </a:p>
+        </p:txBody>
+      </p:sp>
+      <p:sp>
+        <p:nvSpPr>
+          <p:cNvPr id="4" name="Rounded Rectangle 3"/>
+          <p:cNvSpPr/>
+          <p:nvPr/>
+        </p:nvSpPr>
+        <p:spPr>
+          <a:xfrm>
+            <a:off x="548640" y="1874520"/>
+            <a:ext cx="11064240" cy="1097280"/>
           </a:xfrm>
           <a:prstGeom prst="roundRect">
-            <a:avLst>
-              <a:gd name="adj" fmla="val 2093"/>
-            </a:avLst>
+            <a:avLst/>
           </a:prstGeom>
           <a:solidFill>
-            <a:srgbClr val="1A2E5C"/>
+            <a:srgbClr val="E8F7F0"/>
           </a:solidFill>
           <a:ln w="12700">
             <a:solidFill>
               <a:srgbClr val="E1E6EC"/>
             </a:solidFill>
-            <a:prstDash val="solid"/>
           </a:ln>
-          <a:effectLst>
-            <a:outerShdw blurRad="88900" dist="38100" dir="5400000" algn="bl" rotWithShape="0">
-              <a:srgbClr val="1A2E5C">
-                <a:alpha val="16000"/>
-              </a:srgbClr>
-            </a:outerShdw>
-          </a:effectLst>
-        </p:spPr>
-        <p:txBody>
-          <a:bodyPr/>
-          <a:lstStyle/>
-          <a:p>
-            <a:endParaRPr lang="en-US"/>
-          </a:p>
-        </p:txBody>
-      </p:sp>
-      <p:sp>
-        <p:nvSpPr>
-          <p:cNvPr id="5" name="Text 3"/>
-          <p:cNvSpPr/>
+          <a:effectLst/>
+        </p:spPr>
+        <p:style>
+          <a:lnRef idx="1">
+            <a:schemeClr val="accent1"/>
+          </a:lnRef>
+          <a:fillRef idx="3">
+            <a:schemeClr val="accent1"/>
+          </a:fillRef>
+          <a:effectRef idx="2">
+            <a:schemeClr val="accent1"/>
+          </a:effectRef>
+          <a:fontRef idx="minor">
+            <a:schemeClr val="lt1"/>
+          </a:fontRef>
+        </p:style>
+        <p:txBody>
+          <a:bodyPr rtlCol="0" anchor="ctr"/>
+          <a:lstStyle/>
+          <a:p>
+            <a:pPr algn="ctr"/>
+          </a:p>
+        </p:txBody>
+      </p:sp>
+      <p:sp>
+        <p:nvSpPr>
+          <p:cNvPr id="5" name="TextBox 4"/>
+          <p:cNvSpPr txBox="1"/>
           <p:nvPr/>
         </p:nvSpPr>
         <p:spPr>
           <a:xfrm>
             <a:off x="822960" y="2057400"/>
-            <a:ext cx="4663440" cy="365760"/>
-          </a:xfrm>
-          <a:prstGeom prst="rect">
-            <a:avLst/>
-          </a:prstGeom>
-          <a:noFill/>
-          <a:ln/>
-        </p:spPr>
-        <p:txBody>
-          <a:bodyPr wrap="square" lIns="0" tIns="0" rIns="0" bIns="0" rtlCol="0" anchor="ctr"/>
-          <a:lstStyle/>
-          <a:p>
-            <a:pPr marL="0" indent="0">
-              <a:buNone/>
-            </a:pPr>
-            <a:r>
-              <a:rPr lang="en-US" sz="1500" b="1" dirty="0">
-                <a:solidFill>
-                  <a:srgbClr val="1DB87F"/>
-                </a:solidFill>
-                <a:latin typeface="Calibri" pitchFamily="34" charset="0"/>
-                <a:ea typeface="Calibri" pitchFamily="34" charset="-122"/>
-                <a:cs typeface="Calibri" pitchFamily="34" charset="-120"/>
-              </a:rPr>
-              <a:t>Modelo de visión (TSN · MMAction2)</a:t>
-            </a:r>
-            <a:endParaRPr lang="en-US" sz="1500" dirty="0"/>
-          </a:p>
-        </p:txBody>
-      </p:sp>
-      <p:sp>
-        <p:nvSpPr>
-          <p:cNvPr id="6" name="Text 4"/>
-          <p:cNvSpPr/>
-          <p:nvPr/>
-        </p:nvSpPr>
-        <p:spPr>
-          <a:xfrm>
-            <a:off x="822960" y="2468880"/>
-            <a:ext cx="4663440" cy="914400"/>
-          </a:xfrm>
-          <a:prstGeom prst="rect">
-            <a:avLst/>
-          </a:prstGeom>
-          <a:noFill/>
-          <a:ln/>
-        </p:spPr>
-        <p:txBody>
-          <a:bodyPr wrap="square" lIns="0" tIns="0" rIns="0" bIns="0" rtlCol="0" anchor="ctr"/>
-          <a:lstStyle/>
-          <a:p>
-            <a:pPr marL="0" indent="0">
-              <a:buNone/>
-            </a:pPr>
-            <a:r>
-              <a:rPr lang="en-US" sz="1300" dirty="0">
-                <a:solidFill>
-                  <a:srgbClr val="FFFFFF"/>
-                </a:solidFill>
-                <a:latin typeface="Calibri" pitchFamily="34" charset="0"/>
-                <a:ea typeface="Calibri" pitchFamily="34" charset="-122"/>
-                <a:cs typeface="Calibri" pitchFamily="34" charset="-120"/>
-              </a:rPr>
-              <a:t>Clasifica eventos en video: hurto (robbery, stealing, shoplifting, burglary) y riesgo, con nivel de alerta.</a:t>
-            </a:r>
-            <a:endParaRPr lang="en-US" sz="1300" dirty="0"/>
-          </a:p>
-        </p:txBody>
-      </p:sp>
-      <p:sp>
-        <p:nvSpPr>
-          <p:cNvPr id="7" name="Text 5"/>
-          <p:cNvSpPr/>
-          <p:nvPr/>
-        </p:nvSpPr>
-        <p:spPr>
-          <a:xfrm>
-            <a:off x="822960" y="3383280"/>
-            <a:ext cx="4663440" cy="548640"/>
-          </a:xfrm>
-          <a:prstGeom prst="rect">
-            <a:avLst/>
-          </a:prstGeom>
-          <a:noFill/>
-          <a:ln/>
-        </p:spPr>
-        <p:txBody>
-          <a:bodyPr wrap="square" lIns="0" tIns="0" rIns="0" bIns="0" rtlCol="0" anchor="ctr"/>
-          <a:lstStyle/>
-          <a:p>
-            <a:pPr marL="0" indent="0">
-              <a:buNone/>
-            </a:pPr>
-            <a:r>
-              <a:rPr lang="en-US" sz="1150" i="1" dirty="0">
-                <a:solidFill>
-                  <a:srgbClr val="CADCFC"/>
-                </a:solidFill>
-                <a:latin typeface="Calibri" pitchFamily="34" charset="0"/>
-                <a:ea typeface="Calibri" pitchFamily="34" charset="-122"/>
-                <a:cs typeface="Calibri" pitchFamily="34" charset="-120"/>
-              </a:rPr>
-              <a:t>Entrenado por el equipo · integrado por webhook y microservicio</a:t>
-            </a:r>
-            <a:endParaRPr lang="en-US" sz="1150" dirty="0"/>
-          </a:p>
-        </p:txBody>
-      </p:sp>
-      <p:sp>
-        <p:nvSpPr>
-          <p:cNvPr id="8" name="Shape 6"/>
-          <p:cNvSpPr/>
-          <p:nvPr/>
-        </p:nvSpPr>
-        <p:spPr>
-          <a:xfrm>
-            <a:off x="822960" y="4069080"/>
-            <a:ext cx="4663440" cy="0"/>
-          </a:xfrm>
-          <a:prstGeom prst="line">
-            <a:avLst/>
-          </a:prstGeom>
-          <a:noFill/>
-          <a:ln w="12700">
-            <a:solidFill>
-              <a:srgbClr val="3A4C74"/>
-            </a:solidFill>
-            <a:prstDash val="solid"/>
-          </a:ln>
-        </p:spPr>
-        <p:txBody>
-          <a:bodyPr/>
-          <a:lstStyle/>
-          <a:p>
-            <a:endParaRPr lang="en-US"/>
-          </a:p>
-        </p:txBody>
-      </p:sp>
-      <p:sp>
-        <p:nvSpPr>
-          <p:cNvPr id="9" name="Text 7"/>
-          <p:cNvSpPr/>
-          <p:nvPr/>
-        </p:nvSpPr>
-        <p:spPr>
-          <a:xfrm>
-            <a:off x="822960" y="4206240"/>
-            <a:ext cx="4663440" cy="1371600"/>
-          </a:xfrm>
-          <a:prstGeom prst="rect">
-            <a:avLst/>
-          </a:prstGeom>
-          <a:noFill/>
-          <a:ln/>
-        </p:spPr>
-        <p:txBody>
-          <a:bodyPr wrap="square" lIns="0" tIns="0" rIns="0" bIns="0" rtlCol="0" anchor="ctr"/>
-          <a:lstStyle/>
-          <a:p>
-            <a:pPr marL="0" indent="0">
-              <a:lnSpc>
-                <a:spcPct val="120000"/>
-              </a:lnSpc>
-              <a:buNone/>
-            </a:pPr>
-            <a:r>
-              <a:rPr lang="en-US" sz="1250" dirty="0">
-                <a:solidFill>
-                  <a:srgbClr val="1DB87F"/>
-                </a:solidFill>
-                <a:latin typeface="Calibri" pitchFamily="34" charset="0"/>
-                <a:ea typeface="Calibri" pitchFamily="34" charset="-122"/>
-                <a:cs typeface="Calibri" pitchFamily="34" charset="-120"/>
-              </a:rPr>
-              <a:t>Shoplifting → </a:t>
-            </a:r>
-            <a:r>
-              <a:rPr lang="en-US" sz="1250" dirty="0">
-                <a:solidFill>
-                  <a:srgbClr val="FFFFFF"/>
-                </a:solidFill>
-                <a:latin typeface="Calibri" pitchFamily="34" charset="0"/>
-                <a:ea typeface="Calibri" pitchFamily="34" charset="-122"/>
-                <a:cs typeface="Calibri" pitchFamily="34" charset="-120"/>
-              </a:rPr>
-              <a:t>Hurto a comercio
-</a:t>
-            </a:r>
-            <a:r>
-              <a:rPr lang="en-US" sz="1250" dirty="0">
-                <a:solidFill>
-                  <a:srgbClr val="1DB87F"/>
-                </a:solidFill>
-                <a:latin typeface="Calibri" pitchFamily="34" charset="0"/>
-                <a:ea typeface="Calibri" pitchFamily="34" charset="-122"/>
-                <a:cs typeface="Calibri" pitchFamily="34" charset="-120"/>
-              </a:rPr>
-              <a:t>Burglary → </a:t>
-            </a:r>
-            <a:r>
-              <a:rPr lang="en-US" sz="1250" dirty="0">
-                <a:solidFill>
-                  <a:srgbClr val="FFFFFF"/>
-                </a:solidFill>
-                <a:latin typeface="Calibri" pitchFamily="34" charset="0"/>
-                <a:ea typeface="Calibri" pitchFamily="34" charset="-122"/>
-                <a:cs typeface="Calibri" pitchFamily="34" charset="-120"/>
-              </a:rPr>
-              <a:t>Hurto a residencias
-</a:t>
-            </a:r>
-            <a:r>
-              <a:rPr lang="en-US" sz="1250" dirty="0">
-                <a:solidFill>
-                  <a:srgbClr val="1DB87F"/>
-                </a:solidFill>
-                <a:latin typeface="Calibri" pitchFamily="34" charset="0"/>
-                <a:ea typeface="Calibri" pitchFamily="34" charset="-122"/>
-                <a:cs typeface="Calibri" pitchFamily="34" charset="-120"/>
-              </a:rPr>
-              <a:t>Robbery → </a:t>
-            </a:r>
-            <a:r>
-              <a:rPr lang="en-US" sz="1250" dirty="0">
-                <a:solidFill>
-                  <a:srgbClr val="FFFFFF"/>
-                </a:solidFill>
-                <a:latin typeface="Calibri" pitchFamily="34" charset="0"/>
-                <a:ea typeface="Calibri" pitchFamily="34" charset="-122"/>
-                <a:cs typeface="Calibri" pitchFamily="34" charset="-120"/>
-              </a:rPr>
-              <a:t>Hurto a personas</a:t>
-            </a:r>
-            <a:endParaRPr lang="en-US" sz="1250" dirty="0"/>
-          </a:p>
-        </p:txBody>
-      </p:sp>
-      <p:sp>
-        <p:nvSpPr>
-          <p:cNvPr id="10" name="Shape 8"/>
-          <p:cNvSpPr/>
-          <p:nvPr/>
-        </p:nvSpPr>
-        <p:spPr>
-          <a:xfrm>
-            <a:off x="5760720" y="3749040"/>
-            <a:ext cx="640080" cy="0"/>
-          </a:xfrm>
-          <a:prstGeom prst="line">
-            <a:avLst/>
-          </a:prstGeom>
-          <a:noFill/>
-          <a:ln w="38100">
-            <a:solidFill>
-              <a:srgbClr val="12A36A"/>
-            </a:solidFill>
-            <a:prstDash val="solid"/>
-            <a:tailEnd type="triangle"/>
-          </a:ln>
-        </p:spPr>
-        <p:txBody>
-          <a:bodyPr/>
-          <a:lstStyle/>
-          <a:p>
-            <a:endParaRPr lang="en-US"/>
-          </a:p>
-        </p:txBody>
-      </p:sp>
-      <p:sp>
-        <p:nvSpPr>
-          <p:cNvPr id="11" name="Shape 9"/>
-          <p:cNvSpPr/>
-          <p:nvPr/>
-        </p:nvSpPr>
-        <p:spPr>
-          <a:xfrm>
-            <a:off x="6492240" y="1828800"/>
-            <a:ext cx="5120640" cy="3931920"/>
+            <a:ext cx="10515600" cy="365760"/>
+          </a:xfrm>
+          <a:prstGeom prst="rect">
+            <a:avLst/>
+          </a:prstGeom>
+          <a:noFill/>
+        </p:spPr>
+        <p:txBody>
+          <a:bodyPr wrap="square" lIns="0" rIns="0" tIns="0" bIns="0">
+            <a:spAutoFit/>
+          </a:bodyPr>
+          <a:lstStyle/>
+          <a:p>
+            <a:pPr algn="l"/>
+            <a:r>
+              <a:rPr sz="1400" b="1" i="0">
+                <a:solidFill>
+                  <a:srgbClr val="12A36A"/>
+                </a:solidFill>
+                <a:latin typeface="Calibri"/>
+              </a:rPr>
+              <a:t>Ejemplo real probado hoy en la demo</a:t>
+            </a:r>
+          </a:p>
+        </p:txBody>
+      </p:sp>
+      <p:sp>
+        <p:nvSpPr>
+          <p:cNvPr id="6" name="TextBox 5"/>
+          <p:cNvSpPr txBox="1"/>
+          <p:nvPr/>
+        </p:nvSpPr>
+        <p:spPr>
+          <a:xfrm>
+            <a:off x="822960" y="2440000"/>
+            <a:ext cx="10515600" cy="500000"/>
+          </a:xfrm>
+          <a:prstGeom prst="rect">
+            <a:avLst/>
+          </a:prstGeom>
+          <a:noFill/>
+        </p:spPr>
+        <p:txBody>
+          <a:bodyPr wrap="square" lIns="0" rIns="0" tIns="0" bIns="0">
+            <a:spAutoFit/>
+          </a:bodyPr>
+          <a:lstStyle/>
+          <a:p>
+            <a:pPr algn="l"/>
+            <a:r>
+              <a:rPr sz="1250" b="1" i="0">
+                <a:solidFill>
+                  <a:srgbClr val="1A2E5C"/>
+                </a:solidFill>
+                <a:latin typeface="Calibri"/>
+              </a:rPr>
+              <a:t>Calidad del aire — Risaralda · CVC  </a:t>
+            </a:r>
+            <a:r>
+              <a:rPr sz="1250" b="0" i="0">
+                <a:solidFill>
+                  <a:srgbClr val="2C3E50"/>
+                </a:solidFill>
+                <a:latin typeface="Calibri"/>
+              </a:rPr>
+              <a:t>(ID </a:t>
+            </a:r>
+            <a:r>
+              <a:rPr sz="1250" b="1" i="0">
+                <a:solidFill>
+                  <a:srgbClr val="2C3E50"/>
+                </a:solidFill>
+                <a:latin typeface="Calibri"/>
+              </a:rPr>
+              <a:t>53gx-j5pc</a:t>
+            </a:r>
+            <a:r>
+              <a:rPr sz="1250" b="0" i="0">
+                <a:solidFill>
+                  <a:srgbClr val="2C3E50"/>
+                </a:solidFill>
+                <a:latin typeface="Calibri"/>
+              </a:rPr>
+              <a:t>) · 500 registros · última fecha 2023-07-30 · tendencia </a:t>
+            </a:r>
+            <a:r>
+              <a:rPr sz="1250" b="1" i="0">
+                <a:solidFill>
+                  <a:srgbClr val="12A36A"/>
+                </a:solidFill>
+                <a:latin typeface="Calibri"/>
+              </a:rPr>
+              <a:t>estable</a:t>
+            </a:r>
+            <a:r>
+              <a:rPr sz="1250" b="0" i="0">
+                <a:solidFill>
+                  <a:srgbClr val="2C3E50"/>
+                </a:solidFill>
+                <a:latin typeface="Calibri"/>
+              </a:rPr>
+              <a:t> · confianza </a:t>
+            </a:r>
+            <a:r>
+              <a:rPr sz="1250" b="1" i="0">
+                <a:solidFill>
+                  <a:srgbClr val="F39C12"/>
+                </a:solidFill>
+                <a:latin typeface="Calibri"/>
+              </a:rPr>
+              <a:t>media</a:t>
+            </a:r>
+            <a:r>
+              <a:rPr sz="1250" b="0" i="1">
+                <a:solidFill>
+                  <a:srgbClr val="7B8794"/>
+                </a:solidFill>
+                <a:latin typeface="Calibri"/>
+              </a:rPr>
+              <a:t> (R²=0.23, MAPE=9.85%)</a:t>
+            </a:r>
+          </a:p>
+        </p:txBody>
+      </p:sp>
+      <p:sp>
+        <p:nvSpPr>
+          <p:cNvPr id="7" name="Rounded Rectangle 6"/>
+          <p:cNvSpPr/>
+          <p:nvPr/>
+        </p:nvSpPr>
+        <p:spPr>
+          <a:xfrm>
+            <a:off x="548640" y="3474720"/>
+            <a:ext cx="5394960" cy="1097280"/>
           </a:xfrm>
           <a:prstGeom prst="roundRect">
-            <a:avLst>
-              <a:gd name="adj" fmla="val 2093"/>
-            </a:avLst>
+            <a:avLst/>
           </a:prstGeom>
           <a:solidFill>
             <a:srgbClr val="FFFFFF"/>
@@ -25927,583 +27632,193 @@
             <a:solidFill>
               <a:srgbClr val="E1E6EC"/>
             </a:solidFill>
-            <a:prstDash val="solid"/>
           </a:ln>
-          <a:effectLst>
-            <a:outerShdw blurRad="88900" dist="38100" dir="5400000" algn="bl" rotWithShape="0">
-              <a:srgbClr val="1A2E5C">
-                <a:alpha val="16000"/>
-              </a:srgbClr>
-            </a:outerShdw>
-          </a:effectLst>
-        </p:spPr>
-        <p:txBody>
-          <a:bodyPr/>
-          <a:lstStyle/>
-          <a:p>
-            <a:endParaRPr lang="en-US"/>
-          </a:p>
-        </p:txBody>
-      </p:sp>
-      <p:sp>
-        <p:nvSpPr>
-          <p:cNvPr id="12" name="Text 10"/>
-          <p:cNvSpPr/>
-          <p:nvPr/>
-        </p:nvSpPr>
-        <p:spPr>
-          <a:xfrm>
-            <a:off x="6766560" y="2057400"/>
-            <a:ext cx="4572000" cy="365760"/>
-          </a:xfrm>
-          <a:prstGeom prst="rect">
-            <a:avLst/>
-          </a:prstGeom>
-          <a:noFill/>
-          <a:ln/>
-        </p:spPr>
-        <p:txBody>
-          <a:bodyPr wrap="square" lIns="0" tIns="0" rIns="0" bIns="0" rtlCol="0" anchor="ctr"/>
-          <a:lstStyle/>
-          <a:p>
-            <a:pPr marL="0" indent="0">
-              <a:buNone/>
-            </a:pPr>
-            <a:r>
-              <a:rPr lang="en-US" sz="1500" b="1" dirty="0">
+          <a:effectLst/>
+        </p:spPr>
+        <p:style>
+          <a:lnRef idx="1">
+            <a:schemeClr val="accent1"/>
+          </a:lnRef>
+          <a:fillRef idx="3">
+            <a:schemeClr val="accent1"/>
+          </a:fillRef>
+          <a:effectRef idx="2">
+            <a:schemeClr val="accent1"/>
+          </a:effectRef>
+          <a:fontRef idx="minor">
+            <a:schemeClr val="lt1"/>
+          </a:fontRef>
+        </p:style>
+        <p:txBody>
+          <a:bodyPr rtlCol="0" anchor="ctr"/>
+          <a:lstStyle/>
+          <a:p>
+            <a:pPr algn="ctr"/>
+          </a:p>
+        </p:txBody>
+      </p:sp>
+      <p:sp>
+        <p:nvSpPr>
+          <p:cNvPr id="8" name="Oval 7"/>
+          <p:cNvSpPr/>
+          <p:nvPr/>
+        </p:nvSpPr>
+        <p:spPr>
+          <a:xfrm>
+            <a:off x="804672" y="3749040"/>
+            <a:ext cx="548640" cy="548640"/>
+          </a:xfrm>
+          <a:prstGeom prst="ellipse">
+            <a:avLst/>
+          </a:prstGeom>
+          <a:solidFill>
+            <a:srgbClr val="1A2E5C"/>
+          </a:solidFill>
+          <a:ln>
+            <a:noFill/>
+          </a:ln>
+          <a:effectLst/>
+        </p:spPr>
+        <p:style>
+          <a:lnRef idx="1">
+            <a:schemeClr val="accent1"/>
+          </a:lnRef>
+          <a:fillRef idx="3">
+            <a:schemeClr val="accent1"/>
+          </a:fillRef>
+          <a:effectRef idx="2">
+            <a:schemeClr val="accent1"/>
+          </a:effectRef>
+          <a:fontRef idx="minor">
+            <a:schemeClr val="lt1"/>
+          </a:fontRef>
+        </p:style>
+        <p:txBody>
+          <a:bodyPr rtlCol="0" anchor="ctr"/>
+          <a:lstStyle/>
+          <a:p>
+            <a:pPr algn="ctr"/>
+          </a:p>
+        </p:txBody>
+      </p:sp>
+      <p:sp>
+        <p:nvSpPr>
+          <p:cNvPr id="9" name="TextBox 8"/>
+          <p:cNvSpPr txBox="1"/>
+          <p:nvPr/>
+        </p:nvSpPr>
+        <p:spPr>
+          <a:xfrm>
+            <a:off x="804672" y="3749040"/>
+            <a:ext cx="548640" cy="548640"/>
+          </a:xfrm>
+          <a:prstGeom prst="rect">
+            <a:avLst/>
+          </a:prstGeom>
+          <a:noFill/>
+        </p:spPr>
+        <p:txBody>
+          <a:bodyPr wrap="square" lIns="0" rIns="0" tIns="0" bIns="0" anchor="t">
+            <a:spAutoFit/>
+          </a:bodyPr>
+          <a:lstStyle/>
+          <a:p>
+            <a:pPr algn="ctr"/>
+            <a:r>
+              <a:rPr sz="2000" b="1" i="0">
+                <a:solidFill>
+                  <a:srgbClr val="FFFFFF"/>
+                </a:solidFill>
+                <a:latin typeface="Calibri"/>
+              </a:rPr>
+              <a:t>🤖</a:t>
+            </a:r>
+          </a:p>
+        </p:txBody>
+      </p:sp>
+      <p:sp>
+        <p:nvSpPr>
+          <p:cNvPr id="10" name="TextBox 9"/>
+          <p:cNvSpPr txBox="1"/>
+          <p:nvPr/>
+        </p:nvSpPr>
+        <p:spPr>
+          <a:xfrm>
+            <a:off x="1554480" y="3602736"/>
+            <a:ext cx="4206240" cy="365760"/>
+          </a:xfrm>
+          <a:prstGeom prst="rect">
+            <a:avLst/>
+          </a:prstGeom>
+          <a:noFill/>
+        </p:spPr>
+        <p:txBody>
+          <a:bodyPr wrap="square" lIns="0" rIns="0" tIns="0" bIns="0">
+            <a:spAutoFit/>
+          </a:bodyPr>
+          <a:lstStyle/>
+          <a:p>
+            <a:pPr algn="l"/>
+            <a:r>
+              <a:rPr sz="1350" b="1" i="0">
                 <a:solidFill>
                   <a:srgbClr val="1A2E5C"/>
                 </a:solidFill>
-                <a:latin typeface="Calibri" pitchFamily="34" charset="0"/>
-                <a:ea typeface="Calibri" pitchFamily="34" charset="-122"/>
-                <a:cs typeface="Calibri" pitchFamily="34" charset="-120"/>
-              </a:rPr>
-              <a:t>Cruce con SIEDCO (datos.gov.co)</a:t>
-            </a:r>
-            <a:endParaRPr lang="en-US" sz="1500" dirty="0"/>
-          </a:p>
-        </p:txBody>
-      </p:sp>
-      <p:sp>
-        <p:nvSpPr>
-          <p:cNvPr id="13" name="Text 11"/>
-          <p:cNvSpPr/>
-          <p:nvPr/>
-        </p:nvSpPr>
-        <p:spPr>
-          <a:xfrm>
-            <a:off x="6766560" y="2468880"/>
-            <a:ext cx="4572000" cy="640080"/>
-          </a:xfrm>
-          <a:prstGeom prst="rect">
-            <a:avLst/>
-          </a:prstGeom>
-          <a:noFill/>
-          <a:ln/>
-        </p:spPr>
-        <p:txBody>
-          <a:bodyPr wrap="square" lIns="0" tIns="0" rIns="0" bIns="0" rtlCol="0" anchor="ctr"/>
-          <a:lstStyle/>
-          <a:p>
-            <a:pPr marL="0" indent="0">
-              <a:buNone/>
-            </a:pPr>
-            <a:r>
-              <a:rPr lang="en-US" sz="1250" dirty="0">
+                <a:latin typeface="Calibri"/>
+              </a:rPr>
+              <a:t>La interpretación la escribe la IA</a:t>
+            </a:r>
+          </a:p>
+        </p:txBody>
+      </p:sp>
+      <p:sp>
+        <p:nvSpPr>
+          <p:cNvPr id="11" name="TextBox 10"/>
+          <p:cNvSpPr txBox="1"/>
+          <p:nvPr/>
+        </p:nvSpPr>
+        <p:spPr>
+          <a:xfrm>
+            <a:off x="1554480" y="3959352"/>
+            <a:ext cx="4251960" cy="548640"/>
+          </a:xfrm>
+          <a:prstGeom prst="rect">
+            <a:avLst/>
+          </a:prstGeom>
+          <a:noFill/>
+        </p:spPr>
+        <p:txBody>
+          <a:bodyPr wrap="square" lIns="0" rIns="0" tIns="0" bIns="0">
+            <a:spAutoFit/>
+          </a:bodyPr>
+          <a:lstStyle/>
+          <a:p>
+            <a:pPr algn="l"/>
+            <a:r>
+              <a:rPr sz="1030" b="0" i="0">
                 <a:solidFill>
                   <a:srgbClr val="2C3E50"/>
                 </a:solidFill>
-                <a:latin typeface="Calibri" pitchFamily="34" charset="0"/>
-                <a:ea typeface="Calibri" pitchFamily="34" charset="-122"/>
-                <a:cs typeface="Calibri" pitchFamily="34" charset="-120"/>
-              </a:rPr>
-              <a:t>La detección en vivo se contextualiza con la estadística oficial del municipio:</a:t>
-            </a:r>
-            <a:endParaRPr lang="en-US" sz="1250" dirty="0"/>
-          </a:p>
-        </p:txBody>
-      </p:sp>
-      <p:sp>
-        <p:nvSpPr>
-          <p:cNvPr id="14" name="Shape 12"/>
-          <p:cNvSpPr/>
-          <p:nvPr/>
-        </p:nvSpPr>
-        <p:spPr>
-          <a:xfrm>
-            <a:off x="6766560" y="3200400"/>
-            <a:ext cx="4572000" cy="2331720"/>
+                <a:latin typeface="Calibri"/>
+              </a:rPr>
+              <a:t>El modelo de lenguaje recibe SOLO los datos reales del dataset oficial (nunca inventa cifras) y los explica en palabras simples: compara el aire con referencias internacionales de calidad, y en seguridad describe si los casos de un municipio son altos o bajos frente a otros.</a:t>
+            </a:r>
+          </a:p>
+        </p:txBody>
+      </p:sp>
+      <p:sp>
+        <p:nvSpPr>
+          <p:cNvPr id="12" name="Rounded Rectangle 11"/>
+          <p:cNvSpPr/>
+          <p:nvPr/>
+        </p:nvSpPr>
+        <p:spPr>
+          <a:xfrm>
+            <a:off x="6217920" y="3474720"/>
+            <a:ext cx="5394960" cy="1097280"/>
           </a:xfrm>
           <a:prstGeom prst="roundRect">
-            <a:avLst>
-              <a:gd name="adj" fmla="val 3529"/>
-            </a:avLst>
-          </a:prstGeom>
-          <a:solidFill>
-            <a:srgbClr val="E8F7F0"/>
-          </a:solidFill>
-          <a:ln w="12700">
-            <a:solidFill>
-              <a:srgbClr val="E1E6EC"/>
-            </a:solidFill>
-            <a:prstDash val="solid"/>
-          </a:ln>
-          <a:effectLst>
-            <a:outerShdw blurRad="88900" dist="38100" dir="5400000" algn="bl" rotWithShape="0">
-              <a:srgbClr val="1A2E5C">
-                <a:alpha val="16000"/>
-              </a:srgbClr>
-            </a:outerShdw>
-          </a:effectLst>
-        </p:spPr>
-        <p:txBody>
-          <a:bodyPr/>
-          <a:lstStyle/>
-          <a:p>
-            <a:endParaRPr lang="en-US"/>
-          </a:p>
-        </p:txBody>
-      </p:sp>
-      <p:sp>
-        <p:nvSpPr>
-          <p:cNvPr id="15" name="Text 13"/>
-          <p:cNvSpPr/>
-          <p:nvPr/>
-        </p:nvSpPr>
-        <p:spPr>
-          <a:xfrm>
-            <a:off x="6949440" y="3383280"/>
-            <a:ext cx="4206240" cy="457200"/>
-          </a:xfrm>
-          <a:prstGeom prst="rect">
-            <a:avLst/>
-          </a:prstGeom>
-          <a:noFill/>
-          <a:ln/>
-        </p:spPr>
-        <p:txBody>
-          <a:bodyPr wrap="square" lIns="0" tIns="0" rIns="0" bIns="0" rtlCol="0" anchor="ctr"/>
-          <a:lstStyle/>
-          <a:p>
-            <a:pPr marL="0" indent="0">
-              <a:buNone/>
-            </a:pPr>
-            <a:r>
-              <a:rPr lang="en-US" sz="1300" b="1" dirty="0">
-                <a:solidFill>
-                  <a:srgbClr val="1A2E5C"/>
-                </a:solidFill>
-                <a:latin typeface="Calibri" pitchFamily="34" charset="0"/>
-                <a:ea typeface="Calibri" pitchFamily="34" charset="-122"/>
-                <a:cs typeface="Calibri" pitchFamily="34" charset="-120"/>
-              </a:rPr>
-              <a:t>“Detección: hurto a comercio en Bogotá”</a:t>
-            </a:r>
-            <a:endParaRPr lang="en-US" sz="1300" dirty="0"/>
-          </a:p>
-        </p:txBody>
-      </p:sp>
-      <p:sp>
-        <p:nvSpPr>
-          <p:cNvPr id="16" name="Text 14"/>
-          <p:cNvSpPr/>
-          <p:nvPr/>
-        </p:nvSpPr>
-        <p:spPr>
-          <a:xfrm>
-            <a:off x="6949440" y="3840480"/>
-            <a:ext cx="4206240" cy="1005840"/>
-          </a:xfrm>
-          <a:prstGeom prst="rect">
-            <a:avLst/>
-          </a:prstGeom>
-          <a:noFill/>
-          <a:ln/>
-        </p:spPr>
-        <p:txBody>
-          <a:bodyPr wrap="square" lIns="0" tIns="0" rIns="0" bIns="0" rtlCol="0" anchor="ctr"/>
-          <a:lstStyle/>
-          <a:p>
-            <a:pPr marL="0" indent="0">
-              <a:buNone/>
-            </a:pPr>
-            <a:r>
-              <a:rPr lang="en-US" sz="1250" dirty="0">
-                <a:solidFill>
-                  <a:srgbClr val="2C3E50"/>
-                </a:solidFill>
-                <a:latin typeface="Calibri" pitchFamily="34" charset="0"/>
-                <a:ea typeface="Calibri" pitchFamily="34" charset="-122"/>
-                <a:cs typeface="Calibri" pitchFamily="34" charset="-120"/>
-              </a:rPr>
-              <a:t>→ SIEDCO registra N casos de hurto a comercio en el municipio en los últimos 90 días, con tendencia a la baja.</a:t>
-            </a:r>
-            <a:endParaRPr lang="en-US" sz="1250" dirty="0"/>
-          </a:p>
-        </p:txBody>
-      </p:sp>
-      <p:sp>
-        <p:nvSpPr>
-          <p:cNvPr id="17" name="Text 15"/>
-          <p:cNvSpPr/>
-          <p:nvPr/>
-        </p:nvSpPr>
-        <p:spPr>
-          <a:xfrm>
-            <a:off x="6949440" y="4892040"/>
-            <a:ext cx="4206240" cy="548640"/>
-          </a:xfrm>
-          <a:prstGeom prst="rect">
-            <a:avLst/>
-          </a:prstGeom>
-          <a:noFill/>
-          <a:ln/>
-        </p:spPr>
-        <p:txBody>
-          <a:bodyPr wrap="square" lIns="0" tIns="0" rIns="0" bIns="0" rtlCol="0" anchor="ctr"/>
-          <a:lstStyle/>
-          <a:p>
-            <a:pPr marL="0" indent="0">
-              <a:buNone/>
-            </a:pPr>
-            <a:r>
-              <a:rPr lang="en-US" sz="1150" i="1" dirty="0">
-                <a:solidFill>
-                  <a:srgbClr val="12A36A"/>
-                </a:solidFill>
-                <a:latin typeface="Calibri" pitchFamily="34" charset="0"/>
-                <a:ea typeface="Calibri" pitchFamily="34" charset="-122"/>
-                <a:cs typeface="Calibri" pitchFamily="34" charset="-120"/>
-              </a:rPr>
-              <a:t>Detección en tiempo real + evidencia oficial = alerta accionable y defendible.</a:t>
-            </a:r>
-            <a:endParaRPr lang="en-US" sz="1150" dirty="0"/>
-          </a:p>
-        </p:txBody>
-      </p:sp>
-      <p:sp>
-        <p:nvSpPr>
-          <p:cNvPr id="18" name="Text 16"/>
-          <p:cNvSpPr/>
-          <p:nvPr/>
-        </p:nvSpPr>
-        <p:spPr>
-          <a:xfrm>
-            <a:off x="548640" y="6473952"/>
-            <a:ext cx="8229600" cy="274320"/>
-          </a:xfrm>
-          <a:prstGeom prst="rect">
-            <a:avLst/>
-          </a:prstGeom>
-          <a:noFill/>
-          <a:ln/>
-        </p:spPr>
-        <p:txBody>
-          <a:bodyPr wrap="square" lIns="0" tIns="0" rIns="0" bIns="0" rtlCol="0" anchor="ctr"/>
-          <a:lstStyle/>
-          <a:p>
-            <a:pPr marL="0" indent="0" algn="l">
-              <a:buNone/>
-            </a:pPr>
-            <a:r>
-              <a:rPr lang="en-US" sz="900" dirty="0">
-                <a:solidFill>
-                  <a:srgbClr val="7B8794"/>
-                </a:solidFill>
-                <a:latin typeface="Calibri" pitchFamily="34" charset="0"/>
-                <a:ea typeface="Calibri" pitchFamily="34" charset="-122"/>
-                <a:cs typeface="Calibri" pitchFamily="34" charset="-120"/>
-              </a:rPr>
-              <a:t>VigIA · Equipo 80 — Concurso Datos al Ecosistema 2026</a:t>
-            </a:r>
-            <a:endParaRPr lang="en-US" sz="900" dirty="0"/>
-          </a:p>
-        </p:txBody>
-      </p:sp>
-      <p:sp>
-        <p:nvSpPr>
-          <p:cNvPr id="19" name="Text 17"/>
-          <p:cNvSpPr/>
-          <p:nvPr/>
-        </p:nvSpPr>
-        <p:spPr>
-          <a:xfrm>
-            <a:off x="11155680" y="6473952"/>
-            <a:ext cx="457200" cy="274320"/>
-          </a:xfrm>
-          <a:prstGeom prst="rect">
-            <a:avLst/>
-          </a:prstGeom>
-          <a:noFill/>
-          <a:ln/>
-        </p:spPr>
-        <p:txBody>
-          <a:bodyPr wrap="square" lIns="0" tIns="0" rIns="0" bIns="0" rtlCol="0" anchor="ctr"/>
-          <a:lstStyle/>
-          <a:p>
-            <a:pPr marL="0" indent="0" algn="r">
-              <a:buNone/>
-            </a:pPr>
-            <a:r>
-              <a:rPr lang="en-US" sz="900" dirty="0">
-                <a:solidFill>
-                  <a:srgbClr val="7B8794"/>
-                </a:solidFill>
-                <a:latin typeface="Calibri" pitchFamily="34" charset="0"/>
-                <a:ea typeface="Calibri" pitchFamily="34" charset="-122"/>
-                <a:cs typeface="Calibri" pitchFamily="34" charset="-120"/>
-              </a:rPr>
-              <a:t>8</a:t>
-            </a:r>
-            <a:endParaRPr lang="en-US" sz="900" dirty="0"/>
-          </a:p>
-        </p:txBody>
-      </p:sp>
-    </p:spTree>
-  </p:cSld>
-  <p:clrMapOvr>
-    <a:masterClrMapping/>
-  </p:clrMapOvr>
-</p:sld>
-</file>
-
-<file path=ppt/slides/slide9.xml><?xml version="1.0" encoding="utf-8"?>
-<p:sld xmlns:a="http://schemas.openxmlformats.org/drawingml/2006/main" xmlns:r="http://schemas.openxmlformats.org/officeDocument/2006/relationships" xmlns:p="http://schemas.openxmlformats.org/presentationml/2006/main">
-  <p:cSld name="Slide 9">
-    <p:bg>
-      <p:bgPr>
-        <a:solidFill>
-          <a:srgbClr val="FFFFFF"/>
-        </a:solidFill>
-        <a:effectLst/>
-      </p:bgPr>
-    </p:bg>
-    <p:spTree>
-      <p:nvGrpSpPr>
-        <p:cNvPr id="1" name=""/>
-        <p:cNvGrpSpPr/>
-        <p:nvPr/>
-      </p:nvGrpSpPr>
-      <p:grpSpPr>
-        <a:xfrm>
-          <a:off x="0" y="0"/>
-          <a:ext cx="0" cy="0"/>
-          <a:chOff x="0" y="0"/>
-          <a:chExt cx="0" cy="0"/>
-        </a:xfrm>
-      </p:grpSpPr>
-      <p:sp>
-        <p:nvSpPr>
-          <p:cNvPr id="2" name="Text 0"/>
-          <p:cNvSpPr/>
-          <p:nvPr/>
-        </p:nvSpPr>
-        <p:spPr>
-          <a:xfrm>
-            <a:off x="548640" y="411480"/>
-            <a:ext cx="10058400" cy="274320"/>
-          </a:xfrm>
-          <a:prstGeom prst="rect">
-            <a:avLst/>
-          </a:prstGeom>
-          <a:noFill/>
-          <a:ln/>
-        </p:spPr>
-        <p:txBody>
-          <a:bodyPr wrap="square" lIns="0" tIns="0" rIns="0" bIns="0" rtlCol="0" anchor="ctr"/>
-          <a:lstStyle/>
-          <a:p>
-            <a:pPr marL="0" indent="0">
-              <a:buNone/>
-            </a:pPr>
-            <a:r>
-              <a:rPr lang="en-US" sz="1200" b="1" kern="0" spc="200" dirty="0">
-                <a:solidFill>
-                  <a:srgbClr val="12A36A"/>
-                </a:solidFill>
-                <a:latin typeface="Calibri" pitchFamily="34" charset="0"/>
-                <a:ea typeface="Calibri" pitchFamily="34" charset="-122"/>
-                <a:cs typeface="Calibri" pitchFamily="34" charset="-120"/>
-              </a:rPr>
-              <a:t>GOBERNANZA DE IA</a:t>
-            </a:r>
-            <a:endParaRPr lang="en-US" sz="1200" dirty="0"/>
-          </a:p>
-        </p:txBody>
-      </p:sp>
-      <p:sp>
-        <p:nvSpPr>
-          <p:cNvPr id="3" name="Text 1"/>
-          <p:cNvSpPr/>
-          <p:nvPr/>
-        </p:nvSpPr>
-        <p:spPr>
-          <a:xfrm>
-            <a:off x="548640" y="658368"/>
-            <a:ext cx="11064240" cy="731520"/>
-          </a:xfrm>
-          <a:prstGeom prst="rect">
-            <a:avLst/>
-          </a:prstGeom>
-          <a:noFill/>
-          <a:ln/>
-        </p:spPr>
-        <p:txBody>
-          <a:bodyPr wrap="square" lIns="0" tIns="0" rIns="0" bIns="0" rtlCol="0" anchor="ctr"/>
-          <a:lstStyle/>
-          <a:p>
-            <a:pPr marL="0" indent="0">
-              <a:buNone/>
-            </a:pPr>
-            <a:r>
-              <a:rPr lang="en-US" sz="3000" b="1" dirty="0">
-                <a:solidFill>
-                  <a:srgbClr val="1A2E5C"/>
-                </a:solidFill>
-                <a:latin typeface="Calibri" pitchFamily="34" charset="0"/>
-                <a:ea typeface="Calibri" pitchFamily="34" charset="-122"/>
-                <a:cs typeface="Calibri" pitchFamily="34" charset="-120"/>
-              </a:rPr>
-              <a:t>Cada respuesta es verificable — IA de apoyo, no caja negra</a:t>
-            </a:r>
-            <a:endParaRPr lang="en-US" sz="3000" dirty="0"/>
-          </a:p>
-        </p:txBody>
-      </p:sp>
-      <p:sp>
-        <p:nvSpPr>
-          <p:cNvPr id="4" name="Shape 2"/>
-          <p:cNvSpPr/>
-          <p:nvPr/>
-        </p:nvSpPr>
-        <p:spPr>
-          <a:xfrm>
-            <a:off x="548640" y="1874520"/>
-            <a:ext cx="11064240" cy="1371600"/>
-          </a:xfrm>
-          <a:prstGeom prst="roundRect">
-            <a:avLst>
-              <a:gd name="adj" fmla="val 6000"/>
-            </a:avLst>
-          </a:prstGeom>
-          <a:solidFill>
-            <a:srgbClr val="E8F7F0"/>
-          </a:solidFill>
-          <a:ln w="12700">
-            <a:solidFill>
-              <a:srgbClr val="E1E6EC"/>
-            </a:solidFill>
-            <a:prstDash val="solid"/>
-          </a:ln>
-          <a:effectLst>
-            <a:outerShdw blurRad="88900" dist="38100" dir="5400000" algn="bl" rotWithShape="0">
-              <a:srgbClr val="1A2E5C">
-                <a:alpha val="16000"/>
-              </a:srgbClr>
-            </a:outerShdw>
-          </a:effectLst>
-        </p:spPr>
-        <p:txBody>
-          <a:bodyPr/>
-          <a:lstStyle/>
-          <a:p>
-            <a:endParaRPr lang="en-US"/>
-          </a:p>
-        </p:txBody>
-      </p:sp>
-      <p:sp>
-        <p:nvSpPr>
-          <p:cNvPr id="5" name="Text 3"/>
-          <p:cNvSpPr/>
-          <p:nvPr/>
-        </p:nvSpPr>
-        <p:spPr>
-          <a:xfrm>
-            <a:off x="822960" y="2057400"/>
-            <a:ext cx="5486400" cy="365760"/>
-          </a:xfrm>
-          <a:prstGeom prst="rect">
-            <a:avLst/>
-          </a:prstGeom>
-          <a:noFill/>
-          <a:ln/>
-        </p:spPr>
-        <p:txBody>
-          <a:bodyPr wrap="square" lIns="0" tIns="0" rIns="0" bIns="0" rtlCol="0" anchor="ctr"/>
-          <a:lstStyle/>
-          <a:p>
-            <a:pPr marL="0" indent="0">
-              <a:buNone/>
-            </a:pPr>
-            <a:r>
-              <a:rPr lang="en-US" sz="1500" b="1" dirty="0">
-                <a:solidFill>
-                  <a:srgbClr val="12A36A"/>
-                </a:solidFill>
-                <a:latin typeface="Calibri" pitchFamily="34" charset="0"/>
-                <a:ea typeface="Calibri" pitchFamily="34" charset="-122"/>
-                <a:cs typeface="Calibri" pitchFamily="34" charset="-120"/>
-              </a:rPr>
-              <a:t>Procedencia en cada respuesta</a:t>
-            </a:r>
-            <a:endParaRPr lang="en-US" sz="1500" dirty="0"/>
-          </a:p>
-        </p:txBody>
-      </p:sp>
-      <p:sp>
-        <p:nvSpPr>
-          <p:cNvPr id="6" name="Text 4"/>
-          <p:cNvSpPr/>
-          <p:nvPr/>
-        </p:nvSpPr>
-        <p:spPr>
-          <a:xfrm>
-            <a:off x="822960" y="2487168"/>
-            <a:ext cx="10515600" cy="640080"/>
-          </a:xfrm>
-          <a:prstGeom prst="rect">
-            <a:avLst/>
-          </a:prstGeom>
-          <a:noFill/>
-          <a:ln/>
-        </p:spPr>
-        <p:txBody>
-          <a:bodyPr wrap="square" lIns="0" tIns="0" rIns="0" bIns="0" rtlCol="0" anchor="ctr"/>
-          <a:lstStyle/>
-          <a:p>
-            <a:pPr marL="0" indent="0">
-              <a:buNone/>
-            </a:pPr>
-            <a:r>
-              <a:rPr lang="en-US" sz="1300" dirty="0">
-                <a:solidFill>
-                  <a:srgbClr val="2C3E50"/>
-                </a:solidFill>
-                <a:latin typeface="Calibri" pitchFamily="34" charset="0"/>
-                <a:ea typeface="Calibri" pitchFamily="34" charset="-122"/>
-                <a:cs typeface="Calibri" pitchFamily="34" charset="-120"/>
-              </a:rPr>
-              <a:t>📊  Fuente · ID del dataset · Municipio · N.º de registros · Última fecha · Consultado (fecha/hora)   —   distintivo “IA de apoyo, verificable”</a:t>
-            </a:r>
-            <a:endParaRPr lang="en-US" sz="1300" dirty="0"/>
-          </a:p>
-        </p:txBody>
-      </p:sp>
-      <p:sp>
-        <p:nvSpPr>
-          <p:cNvPr id="7" name="Shape 5"/>
-          <p:cNvSpPr/>
-          <p:nvPr/>
-        </p:nvSpPr>
-        <p:spPr>
-          <a:xfrm>
-            <a:off x="548640" y="3474720"/>
-            <a:ext cx="5394960" cy="1097280"/>
-          </a:xfrm>
-          <a:prstGeom prst="roundRect">
-            <a:avLst>
-              <a:gd name="adj" fmla="val 7500"/>
-            </a:avLst>
+            <a:avLst/>
           </a:prstGeom>
           <a:solidFill>
             <a:srgbClr val="FFFFFF"/>
@@ -26512,190 +27827,193 @@
             <a:solidFill>
               <a:srgbClr val="E1E6EC"/>
             </a:solidFill>
-            <a:prstDash val="solid"/>
           </a:ln>
-          <a:effectLst>
-            <a:outerShdw blurRad="88900" dist="38100" dir="5400000" algn="bl" rotWithShape="0">
-              <a:srgbClr val="1A2E5C">
-                <a:alpha val="16000"/>
-              </a:srgbClr>
-            </a:outerShdw>
-          </a:effectLst>
-        </p:spPr>
-        <p:txBody>
-          <a:bodyPr/>
-          <a:lstStyle/>
-          <a:p>
-            <a:endParaRPr lang="en-US"/>
-          </a:p>
-        </p:txBody>
-      </p:sp>
-      <p:sp>
-        <p:nvSpPr>
-          <p:cNvPr id="8" name="Shape 6"/>
-          <p:cNvSpPr/>
-          <p:nvPr/>
-        </p:nvSpPr>
-        <p:spPr>
-          <a:xfrm>
-            <a:off x="804672" y="3749040"/>
+          <a:effectLst/>
+        </p:spPr>
+        <p:style>
+          <a:lnRef idx="1">
+            <a:schemeClr val="accent1"/>
+          </a:lnRef>
+          <a:fillRef idx="3">
+            <a:schemeClr val="accent1"/>
+          </a:fillRef>
+          <a:effectRef idx="2">
+            <a:schemeClr val="accent1"/>
+          </a:effectRef>
+          <a:fontRef idx="minor">
+            <a:schemeClr val="lt1"/>
+          </a:fontRef>
+        </p:style>
+        <p:txBody>
+          <a:bodyPr rtlCol="0" anchor="ctr"/>
+          <a:lstStyle/>
+          <a:p>
+            <a:pPr algn="ctr"/>
+          </a:p>
+        </p:txBody>
+      </p:sp>
+      <p:sp>
+        <p:nvSpPr>
+          <p:cNvPr id="13" name="Oval 12"/>
+          <p:cNvSpPr/>
+          <p:nvPr/>
+        </p:nvSpPr>
+        <p:spPr>
+          <a:xfrm>
+            <a:off x="6473952" y="3749040"/>
             <a:ext cx="548640" cy="548640"/>
           </a:xfrm>
           <a:prstGeom prst="ellipse">
             <a:avLst/>
           </a:prstGeom>
           <a:solidFill>
-            <a:srgbClr val="12A36A"/>
+            <a:srgbClr val="2563AB"/>
           </a:solidFill>
-          <a:ln/>
-          <a:effectLst>
-            <a:outerShdw blurRad="88900" dist="38100" dir="5400000" algn="bl" rotWithShape="0">
-              <a:srgbClr val="1A2E5C">
-                <a:alpha val="16000"/>
-              </a:srgbClr>
-            </a:outerShdw>
-          </a:effectLst>
-        </p:spPr>
-        <p:txBody>
-          <a:bodyPr/>
-          <a:lstStyle/>
-          <a:p>
-            <a:endParaRPr lang="en-US"/>
-          </a:p>
-        </p:txBody>
-      </p:sp>
-      <p:sp>
-        <p:nvSpPr>
-          <p:cNvPr id="9" name="Text 7"/>
-          <p:cNvSpPr/>
-          <p:nvPr/>
-        </p:nvSpPr>
-        <p:spPr>
-          <a:xfrm>
-            <a:off x="804672" y="3749040"/>
+          <a:ln>
+            <a:noFill/>
+          </a:ln>
+          <a:effectLst/>
+        </p:spPr>
+        <p:style>
+          <a:lnRef idx="1">
+            <a:schemeClr val="accent1"/>
+          </a:lnRef>
+          <a:fillRef idx="3">
+            <a:schemeClr val="accent1"/>
+          </a:fillRef>
+          <a:effectRef idx="2">
+            <a:schemeClr val="accent1"/>
+          </a:effectRef>
+          <a:fontRef idx="minor">
+            <a:schemeClr val="lt1"/>
+          </a:fontRef>
+        </p:style>
+        <p:txBody>
+          <a:bodyPr rtlCol="0" anchor="ctr"/>
+          <a:lstStyle/>
+          <a:p>
+            <a:pPr algn="ctr"/>
+          </a:p>
+        </p:txBody>
+      </p:sp>
+      <p:sp>
+        <p:nvSpPr>
+          <p:cNvPr id="14" name="TextBox 13"/>
+          <p:cNvSpPr txBox="1"/>
+          <p:nvPr/>
+        </p:nvSpPr>
+        <p:spPr>
+          <a:xfrm>
+            <a:off x="6473952" y="3749040"/>
             <a:ext cx="548640" cy="548640"/>
           </a:xfrm>
           <a:prstGeom prst="rect">
             <a:avLst/>
           </a:prstGeom>
           <a:noFill/>
-          <a:ln/>
-        </p:spPr>
-        <p:txBody>
-          <a:bodyPr wrap="square" lIns="0" tIns="0" rIns="0" bIns="0" rtlCol="0" anchor="ctr"/>
-          <a:lstStyle/>
-          <a:p>
-            <a:pPr marL="0" indent="0" algn="ctr">
-              <a:buNone/>
-            </a:pPr>
-            <a:r>
-              <a:rPr lang="en-US" sz="1200" b="1" dirty="0">
+        </p:spPr>
+        <p:txBody>
+          <a:bodyPr wrap="square" lIns="0" rIns="0" tIns="0" bIns="0" anchor="t">
+            <a:spAutoFit/>
+          </a:bodyPr>
+          <a:lstStyle/>
+          <a:p>
+            <a:pPr algn="ctr"/>
+            <a:r>
+              <a:rPr sz="2000" b="1" i="0">
                 <a:solidFill>
                   <a:srgbClr val="FFFFFF"/>
                 </a:solidFill>
-                <a:latin typeface="Calibri" pitchFamily="34" charset="0"/>
-                <a:ea typeface="Calibri" pitchFamily="34" charset="-122"/>
-                <a:cs typeface="Calibri" pitchFamily="34" charset="-120"/>
-              </a:rPr>
-              <a:t>✓</a:t>
-            </a:r>
-            <a:endParaRPr lang="en-US" sz="1200" dirty="0"/>
-          </a:p>
-        </p:txBody>
-      </p:sp>
-      <p:sp>
-        <p:nvSpPr>
-          <p:cNvPr id="10" name="Text 8"/>
-          <p:cNvSpPr/>
-          <p:nvPr/>
-        </p:nvSpPr>
-        <p:spPr>
-          <a:xfrm>
-            <a:off x="1554480" y="3602736"/>
+                <a:latin typeface="Calibri"/>
+              </a:rPr>
+              <a:t>📈</a:t>
+            </a:r>
+          </a:p>
+        </p:txBody>
+      </p:sp>
+      <p:sp>
+        <p:nvSpPr>
+          <p:cNvPr id="15" name="TextBox 14"/>
+          <p:cNvSpPr txBox="1"/>
+          <p:nvPr/>
+        </p:nvSpPr>
+        <p:spPr>
+          <a:xfrm>
+            <a:off x="7223760" y="3602736"/>
             <a:ext cx="4206240" cy="365760"/>
           </a:xfrm>
           <a:prstGeom prst="rect">
             <a:avLst/>
           </a:prstGeom>
           <a:noFill/>
-          <a:ln/>
-        </p:spPr>
-        <p:txBody>
-          <a:bodyPr wrap="square" lIns="0" tIns="0" rIns="0" bIns="0" rtlCol="0" anchor="ctr"/>
-          <a:lstStyle/>
-          <a:p>
-            <a:pPr marL="0" indent="0">
-              <a:buNone/>
-            </a:pPr>
-            <a:r>
-              <a:rPr lang="en-US" sz="1400" b="1" dirty="0">
+        </p:spPr>
+        <p:txBody>
+          <a:bodyPr wrap="square" lIns="0" rIns="0" tIns="0" bIns="0">
+            <a:spAutoFit/>
+          </a:bodyPr>
+          <a:lstStyle/>
+          <a:p>
+            <a:pPr algn="l"/>
+            <a:r>
+              <a:rPr sz="1350" b="1" i="0">
                 <a:solidFill>
                   <a:srgbClr val="1A2E5C"/>
                 </a:solidFill>
-                <a:latin typeface="Calibri" pitchFamily="34" charset="0"/>
-                <a:ea typeface="Calibri" pitchFamily="34" charset="-122"/>
-                <a:cs typeface="Calibri" pitchFamily="34" charset="-120"/>
-              </a:rPr>
-              <a:t>Solo con datos reales</a:t>
-            </a:r>
-            <a:endParaRPr lang="en-US" sz="1400" dirty="0"/>
-          </a:p>
-        </p:txBody>
-      </p:sp>
-      <p:sp>
-        <p:nvSpPr>
-          <p:cNvPr id="11" name="Text 9"/>
-          <p:cNvSpPr/>
-          <p:nvPr/>
-        </p:nvSpPr>
-        <p:spPr>
-          <a:xfrm>
-            <a:off x="1554480" y="3959352"/>
+                <a:latin typeface="Calibri"/>
+              </a:rPr>
+              <a:t>La tendencia la calcula una fórmula</a:t>
+            </a:r>
+          </a:p>
+        </p:txBody>
+      </p:sp>
+      <p:sp>
+        <p:nvSpPr>
+          <p:cNvPr id="16" name="TextBox 15"/>
+          <p:cNvSpPr txBox="1"/>
+          <p:nvPr/>
+        </p:nvSpPr>
+        <p:spPr>
+          <a:xfrm>
+            <a:off x="7223760" y="3959352"/>
             <a:ext cx="4251960" cy="548640"/>
           </a:xfrm>
           <a:prstGeom prst="rect">
             <a:avLst/>
           </a:prstGeom>
           <a:noFill/>
-          <a:ln/>
-        </p:spPr>
-        <p:txBody>
-          <a:bodyPr wrap="square" lIns="0" tIns="0" rIns="0" bIns="0" rtlCol="0" anchor="ctr"/>
-          <a:lstStyle/>
-          <a:p>
-            <a:pPr marL="0" indent="0">
-              <a:buNone/>
-            </a:pPr>
-            <a:r>
-              <a:rPr lang="en-US" sz="1100" dirty="0">
+        </p:spPr>
+        <p:txBody>
+          <a:bodyPr wrap="square" lIns="0" rIns="0" tIns="0" bIns="0">
+            <a:spAutoFit/>
+          </a:bodyPr>
+          <a:lstStyle/>
+          <a:p>
+            <a:pPr algn="l"/>
+            <a:r>
+              <a:rPr sz="1030" b="0" i="0">
                 <a:solidFill>
                   <a:srgbClr val="2C3E50"/>
                 </a:solidFill>
-                <a:latin typeface="Calibri" pitchFamily="34" charset="0"/>
-                <a:ea typeface="Calibri" pitchFamily="34" charset="-122"/>
-                <a:cs typeface="Calibri" pitchFamily="34" charset="-120"/>
-              </a:rPr>
-              <a:t>Los prompts obligan a responder únicamente con los datos entregados; si no alcanzan, lo declara.</a:t>
-            </a:r>
-            <a:endParaRPr lang="en-US" sz="1100" dirty="0"/>
-          </a:p>
-        </p:txBody>
-      </p:sp>
-      <p:sp>
-        <p:nvSpPr>
-          <p:cNvPr id="12" name="Shape 10"/>
-          <p:cNvSpPr/>
-          <p:nvPr/>
-        </p:nvSpPr>
-        <p:spPr>
-          <a:xfrm>
-            <a:off x="6217920" y="3474720"/>
+                <a:latin typeface="Calibri"/>
+              </a:rPr>
+              <a:t>“Estable”, “alza” o “baja” NO lo decide la IA: es una regresión lineal sobre el histórico. Si el cambio diario promedio es menor al 1%, el sistema marca “estable” — automáticamente, sin intervención humana ni del modelo de lenguaje.</a:t>
+            </a:r>
+          </a:p>
+        </p:txBody>
+      </p:sp>
+      <p:sp>
+        <p:nvSpPr>
+          <p:cNvPr id="17" name="Rounded Rectangle 16"/>
+          <p:cNvSpPr/>
+          <p:nvPr/>
+        </p:nvSpPr>
+        <p:spPr>
+          <a:xfrm>
+            <a:off x="548640" y="4754880"/>
             <a:ext cx="5394960" cy="1097280"/>
           </a:xfrm>
           <a:prstGeom prst="roundRect">
-            <a:avLst>
-              <a:gd name="adj" fmla="val 7500"/>
-            </a:avLst>
+            <a:avLst/>
           </a:prstGeom>
           <a:solidFill>
             <a:srgbClr val="FFFFFF"/>
@@ -26704,33 +28022,40 @@
             <a:solidFill>
               <a:srgbClr val="E1E6EC"/>
             </a:solidFill>
-            <a:prstDash val="solid"/>
           </a:ln>
-          <a:effectLst>
-            <a:outerShdw blurRad="88900" dist="38100" dir="5400000" algn="bl" rotWithShape="0">
-              <a:srgbClr val="1A2E5C">
-                <a:alpha val="16000"/>
-              </a:srgbClr>
-            </a:outerShdw>
-          </a:effectLst>
-        </p:spPr>
-        <p:txBody>
-          <a:bodyPr/>
-          <a:lstStyle/>
-          <a:p>
-            <a:endParaRPr lang="en-US"/>
-          </a:p>
-        </p:txBody>
-      </p:sp>
-      <p:sp>
-        <p:nvSpPr>
-          <p:cNvPr id="13" name="Shape 11"/>
-          <p:cNvSpPr/>
-          <p:nvPr/>
-        </p:nvSpPr>
-        <p:spPr>
-          <a:xfrm>
-            <a:off x="6473952" y="3749040"/>
+          <a:effectLst/>
+        </p:spPr>
+        <p:style>
+          <a:lnRef idx="1">
+            <a:schemeClr val="accent1"/>
+          </a:lnRef>
+          <a:fillRef idx="3">
+            <a:schemeClr val="accent1"/>
+          </a:fillRef>
+          <a:effectRef idx="2">
+            <a:schemeClr val="accent1"/>
+          </a:effectRef>
+          <a:fontRef idx="minor">
+            <a:schemeClr val="lt1"/>
+          </a:fontRef>
+        </p:style>
+        <p:txBody>
+          <a:bodyPr rtlCol="0" anchor="ctr"/>
+          <a:lstStyle/>
+          <a:p>
+            <a:pPr algn="ctr"/>
+          </a:p>
+        </p:txBody>
+      </p:sp>
+      <p:sp>
+        <p:nvSpPr>
+          <p:cNvPr id="18" name="Oval 17"/>
+          <p:cNvSpPr/>
+          <p:nvPr/>
+        </p:nvSpPr>
+        <p:spPr>
+          <a:xfrm>
+            <a:off x="804672" y="5029200"/>
             <a:ext cx="548640" cy="548640"/>
           </a:xfrm>
           <a:prstGeom prst="ellipse">
@@ -26739,155 +28064,151 @@
           <a:solidFill>
             <a:srgbClr val="12A36A"/>
           </a:solidFill>
-          <a:ln/>
-          <a:effectLst>
-            <a:outerShdw blurRad="88900" dist="38100" dir="5400000" algn="bl" rotWithShape="0">
-              <a:srgbClr val="1A2E5C">
-                <a:alpha val="16000"/>
-              </a:srgbClr>
-            </a:outerShdw>
-          </a:effectLst>
-        </p:spPr>
-        <p:txBody>
-          <a:bodyPr/>
-          <a:lstStyle/>
-          <a:p>
-            <a:endParaRPr lang="en-US"/>
-          </a:p>
-        </p:txBody>
-      </p:sp>
-      <p:sp>
-        <p:nvSpPr>
-          <p:cNvPr id="14" name="Text 12"/>
-          <p:cNvSpPr/>
-          <p:nvPr/>
-        </p:nvSpPr>
-        <p:spPr>
-          <a:xfrm>
-            <a:off x="6473952" y="3749040"/>
+          <a:ln>
+            <a:noFill/>
+          </a:ln>
+          <a:effectLst/>
+        </p:spPr>
+        <p:style>
+          <a:lnRef idx="1">
+            <a:schemeClr val="accent1"/>
+          </a:lnRef>
+          <a:fillRef idx="3">
+            <a:schemeClr val="accent1"/>
+          </a:fillRef>
+          <a:effectRef idx="2">
+            <a:schemeClr val="accent1"/>
+          </a:effectRef>
+          <a:fontRef idx="minor">
+            <a:schemeClr val="lt1"/>
+          </a:fontRef>
+        </p:style>
+        <p:txBody>
+          <a:bodyPr rtlCol="0" anchor="ctr"/>
+          <a:lstStyle/>
+          <a:p>
+            <a:pPr algn="ctr"/>
+          </a:p>
+        </p:txBody>
+      </p:sp>
+      <p:sp>
+        <p:nvSpPr>
+          <p:cNvPr id="19" name="TextBox 18"/>
+          <p:cNvSpPr txBox="1"/>
+          <p:nvPr/>
+        </p:nvSpPr>
+        <p:spPr>
+          <a:xfrm>
+            <a:off x="804672" y="5029200"/>
             <a:ext cx="548640" cy="548640"/>
           </a:xfrm>
           <a:prstGeom prst="rect">
             <a:avLst/>
           </a:prstGeom>
           <a:noFill/>
-          <a:ln/>
-        </p:spPr>
-        <p:txBody>
-          <a:bodyPr wrap="square" lIns="0" tIns="0" rIns="0" bIns="0" rtlCol="0" anchor="ctr"/>
-          <a:lstStyle/>
-          <a:p>
-            <a:pPr marL="0" indent="0" algn="ctr">
-              <a:buNone/>
-            </a:pPr>
-            <a:r>
-              <a:rPr lang="en-US" sz="1200" b="1" dirty="0">
+        </p:spPr>
+        <p:txBody>
+          <a:bodyPr wrap="square" lIns="0" rIns="0" tIns="0" bIns="0" anchor="t">
+            <a:spAutoFit/>
+          </a:bodyPr>
+          <a:lstStyle/>
+          <a:p>
+            <a:pPr algn="ctr"/>
+            <a:r>
+              <a:rPr sz="2000" b="1" i="0">
                 <a:solidFill>
                   <a:srgbClr val="FFFFFF"/>
                 </a:solidFill>
-                <a:latin typeface="Calibri" pitchFamily="34" charset="0"/>
-                <a:ea typeface="Calibri" pitchFamily="34" charset="-122"/>
-                <a:cs typeface="Calibri" pitchFamily="34" charset="-120"/>
-              </a:rPr>
-              <a:t>✓</a:t>
-            </a:r>
-            <a:endParaRPr lang="en-US" sz="1200" dirty="0"/>
-          </a:p>
-        </p:txBody>
-      </p:sp>
-      <p:sp>
-        <p:nvSpPr>
-          <p:cNvPr id="15" name="Text 13"/>
-          <p:cNvSpPr/>
-          <p:nvPr/>
-        </p:nvSpPr>
-        <p:spPr>
-          <a:xfrm>
-            <a:off x="7223760" y="3602736"/>
+                <a:latin typeface="Calibri"/>
+              </a:rPr>
+              <a:t>🎯</a:t>
+            </a:r>
+          </a:p>
+        </p:txBody>
+      </p:sp>
+      <p:sp>
+        <p:nvSpPr>
+          <p:cNvPr id="20" name="TextBox 19"/>
+          <p:cNvSpPr txBox="1"/>
+          <p:nvPr/>
+        </p:nvSpPr>
+        <p:spPr>
+          <a:xfrm>
+            <a:off x="1554480" y="4882896"/>
             <a:ext cx="4206240" cy="365760"/>
           </a:xfrm>
           <a:prstGeom prst="rect">
             <a:avLst/>
           </a:prstGeom>
           <a:noFill/>
-          <a:ln/>
-        </p:spPr>
-        <p:txBody>
-          <a:bodyPr wrap="square" lIns="0" tIns="0" rIns="0" bIns="0" rtlCol="0" anchor="ctr"/>
-          <a:lstStyle/>
-          <a:p>
-            <a:pPr marL="0" indent="0">
-              <a:buNone/>
-            </a:pPr>
-            <a:r>
-              <a:rPr lang="en-US" sz="1400" b="1" dirty="0">
+        </p:spPr>
+        <p:txBody>
+          <a:bodyPr wrap="square" lIns="0" rIns="0" tIns="0" bIns="0">
+            <a:spAutoFit/>
+          </a:bodyPr>
+          <a:lstStyle/>
+          <a:p>
+            <a:pPr algn="l"/>
+            <a:r>
+              <a:rPr sz="1350" b="1" i="0">
                 <a:solidFill>
                   <a:srgbClr val="1A2E5C"/>
                 </a:solidFill>
-                <a:latin typeface="Calibri" pitchFamily="34" charset="0"/>
-                <a:ea typeface="Calibri" pitchFamily="34" charset="-122"/>
-                <a:cs typeface="Calibri" pitchFamily="34" charset="-120"/>
-              </a:rPr>
-              <a:t>Analítica auditable</a:t>
-            </a:r>
-            <a:endParaRPr lang="en-US" sz="1400" dirty="0"/>
-          </a:p>
-        </p:txBody>
-      </p:sp>
-      <p:sp>
-        <p:nvSpPr>
-          <p:cNvPr id="16" name="Text 14"/>
-          <p:cNvSpPr/>
-          <p:nvPr/>
-        </p:nvSpPr>
-        <p:spPr>
-          <a:xfrm>
-            <a:off x="7223760" y="3959352"/>
+                <a:latin typeface="Calibri"/>
+              </a:rPr>
+              <a:t>La confianza se calcula sola</a:t>
+            </a:r>
+          </a:p>
+        </p:txBody>
+      </p:sp>
+      <p:sp>
+        <p:nvSpPr>
+          <p:cNvPr id="21" name="TextBox 20"/>
+          <p:cNvSpPr txBox="1"/>
+          <p:nvPr/>
+        </p:nvSpPr>
+        <p:spPr>
+          <a:xfrm>
+            <a:off x="1554480" y="5239512"/>
             <a:ext cx="4251960" cy="548640"/>
           </a:xfrm>
           <a:prstGeom prst="rect">
             <a:avLst/>
           </a:prstGeom>
           <a:noFill/>
-          <a:ln/>
-        </p:spPr>
-        <p:txBody>
-          <a:bodyPr wrap="square" lIns="0" tIns="0" rIns="0" bIns="0" rtlCol="0" anchor="ctr"/>
-          <a:lstStyle/>
-          <a:p>
-            <a:pPr marL="0" indent="0">
-              <a:buNone/>
-            </a:pPr>
-            <a:r>
-              <a:rPr lang="en-US" sz="1100" dirty="0">
+        </p:spPr>
+        <p:txBody>
+          <a:bodyPr wrap="square" lIns="0" rIns="0" tIns="0" bIns="0">
+            <a:spAutoFit/>
+          </a:bodyPr>
+          <a:lstStyle/>
+          <a:p>
+            <a:pPr algn="l"/>
+            <a:r>
+              <a:rPr sz="1030" b="0" i="0">
                 <a:solidFill>
                   <a:srgbClr val="2C3E50"/>
                 </a:solidFill>
-                <a:latin typeface="Calibri" pitchFamily="34" charset="0"/>
-                <a:ea typeface="Calibri" pitchFamily="34" charset="-122"/>
-                <a:cs typeface="Calibri" pitchFamily="34" charset="-120"/>
-              </a:rPr>
-              <a:t>Predicción y alertas se calculan en código, reproducibles y con métricas.</a:t>
-            </a:r>
-            <a:endParaRPr lang="en-US" sz="1100" dirty="0"/>
-          </a:p>
-        </p:txBody>
-      </p:sp>
-      <p:sp>
-        <p:nvSpPr>
-          <p:cNvPr id="17" name="Shape 15"/>
-          <p:cNvSpPr/>
-          <p:nvPr/>
-        </p:nvSpPr>
-        <p:spPr>
-          <a:xfrm>
-            <a:off x="548640" y="4754880"/>
+                <a:latin typeface="Calibri"/>
+              </a:rPr>
+              <a:t>El R² y el MAPE del backtesting definen si la confianza es alta, media o baja con una regla fija (ej. MAPE≤15% y R²≥0.5 → alta). Con MAPE=9.85% y R²=0.23, el sistema marcó “media”, sin que nadie lo decidiera a mano.</a:t>
+            </a:r>
+          </a:p>
+        </p:txBody>
+      </p:sp>
+      <p:sp>
+        <p:nvSpPr>
+          <p:cNvPr id="22" name="Rounded Rectangle 21"/>
+          <p:cNvSpPr/>
+          <p:nvPr/>
+        </p:nvSpPr>
+        <p:spPr>
+          <a:xfrm>
+            <a:off x="6217920" y="4754880"/>
             <a:ext cx="5394960" cy="1097280"/>
           </a:xfrm>
           <a:prstGeom prst="roundRect">
-            <a:avLst>
-              <a:gd name="adj" fmla="val 7500"/>
-            </a:avLst>
+            <a:avLst/>
           </a:prstGeom>
           <a:solidFill>
             <a:srgbClr val="FFFFFF"/>
@@ -26896,219 +28217,34 @@
             <a:solidFill>
               <a:srgbClr val="E1E6EC"/>
             </a:solidFill>
-            <a:prstDash val="solid"/>
           </a:ln>
-          <a:effectLst>
-            <a:outerShdw blurRad="88900" dist="38100" dir="5400000" algn="bl" rotWithShape="0">
-              <a:srgbClr val="1A2E5C">
-                <a:alpha val="16000"/>
-              </a:srgbClr>
-            </a:outerShdw>
-          </a:effectLst>
-        </p:spPr>
-        <p:txBody>
-          <a:bodyPr/>
-          <a:lstStyle/>
-          <a:p>
-            <a:endParaRPr lang="en-US"/>
-          </a:p>
-        </p:txBody>
-      </p:sp>
-      <p:sp>
-        <p:nvSpPr>
-          <p:cNvPr id="18" name="Shape 16"/>
-          <p:cNvSpPr/>
-          <p:nvPr/>
-        </p:nvSpPr>
-        <p:spPr>
-          <a:xfrm>
-            <a:off x="804672" y="5029200"/>
-            <a:ext cx="548640" cy="548640"/>
-          </a:xfrm>
-          <a:prstGeom prst="ellipse">
-            <a:avLst/>
-          </a:prstGeom>
-          <a:solidFill>
-            <a:srgbClr val="12A36A"/>
-          </a:solidFill>
-          <a:ln/>
-          <a:effectLst>
-            <a:outerShdw blurRad="88900" dist="38100" dir="5400000" algn="bl" rotWithShape="0">
-              <a:srgbClr val="1A2E5C">
-                <a:alpha val="16000"/>
-              </a:srgbClr>
-            </a:outerShdw>
-          </a:effectLst>
-        </p:spPr>
-        <p:txBody>
-          <a:bodyPr/>
-          <a:lstStyle/>
-          <a:p>
-            <a:endParaRPr lang="en-US"/>
-          </a:p>
-        </p:txBody>
-      </p:sp>
-      <p:sp>
-        <p:nvSpPr>
-          <p:cNvPr id="19" name="Text 17"/>
-          <p:cNvSpPr/>
-          <p:nvPr/>
-        </p:nvSpPr>
-        <p:spPr>
-          <a:xfrm>
-            <a:off x="804672" y="5029200"/>
-            <a:ext cx="548640" cy="548640"/>
-          </a:xfrm>
-          <a:prstGeom prst="rect">
-            <a:avLst/>
-          </a:prstGeom>
-          <a:noFill/>
-          <a:ln/>
-        </p:spPr>
-        <p:txBody>
-          <a:bodyPr wrap="square" lIns="0" tIns="0" rIns="0" bIns="0" rtlCol="0" anchor="ctr"/>
-          <a:lstStyle/>
-          <a:p>
-            <a:pPr marL="0" indent="0" algn="ctr">
-              <a:buNone/>
-            </a:pPr>
-            <a:r>
-              <a:rPr lang="en-US" sz="1200" b="1" dirty="0">
-                <a:solidFill>
-                  <a:srgbClr val="FFFFFF"/>
-                </a:solidFill>
-                <a:latin typeface="Calibri" pitchFamily="34" charset="0"/>
-                <a:ea typeface="Calibri" pitchFamily="34" charset="-122"/>
-                <a:cs typeface="Calibri" pitchFamily="34" charset="-120"/>
-              </a:rPr>
-              <a:t>✓</a:t>
-            </a:r>
-            <a:endParaRPr lang="en-US" sz="1200" dirty="0"/>
-          </a:p>
-        </p:txBody>
-      </p:sp>
-      <p:sp>
-        <p:nvSpPr>
-          <p:cNvPr id="20" name="Text 18"/>
-          <p:cNvSpPr/>
-          <p:nvPr/>
-        </p:nvSpPr>
-        <p:spPr>
-          <a:xfrm>
-            <a:off x="1554480" y="4882896"/>
-            <a:ext cx="4206240" cy="365760"/>
-          </a:xfrm>
-          <a:prstGeom prst="rect">
-            <a:avLst/>
-          </a:prstGeom>
-          <a:noFill/>
-          <a:ln/>
-        </p:spPr>
-        <p:txBody>
-          <a:bodyPr wrap="square" lIns="0" tIns="0" rIns="0" bIns="0" rtlCol="0" anchor="ctr"/>
-          <a:lstStyle/>
-          <a:p>
-            <a:pPr marL="0" indent="0">
-              <a:buNone/>
-            </a:pPr>
-            <a:r>
-              <a:rPr lang="en-US" sz="1400" b="1" dirty="0">
-                <a:solidFill>
-                  <a:srgbClr val="1A2E5C"/>
-                </a:solidFill>
-                <a:latin typeface="Calibri" pitchFamily="34" charset="0"/>
-                <a:ea typeface="Calibri" pitchFamily="34" charset="-122"/>
-                <a:cs typeface="Calibri" pitchFamily="34" charset="-120"/>
-              </a:rPr>
-              <a:t>Sin identificación individual</a:t>
-            </a:r>
-            <a:endParaRPr lang="en-US" sz="1400" dirty="0"/>
-          </a:p>
-        </p:txBody>
-      </p:sp>
-      <p:sp>
-        <p:nvSpPr>
-          <p:cNvPr id="21" name="Text 19"/>
-          <p:cNvSpPr/>
-          <p:nvPr/>
-        </p:nvSpPr>
-        <p:spPr>
-          <a:xfrm>
-            <a:off x="1554480" y="5239512"/>
-            <a:ext cx="4251960" cy="548640"/>
-          </a:xfrm>
-          <a:prstGeom prst="rect">
-            <a:avLst/>
-          </a:prstGeom>
-          <a:noFill/>
-          <a:ln/>
-        </p:spPr>
-        <p:txBody>
-          <a:bodyPr wrap="square" lIns="0" tIns="0" rIns="0" bIns="0" rtlCol="0" anchor="ctr"/>
-          <a:lstStyle/>
-          <a:p>
-            <a:pPr marL="0" indent="0">
-              <a:buNone/>
-            </a:pPr>
-            <a:r>
-              <a:rPr lang="en-US" sz="1100" dirty="0">
-                <a:solidFill>
-                  <a:srgbClr val="2C3E50"/>
-                </a:solidFill>
-                <a:latin typeface="Calibri" pitchFamily="34" charset="0"/>
-                <a:ea typeface="Calibri" pitchFamily="34" charset="-122"/>
-                <a:cs typeface="Calibri" pitchFamily="34" charset="-120"/>
-              </a:rPr>
-              <a:t>La visión clasifica acciones, no personas. Sin biometría facial.</a:t>
-            </a:r>
-            <a:endParaRPr lang="en-US" sz="1100" dirty="0"/>
-          </a:p>
-        </p:txBody>
-      </p:sp>
-      <p:sp>
-        <p:nvSpPr>
-          <p:cNvPr id="22" name="Shape 20"/>
-          <p:cNvSpPr/>
-          <p:nvPr/>
-        </p:nvSpPr>
-        <p:spPr>
-          <a:xfrm>
-            <a:off x="6217920" y="4754880"/>
-            <a:ext cx="5394960" cy="1097280"/>
-          </a:xfrm>
-          <a:prstGeom prst="roundRect">
-            <a:avLst>
-              <a:gd name="adj" fmla="val 7500"/>
-            </a:avLst>
-          </a:prstGeom>
-          <a:solidFill>
-            <a:srgbClr val="FFFFFF"/>
-          </a:solidFill>
-          <a:ln w="12700">
-            <a:solidFill>
-              <a:srgbClr val="E1E6EC"/>
-            </a:solidFill>
-            <a:prstDash val="solid"/>
-          </a:ln>
-          <a:effectLst>
-            <a:outerShdw blurRad="88900" dist="38100" dir="5400000" algn="bl" rotWithShape="0">
-              <a:srgbClr val="1A2E5C">
-                <a:alpha val="16000"/>
-              </a:srgbClr>
-            </a:outerShdw>
-          </a:effectLst>
-        </p:spPr>
-        <p:txBody>
-          <a:bodyPr/>
-          <a:lstStyle/>
-          <a:p>
-            <a:endParaRPr lang="en-US"/>
-          </a:p>
-        </p:txBody>
-      </p:sp>
-      <p:sp>
-        <p:nvSpPr>
-          <p:cNvPr id="23" name="Shape 21"/>
+          <a:effectLst/>
+        </p:spPr>
+        <p:style>
+          <a:lnRef idx="1">
+            <a:schemeClr val="accent1"/>
+          </a:lnRef>
+          <a:fillRef idx="3">
+            <a:schemeClr val="accent1"/>
+          </a:fillRef>
+          <a:effectRef idx="2">
+            <a:schemeClr val="accent1"/>
+          </a:effectRef>
+          <a:fontRef idx="minor">
+            <a:schemeClr val="lt1"/>
+          </a:fontRef>
+        </p:style>
+        <p:txBody>
+          <a:bodyPr rtlCol="0" anchor="ctr"/>
+          <a:lstStyle/>
+          <a:p>
+            <a:pPr algn="ctr"/>
+          </a:p>
+        </p:txBody>
+      </p:sp>
+      <p:sp>
+        <p:nvSpPr>
+          <p:cNvPr id="23" name="Oval 22"/>
           <p:cNvSpPr/>
           <p:nvPr/>
         </p:nvSpPr>
@@ -27121,29 +28257,39 @@
             <a:avLst/>
           </a:prstGeom>
           <a:solidFill>
-            <a:srgbClr val="12A36A"/>
+            <a:srgbClr val="F39C12"/>
           </a:solidFill>
-          <a:ln/>
-          <a:effectLst>
-            <a:outerShdw blurRad="88900" dist="38100" dir="5400000" algn="bl" rotWithShape="0">
-              <a:srgbClr val="1A2E5C">
-                <a:alpha val="16000"/>
-              </a:srgbClr>
-            </a:outerShdw>
-          </a:effectLst>
-        </p:spPr>
-        <p:txBody>
-          <a:bodyPr/>
-          <a:lstStyle/>
-          <a:p>
-            <a:endParaRPr lang="en-US"/>
-          </a:p>
-        </p:txBody>
-      </p:sp>
-      <p:sp>
-        <p:nvSpPr>
-          <p:cNvPr id="24" name="Text 22"/>
-          <p:cNvSpPr/>
+          <a:ln>
+            <a:noFill/>
+          </a:ln>
+          <a:effectLst/>
+        </p:spPr>
+        <p:style>
+          <a:lnRef idx="1">
+            <a:schemeClr val="accent1"/>
+          </a:lnRef>
+          <a:fillRef idx="3">
+            <a:schemeClr val="accent1"/>
+          </a:fillRef>
+          <a:effectRef idx="2">
+            <a:schemeClr val="accent1"/>
+          </a:effectRef>
+          <a:fontRef idx="minor">
+            <a:schemeClr val="lt1"/>
+          </a:fontRef>
+        </p:style>
+        <p:txBody>
+          <a:bodyPr rtlCol="0" anchor="ctr"/>
+          <a:lstStyle/>
+          <a:p>
+            <a:pPr algn="ctr"/>
+          </a:p>
+        </p:txBody>
+      </p:sp>
+      <p:sp>
+        <p:nvSpPr>
+          <p:cNvPr id="24" name="TextBox 23"/>
+          <p:cNvSpPr txBox="1"/>
           <p:nvPr/>
         </p:nvSpPr>
         <p:spPr>
@@ -27155,34 +28301,30 @@
             <a:avLst/>
           </a:prstGeom>
           <a:noFill/>
-          <a:ln/>
-        </p:spPr>
-        <p:txBody>
-          <a:bodyPr wrap="square" lIns="0" tIns="0" rIns="0" bIns="0" rtlCol="0" anchor="ctr"/>
-          <a:lstStyle/>
-          <a:p>
-            <a:pPr marL="0" indent="0" algn="ctr">
-              <a:buNone/>
-            </a:pPr>
-            <a:r>
-              <a:rPr lang="en-US" sz="1200" b="1" dirty="0">
+        </p:spPr>
+        <p:txBody>
+          <a:bodyPr wrap="square" lIns="0" rIns="0" tIns="0" bIns="0" anchor="t">
+            <a:spAutoFit/>
+          </a:bodyPr>
+          <a:lstStyle/>
+          <a:p>
+            <a:pPr algn="ctr"/>
+            <a:r>
+              <a:rPr sz="2000" b="1" i="0">
                 <a:solidFill>
                   <a:srgbClr val="FFFFFF"/>
                 </a:solidFill>
-                <a:latin typeface="Calibri" pitchFamily="34" charset="0"/>
-                <a:ea typeface="Calibri" pitchFamily="34" charset="-122"/>
-                <a:cs typeface="Calibri" pitchFamily="34" charset="-120"/>
-              </a:rPr>
-              <a:t>✓</a:t>
-            </a:r>
-            <a:endParaRPr lang="en-US" sz="1200" dirty="0"/>
-          </a:p>
-        </p:txBody>
-      </p:sp>
-      <p:sp>
-        <p:nvSpPr>
-          <p:cNvPr id="25" name="Text 23"/>
-          <p:cNvSpPr/>
+                <a:latin typeface="Calibri"/>
+              </a:rPr>
+              <a:t>⏱</a:t>
+            </a:r>
+          </a:p>
+        </p:txBody>
+      </p:sp>
+      <p:sp>
+        <p:nvSpPr>
+          <p:cNvPr id="25" name="TextBox 24"/>
+          <p:cNvSpPr txBox="1"/>
           <p:nvPr/>
         </p:nvSpPr>
         <p:spPr>
@@ -27194,34 +28336,30 @@
             <a:avLst/>
           </a:prstGeom>
           <a:noFill/>
-          <a:ln/>
-        </p:spPr>
-        <p:txBody>
-          <a:bodyPr wrap="square" lIns="0" tIns="0" rIns="0" bIns="0" rtlCol="0" anchor="ctr"/>
-          <a:lstStyle/>
-          <a:p>
-            <a:pPr marL="0" indent="0">
-              <a:buNone/>
-            </a:pPr>
-            <a:r>
-              <a:rPr lang="en-US" sz="1400" b="1" dirty="0">
+        </p:spPr>
+        <p:txBody>
+          <a:bodyPr wrap="square" lIns="0" rIns="0" tIns="0" bIns="0">
+            <a:spAutoFit/>
+          </a:bodyPr>
+          <a:lstStyle/>
+          <a:p>
+            <a:pPr algn="l"/>
+            <a:r>
+              <a:rPr sz="1350" b="1" i="0">
                 <a:solidFill>
                   <a:srgbClr val="1A2E5C"/>
                 </a:solidFill>
-                <a:latin typeface="Calibri" pitchFamily="34" charset="0"/>
-                <a:ea typeface="Calibri" pitchFamily="34" charset="-122"/>
-                <a:cs typeface="Calibri" pitchFamily="34" charset="-120"/>
-              </a:rPr>
-              <a:t>Revisión humana</a:t>
-            </a:r>
-            <a:endParaRPr lang="en-US" sz="1400" dirty="0"/>
-          </a:p>
-        </p:txBody>
-      </p:sp>
-      <p:sp>
-        <p:nvSpPr>
-          <p:cNvPr id="26" name="Text 24"/>
-          <p:cNvSpPr/>
+                <a:latin typeface="Calibri"/>
+              </a:rPr>
+              <a:t>Consultamos en vivo, no en caché</a:t>
+            </a:r>
+          </a:p>
+        </p:txBody>
+      </p:sp>
+      <p:sp>
+        <p:nvSpPr>
+          <p:cNvPr id="26" name="TextBox 25"/>
+          <p:cNvSpPr txBox="1"/>
           <p:nvPr/>
         </p:nvSpPr>
         <p:spPr>
@@ -27233,34 +28371,30 @@
             <a:avLst/>
           </a:prstGeom>
           <a:noFill/>
-          <a:ln/>
-        </p:spPr>
-        <p:txBody>
-          <a:bodyPr wrap="square" lIns="0" tIns="0" rIns="0" bIns="0" rtlCol="0" anchor="ctr"/>
-          <a:lstStyle/>
-          <a:p>
-            <a:pPr marL="0" indent="0">
-              <a:buNone/>
-            </a:pPr>
-            <a:r>
-              <a:rPr lang="en-US" sz="1100" dirty="0">
+        </p:spPr>
+        <p:txBody>
+          <a:bodyPr wrap="square" lIns="0" rIns="0" tIns="0" bIns="0">
+            <a:spAutoFit/>
+          </a:bodyPr>
+          <a:lstStyle/>
+          <a:p>
+            <a:pPr algn="l"/>
+            <a:r>
+              <a:rPr sz="1030" b="0" i="0">
                 <a:solidFill>
                   <a:srgbClr val="2C3E50"/>
                 </a:solidFill>
-                <a:latin typeface="Calibri" pitchFamily="34" charset="0"/>
-                <a:ea typeface="Calibri" pitchFamily="34" charset="-122"/>
-                <a:cs typeface="Calibri" pitchFamily="34" charset="-120"/>
-              </a:rPr>
-              <a:t>Las alertas son de apoyo; ninguna decisión es automática.</a:t>
-            </a:r>
-            <a:endParaRPr lang="en-US" sz="1100" dirty="0"/>
-          </a:p>
-        </p:txBody>
-      </p:sp>
-      <p:sp>
-        <p:nvSpPr>
-          <p:cNvPr id="27" name="Text 25"/>
-          <p:cNvSpPr/>
+                <a:latin typeface="Calibri"/>
+              </a:rPr>
+              <a:t>Cada vez que un ciudadano abre una consulta, VigIA llama en ese instante a la API oficial de datos.gov.co — sin espera ni almacenamiento previo. El sensor IoT envía sus lecturas de forma continua y las alertas se revisan cada 60 segundos.</a:t>
+            </a:r>
+          </a:p>
+        </p:txBody>
+      </p:sp>
+      <p:sp>
+        <p:nvSpPr>
+          <p:cNvPr id="27" name="TextBox 26"/>
+          <p:cNvSpPr txBox="1"/>
           <p:nvPr/>
         </p:nvSpPr>
         <p:spPr>
@@ -27272,34 +28406,30 @@
             <a:avLst/>
           </a:prstGeom>
           <a:noFill/>
-          <a:ln/>
-        </p:spPr>
-        <p:txBody>
-          <a:bodyPr wrap="square" lIns="0" tIns="0" rIns="0" bIns="0" rtlCol="0" anchor="ctr"/>
-          <a:lstStyle/>
-          <a:p>
-            <a:pPr marL="0" indent="0" algn="l">
-              <a:buNone/>
-            </a:pPr>
-            <a:r>
-              <a:rPr lang="en-US" sz="900" dirty="0">
+        </p:spPr>
+        <p:txBody>
+          <a:bodyPr wrap="square" lIns="0" rIns="0" tIns="0" bIns="0">
+            <a:spAutoFit/>
+          </a:bodyPr>
+          <a:lstStyle/>
+          <a:p>
+            <a:pPr algn="l"/>
+            <a:r>
+              <a:rPr sz="900" b="0" i="0">
                 <a:solidFill>
                   <a:srgbClr val="7B8794"/>
                 </a:solidFill>
-                <a:latin typeface="Calibri" pitchFamily="34" charset="0"/>
-                <a:ea typeface="Calibri" pitchFamily="34" charset="-122"/>
-                <a:cs typeface="Calibri" pitchFamily="34" charset="-120"/>
+                <a:latin typeface="Calibri"/>
               </a:rPr>
               <a:t>VigIA · Equipo 80 — Concurso Datos al Ecosistema 2026</a:t>
             </a:r>
-            <a:endParaRPr lang="en-US" sz="900" dirty="0"/>
-          </a:p>
-        </p:txBody>
-      </p:sp>
-      <p:sp>
-        <p:nvSpPr>
-          <p:cNvPr id="28" name="Text 26"/>
-          <p:cNvSpPr/>
+          </a:p>
+        </p:txBody>
+      </p:sp>
+      <p:sp>
+        <p:nvSpPr>
+          <p:cNvPr id="28" name="TextBox 27"/>
+          <p:cNvSpPr txBox="1"/>
           <p:nvPr/>
         </p:nvSpPr>
         <p:spPr>
@@ -27311,27 +28441,23 @@
             <a:avLst/>
           </a:prstGeom>
           <a:noFill/>
-          <a:ln/>
-        </p:spPr>
-        <p:txBody>
-          <a:bodyPr wrap="square" lIns="0" tIns="0" rIns="0" bIns="0" rtlCol="0" anchor="ctr"/>
-          <a:lstStyle/>
-          <a:p>
-            <a:pPr marL="0" indent="0" algn="r">
-              <a:buNone/>
-            </a:pPr>
-            <a:r>
-              <a:rPr lang="en-US" sz="900" dirty="0">
+        </p:spPr>
+        <p:txBody>
+          <a:bodyPr wrap="square" lIns="0" rIns="0" tIns="0" bIns="0">
+            <a:spAutoFit/>
+          </a:bodyPr>
+          <a:lstStyle/>
+          <a:p>
+            <a:pPr algn="r"/>
+            <a:r>
+              <a:rPr sz="900" b="0" i="0">
                 <a:solidFill>
                   <a:srgbClr val="7B8794"/>
                 </a:solidFill>
-                <a:latin typeface="Calibri" pitchFamily="34" charset="0"/>
-                <a:ea typeface="Calibri" pitchFamily="34" charset="-122"/>
-                <a:cs typeface="Calibri" pitchFamily="34" charset="-120"/>
-              </a:rPr>
-              <a:t>9</a:t>
-            </a:r>
-            <a:endParaRPr lang="en-US" sz="900" dirty="0"/>
+                <a:latin typeface="Calibri"/>
+              </a:rPr>
+              <a:t>7</a:t>
+            </a:r>
           </a:p>
         </p:txBody>
       </p:sp>
